--- a/files/inst414_spring2026/lectures/lecture_13_feature_importance.pptx
+++ b/files/inst414_spring2026/lectures/lecture_13_feature_importance.pptx
@@ -3,24 +3,25 @@
 <p:presentation xmlns:a="http://schemas.openxmlformats.org/drawingml/2006/main" xmlns:r="http://schemas.openxmlformats.org/officeDocument/2006/relationships" xmlns:p="http://schemas.openxmlformats.org/presentationml/2006/main" saveSubsetFonts="1" autoCompressPictures="0">
   <p:sldMasterIdLst>
     <p:sldMasterId id="2147483648" r:id="rId1"/>
+    <p:sldMasterId id="2147483660" r:id="rId2"/>
   </p:sldMasterIdLst>
   <p:sldIdLst>
-    <p:sldId id="256" r:id="rId7"/>
-    <p:sldId id="257" r:id="rId8"/>
-    <p:sldId id="258" r:id="rId9"/>
-    <p:sldId id="259" r:id="rId10"/>
-    <p:sldId id="260" r:id="rId11"/>
-    <p:sldId id="261" r:id="rId12"/>
-    <p:sldId id="262" r:id="rId13"/>
-    <p:sldId id="263" r:id="rId14"/>
-    <p:sldId id="264" r:id="rId15"/>
-    <p:sldId id="265" r:id="rId16"/>
-    <p:sldId id="266" r:id="rId17"/>
-    <p:sldId id="267" r:id="rId18"/>
-    <p:sldId id="268" r:id="rId19"/>
-    <p:sldId id="269" r:id="rId20"/>
+    <p:sldId id="270" r:id="rId3"/>
+    <p:sldId id="257" r:id="rId4"/>
+    <p:sldId id="258" r:id="rId5"/>
+    <p:sldId id="259" r:id="rId6"/>
+    <p:sldId id="260" r:id="rId7"/>
+    <p:sldId id="261" r:id="rId8"/>
+    <p:sldId id="262" r:id="rId9"/>
+    <p:sldId id="263" r:id="rId10"/>
+    <p:sldId id="264" r:id="rId11"/>
+    <p:sldId id="265" r:id="rId12"/>
+    <p:sldId id="266" r:id="rId13"/>
+    <p:sldId id="267" r:id="rId14"/>
+    <p:sldId id="268" r:id="rId15"/>
+    <p:sldId id="269" r:id="rId16"/>
   </p:sldIdLst>
-  <p:sldSz cx="12191695" cy="6858000" type="screen4x3"/>
+  <p:sldSz cx="12192000" cy="6858000"/>
   <p:notesSz cx="6858000" cy="9144000"/>
   <p:defaultTextStyle>
     <a:defPPr>
@@ -117,6 +118,22 @@
       </a:defRPr>
     </a:lvl9pPr>
   </p:defaultTextStyle>
+  <p:extLst>
+    <p:ext uri="{EFAFB233-063F-42B5-8137-9DF3F51BA10A}">
+      <p15:sldGuideLst xmlns:p15="http://schemas.microsoft.com/office/powerpoint/2012/main">
+        <p15:guide id="1" orient="horz" pos="2160">
+          <p15:clr>
+            <a:srgbClr val="A4A3A4"/>
+          </p15:clr>
+        </p15:guide>
+        <p15:guide id="2" pos="2880">
+          <p15:clr>
+            <a:srgbClr val="A4A3A4"/>
+          </p15:clr>
+        </p15:guide>
+      </p15:sldGuideLst>
+    </p:ext>
+  </p:extLst>
 </p:presentation>
 </file>
 
@@ -158,10 +175,9 @@
           <a:lstStyle/>
           <a:p>
             <a:r>
-              <a:rPr lang="en-US" smtClean="0"/>
+              <a:rPr lang="en-US"/>
               <a:t>Click to edit Master title style</a:t>
             </a:r>
-            <a:endParaRPr lang="en-US"/>
           </a:p>
         </p:txBody>
       </p:sp>
@@ -277,10 +293,9 @@
           </a:lstStyle>
           <a:p>
             <a:r>
-              <a:rPr lang="en-US" smtClean="0"/>
+              <a:rPr lang="en-US"/>
               <a:t>Click to edit Master subtitle style</a:t>
             </a:r>
-            <a:endParaRPr lang="en-US"/>
           </a:p>
         </p:txBody>
       </p:sp>
@@ -301,7 +316,7 @@
           <a:p>
             <a:fld id="{5BCAD085-E8A6-8845-BD4E-CB4CCA059FC4}" type="datetimeFigureOut">
               <a:rPr lang="en-US" smtClean="0"/>
-              <a:t>1/27/13</a:t>
+              <a:t>4/29/2026</a:t>
             </a:fld>
             <a:endParaRPr lang="en-US"/>
           </a:p>
@@ -395,10 +410,9 @@
           <a:lstStyle/>
           <a:p>
             <a:r>
-              <a:rPr lang="en-US" smtClean="0"/>
+              <a:rPr lang="en-US"/>
               <a:t>Click to edit Master title style</a:t>
             </a:r>
-            <a:endParaRPr lang="en-US"/>
           </a:p>
         </p:txBody>
       </p:sp>
@@ -419,38 +433,37 @@
           <a:p>
             <a:pPr lvl="0"/>
             <a:r>
-              <a:rPr lang="en-US" smtClean="0"/>
+              <a:rPr lang="en-US"/>
               <a:t>Click to edit Master text styles</a:t>
             </a:r>
           </a:p>
           <a:p>
             <a:pPr lvl="1"/>
             <a:r>
-              <a:rPr lang="en-US" smtClean="0"/>
+              <a:rPr lang="en-US"/>
               <a:t>Second level</a:t>
             </a:r>
           </a:p>
           <a:p>
             <a:pPr lvl="2"/>
             <a:r>
-              <a:rPr lang="en-US" smtClean="0"/>
+              <a:rPr lang="en-US"/>
               <a:t>Third level</a:t>
             </a:r>
           </a:p>
           <a:p>
             <a:pPr lvl="3"/>
             <a:r>
-              <a:rPr lang="en-US" smtClean="0"/>
+              <a:rPr lang="en-US"/>
               <a:t>Fourth level</a:t>
             </a:r>
           </a:p>
           <a:p>
             <a:pPr lvl="4"/>
             <a:r>
-              <a:rPr lang="en-US" smtClean="0"/>
+              <a:rPr lang="en-US"/>
               <a:t>Fifth level</a:t>
             </a:r>
-            <a:endParaRPr lang="en-US"/>
           </a:p>
         </p:txBody>
       </p:sp>
@@ -471,7 +484,7 @@
           <a:p>
             <a:fld id="{5BCAD085-E8A6-8845-BD4E-CB4CCA059FC4}" type="datetimeFigureOut">
               <a:rPr lang="en-US" smtClean="0"/>
-              <a:t>1/27/13</a:t>
+              <a:t>4/29/2026</a:t>
             </a:fld>
             <a:endParaRPr lang="en-US"/>
           </a:p>
@@ -570,10 +583,9 @@
           <a:lstStyle/>
           <a:p>
             <a:r>
-              <a:rPr lang="en-US" smtClean="0"/>
+              <a:rPr lang="en-US"/>
               <a:t>Click to edit Master title style</a:t>
             </a:r>
-            <a:endParaRPr lang="en-US"/>
           </a:p>
         </p:txBody>
       </p:sp>
@@ -599,38 +611,37 @@
           <a:p>
             <a:pPr lvl="0"/>
             <a:r>
-              <a:rPr lang="en-US" smtClean="0"/>
+              <a:rPr lang="en-US"/>
               <a:t>Click to edit Master text styles</a:t>
             </a:r>
           </a:p>
           <a:p>
             <a:pPr lvl="1"/>
             <a:r>
-              <a:rPr lang="en-US" smtClean="0"/>
+              <a:rPr lang="en-US"/>
               <a:t>Second level</a:t>
             </a:r>
           </a:p>
           <a:p>
             <a:pPr lvl="2"/>
             <a:r>
-              <a:rPr lang="en-US" smtClean="0"/>
+              <a:rPr lang="en-US"/>
               <a:t>Third level</a:t>
             </a:r>
           </a:p>
           <a:p>
             <a:pPr lvl="3"/>
             <a:r>
-              <a:rPr lang="en-US" smtClean="0"/>
+              <a:rPr lang="en-US"/>
               <a:t>Fourth level</a:t>
             </a:r>
           </a:p>
           <a:p>
             <a:pPr lvl="4"/>
             <a:r>
-              <a:rPr lang="en-US" smtClean="0"/>
+              <a:rPr lang="en-US"/>
               <a:t>Fifth level</a:t>
             </a:r>
-            <a:endParaRPr lang="en-US"/>
           </a:p>
         </p:txBody>
       </p:sp>
@@ -651,7 +662,7 @@
           <a:p>
             <a:fld id="{5BCAD085-E8A6-8845-BD4E-CB4CCA059FC4}" type="datetimeFigureOut">
               <a:rPr lang="en-US" smtClean="0"/>
-              <a:t>1/27/13</a:t>
+              <a:t>4/29/2026</a:t>
             </a:fld>
             <a:endParaRPr lang="en-US"/>
           </a:p>
@@ -703,6 +714,1941 @@
     <p:extLst>
       <p:ext uri="{BB962C8B-B14F-4D97-AF65-F5344CB8AC3E}">
         <p14:creationId xmlns:p14="http://schemas.microsoft.com/office/powerpoint/2010/main" val="3612223792"/>
+      </p:ext>
+    </p:extLst>
+  </p:cSld>
+  <p:clrMapOvr>
+    <a:masterClrMapping/>
+  </p:clrMapOvr>
+</p:sldLayout>
+</file>
+
+<file path=ppt/slideLayouts/slideLayout12.xml><?xml version="1.0" encoding="utf-8"?>
+<p:sldLayout xmlns:a="http://schemas.openxmlformats.org/drawingml/2006/main" xmlns:r="http://schemas.openxmlformats.org/officeDocument/2006/relationships" xmlns:p="http://schemas.openxmlformats.org/presentationml/2006/main" type="title" preserve="1">
+  <p:cSld name="Title Slide">
+    <p:spTree>
+      <p:nvGrpSpPr>
+        <p:cNvPr id="1" name=""/>
+        <p:cNvGrpSpPr/>
+        <p:nvPr/>
+      </p:nvGrpSpPr>
+      <p:grpSpPr>
+        <a:xfrm>
+          <a:off x="0" y="0"/>
+          <a:ext cx="0" cy="0"/>
+          <a:chOff x="0" y="0"/>
+          <a:chExt cx="0" cy="0"/>
+        </a:xfrm>
+      </p:grpSpPr>
+      <p:sp>
+        <p:nvSpPr>
+          <p:cNvPr id="2" name="Title 1">
+            <a:extLst>
+              <a:ext uri="{FF2B5EF4-FFF2-40B4-BE49-F238E27FC236}">
+                <a16:creationId xmlns:a16="http://schemas.microsoft.com/office/drawing/2014/main" id="{F33D1733-1111-4020-80CF-1027A26D280F}"/>
+              </a:ext>
+            </a:extLst>
+          </p:cNvPr>
+          <p:cNvSpPr>
+            <a:spLocks noGrp="1"/>
+          </p:cNvSpPr>
+          <p:nvPr>
+            <p:ph type="ctrTitle"/>
+          </p:nvPr>
+        </p:nvSpPr>
+        <p:spPr>
+          <a:xfrm>
+            <a:off x="1524000" y="1122363"/>
+            <a:ext cx="9144000" cy="2387600"/>
+          </a:xfrm>
+        </p:spPr>
+        <p:txBody>
+          <a:bodyPr anchor="b"/>
+          <a:lstStyle>
+            <a:lvl1pPr algn="ctr">
+              <a:defRPr sz="6000"/>
+            </a:lvl1pPr>
+          </a:lstStyle>
+          <a:p>
+            <a:r>
+              <a:rPr lang="en-US"/>
+              <a:t>Click to edit Master title style</a:t>
+            </a:r>
+          </a:p>
+        </p:txBody>
+      </p:sp>
+      <p:sp>
+        <p:nvSpPr>
+          <p:cNvPr id="3" name="Subtitle 2">
+            <a:extLst>
+              <a:ext uri="{FF2B5EF4-FFF2-40B4-BE49-F238E27FC236}">
+                <a16:creationId xmlns:a16="http://schemas.microsoft.com/office/drawing/2014/main" id="{A6B31730-60D1-4195-855A-5BFAC6C8BE01}"/>
+              </a:ext>
+            </a:extLst>
+          </p:cNvPr>
+          <p:cNvSpPr>
+            <a:spLocks noGrp="1"/>
+          </p:cNvSpPr>
+          <p:nvPr>
+            <p:ph type="subTitle" idx="1"/>
+          </p:nvPr>
+        </p:nvSpPr>
+        <p:spPr>
+          <a:xfrm>
+            <a:off x="1524000" y="3602038"/>
+            <a:ext cx="9144000" cy="1655762"/>
+          </a:xfrm>
+        </p:spPr>
+        <p:txBody>
+          <a:bodyPr/>
+          <a:lstStyle>
+            <a:lvl1pPr marL="0" indent="0" algn="ctr">
+              <a:buNone/>
+              <a:defRPr sz="2400"/>
+            </a:lvl1pPr>
+            <a:lvl2pPr marL="457200" indent="0" algn="ctr">
+              <a:buNone/>
+              <a:defRPr sz="2000"/>
+            </a:lvl2pPr>
+            <a:lvl3pPr marL="914400" indent="0" algn="ctr">
+              <a:buNone/>
+              <a:defRPr sz="1800"/>
+            </a:lvl3pPr>
+            <a:lvl4pPr marL="1371600" indent="0" algn="ctr">
+              <a:buNone/>
+              <a:defRPr sz="1600"/>
+            </a:lvl4pPr>
+            <a:lvl5pPr marL="1828800" indent="0" algn="ctr">
+              <a:buNone/>
+              <a:defRPr sz="1600"/>
+            </a:lvl5pPr>
+            <a:lvl6pPr marL="2286000" indent="0" algn="ctr">
+              <a:buNone/>
+              <a:defRPr sz="1600"/>
+            </a:lvl6pPr>
+            <a:lvl7pPr marL="2743200" indent="0" algn="ctr">
+              <a:buNone/>
+              <a:defRPr sz="1600"/>
+            </a:lvl7pPr>
+            <a:lvl8pPr marL="3200400" indent="0" algn="ctr">
+              <a:buNone/>
+              <a:defRPr sz="1600"/>
+            </a:lvl8pPr>
+            <a:lvl9pPr marL="3657600" indent="0" algn="ctr">
+              <a:buNone/>
+              <a:defRPr sz="1600"/>
+            </a:lvl9pPr>
+          </a:lstStyle>
+          <a:p>
+            <a:r>
+              <a:rPr lang="en-US"/>
+              <a:t>Click to edit Master subtitle style</a:t>
+            </a:r>
+          </a:p>
+        </p:txBody>
+      </p:sp>
+      <p:sp>
+        <p:nvSpPr>
+          <p:cNvPr id="4" name="Date Placeholder 3">
+            <a:extLst>
+              <a:ext uri="{FF2B5EF4-FFF2-40B4-BE49-F238E27FC236}">
+                <a16:creationId xmlns:a16="http://schemas.microsoft.com/office/drawing/2014/main" id="{E8FFCD8F-15CA-4B78-9991-1C8A0A71B8B6}"/>
+              </a:ext>
+            </a:extLst>
+          </p:cNvPr>
+          <p:cNvSpPr>
+            <a:spLocks noGrp="1"/>
+          </p:cNvSpPr>
+          <p:nvPr>
+            <p:ph type="dt" sz="half" idx="10"/>
+          </p:nvPr>
+        </p:nvSpPr>
+        <p:spPr/>
+        <p:txBody>
+          <a:bodyPr/>
+          <a:lstStyle/>
+          <a:p>
+            <a:fld id="{1804209A-C6D7-496B-8537-5782FDB96C12}" type="datetimeFigureOut">
+              <a:rPr lang="en-US" smtClean="0"/>
+              <a:t>4/29/2026</a:t>
+            </a:fld>
+            <a:endParaRPr lang="en-US"/>
+          </a:p>
+        </p:txBody>
+      </p:sp>
+      <p:sp>
+        <p:nvSpPr>
+          <p:cNvPr id="5" name="Footer Placeholder 4">
+            <a:extLst>
+              <a:ext uri="{FF2B5EF4-FFF2-40B4-BE49-F238E27FC236}">
+                <a16:creationId xmlns:a16="http://schemas.microsoft.com/office/drawing/2014/main" id="{8F6627FA-69D8-4892-ADD0-442AE9FDEF72}"/>
+              </a:ext>
+            </a:extLst>
+          </p:cNvPr>
+          <p:cNvSpPr>
+            <a:spLocks noGrp="1"/>
+          </p:cNvSpPr>
+          <p:nvPr>
+            <p:ph type="ftr" sz="quarter" idx="11"/>
+          </p:nvPr>
+        </p:nvSpPr>
+        <p:spPr/>
+        <p:txBody>
+          <a:bodyPr/>
+          <a:lstStyle/>
+          <a:p>
+            <a:endParaRPr lang="en-US"/>
+          </a:p>
+        </p:txBody>
+      </p:sp>
+      <p:sp>
+        <p:nvSpPr>
+          <p:cNvPr id="6" name="Slide Number Placeholder 5">
+            <a:extLst>
+              <a:ext uri="{FF2B5EF4-FFF2-40B4-BE49-F238E27FC236}">
+                <a16:creationId xmlns:a16="http://schemas.microsoft.com/office/drawing/2014/main" id="{9A85B53B-A9A7-4A38-AC44-97F4F8328CA6}"/>
+              </a:ext>
+            </a:extLst>
+          </p:cNvPr>
+          <p:cNvSpPr>
+            <a:spLocks noGrp="1"/>
+          </p:cNvSpPr>
+          <p:nvPr>
+            <p:ph type="sldNum" sz="quarter" idx="12"/>
+          </p:nvPr>
+        </p:nvSpPr>
+        <p:spPr/>
+        <p:txBody>
+          <a:bodyPr/>
+          <a:lstStyle/>
+          <a:p>
+            <a:fld id="{6C87352C-6AF1-4D42-A15A-45C6FA13D254}" type="slidenum">
+              <a:rPr lang="en-US" smtClean="0"/>
+              <a:t>‹#›</a:t>
+            </a:fld>
+            <a:endParaRPr lang="en-US"/>
+          </a:p>
+        </p:txBody>
+      </p:sp>
+    </p:spTree>
+    <p:extLst>
+      <p:ext uri="{BB962C8B-B14F-4D97-AF65-F5344CB8AC3E}">
+        <p14:creationId xmlns:p14="http://schemas.microsoft.com/office/powerpoint/2010/main" val="287338307"/>
+      </p:ext>
+    </p:extLst>
+  </p:cSld>
+  <p:clrMapOvr>
+    <a:masterClrMapping/>
+  </p:clrMapOvr>
+</p:sldLayout>
+</file>
+
+<file path=ppt/slideLayouts/slideLayout13.xml><?xml version="1.0" encoding="utf-8"?>
+<p:sldLayout xmlns:a="http://schemas.openxmlformats.org/drawingml/2006/main" xmlns:r="http://schemas.openxmlformats.org/officeDocument/2006/relationships" xmlns:p="http://schemas.openxmlformats.org/presentationml/2006/main" type="obj" preserve="1">
+  <p:cSld name="Title and Content">
+    <p:spTree>
+      <p:nvGrpSpPr>
+        <p:cNvPr id="1" name=""/>
+        <p:cNvGrpSpPr/>
+        <p:nvPr/>
+      </p:nvGrpSpPr>
+      <p:grpSpPr>
+        <a:xfrm>
+          <a:off x="0" y="0"/>
+          <a:ext cx="0" cy="0"/>
+          <a:chOff x="0" y="0"/>
+          <a:chExt cx="0" cy="0"/>
+        </a:xfrm>
+      </p:grpSpPr>
+      <p:sp>
+        <p:nvSpPr>
+          <p:cNvPr id="2" name="Title 1">
+            <a:extLst>
+              <a:ext uri="{FF2B5EF4-FFF2-40B4-BE49-F238E27FC236}">
+                <a16:creationId xmlns:a16="http://schemas.microsoft.com/office/drawing/2014/main" id="{D1EF1540-682B-4DCA-9361-C88BB971B4DA}"/>
+              </a:ext>
+            </a:extLst>
+          </p:cNvPr>
+          <p:cNvSpPr>
+            <a:spLocks noGrp="1"/>
+          </p:cNvSpPr>
+          <p:nvPr>
+            <p:ph type="title"/>
+          </p:nvPr>
+        </p:nvSpPr>
+        <p:spPr/>
+        <p:txBody>
+          <a:bodyPr/>
+          <a:lstStyle/>
+          <a:p>
+            <a:r>
+              <a:rPr lang="en-US"/>
+              <a:t>Click to edit Master title style</a:t>
+            </a:r>
+          </a:p>
+        </p:txBody>
+      </p:sp>
+      <p:sp>
+        <p:nvSpPr>
+          <p:cNvPr id="3" name="Content Placeholder 2">
+            <a:extLst>
+              <a:ext uri="{FF2B5EF4-FFF2-40B4-BE49-F238E27FC236}">
+                <a16:creationId xmlns:a16="http://schemas.microsoft.com/office/drawing/2014/main" id="{E9BAC6AE-DC84-4104-825A-6EF213FFEFD1}"/>
+              </a:ext>
+            </a:extLst>
+          </p:cNvPr>
+          <p:cNvSpPr>
+            <a:spLocks noGrp="1"/>
+          </p:cNvSpPr>
+          <p:nvPr>
+            <p:ph idx="1"/>
+          </p:nvPr>
+        </p:nvSpPr>
+        <p:spPr/>
+        <p:txBody>
+          <a:bodyPr/>
+          <a:lstStyle/>
+          <a:p>
+            <a:pPr lvl="0"/>
+            <a:r>
+              <a:rPr lang="en-US"/>
+              <a:t>Click to edit Master text styles</a:t>
+            </a:r>
+          </a:p>
+          <a:p>
+            <a:pPr lvl="1"/>
+            <a:r>
+              <a:rPr lang="en-US"/>
+              <a:t>Second level</a:t>
+            </a:r>
+          </a:p>
+          <a:p>
+            <a:pPr lvl="2"/>
+            <a:r>
+              <a:rPr lang="en-US"/>
+              <a:t>Third level</a:t>
+            </a:r>
+          </a:p>
+          <a:p>
+            <a:pPr lvl="3"/>
+            <a:r>
+              <a:rPr lang="en-US"/>
+              <a:t>Fourth level</a:t>
+            </a:r>
+          </a:p>
+          <a:p>
+            <a:pPr lvl="4"/>
+            <a:r>
+              <a:rPr lang="en-US"/>
+              <a:t>Fifth level</a:t>
+            </a:r>
+          </a:p>
+        </p:txBody>
+      </p:sp>
+      <p:sp>
+        <p:nvSpPr>
+          <p:cNvPr id="4" name="Date Placeholder 3">
+            <a:extLst>
+              <a:ext uri="{FF2B5EF4-FFF2-40B4-BE49-F238E27FC236}">
+                <a16:creationId xmlns:a16="http://schemas.microsoft.com/office/drawing/2014/main" id="{B4C6786B-D1CB-4857-A356-C791502C0BE2}"/>
+              </a:ext>
+            </a:extLst>
+          </p:cNvPr>
+          <p:cNvSpPr>
+            <a:spLocks noGrp="1"/>
+          </p:cNvSpPr>
+          <p:nvPr>
+            <p:ph type="dt" sz="half" idx="10"/>
+          </p:nvPr>
+        </p:nvSpPr>
+        <p:spPr/>
+        <p:txBody>
+          <a:bodyPr/>
+          <a:lstStyle/>
+          <a:p>
+            <a:fld id="{1804209A-C6D7-496B-8537-5782FDB96C12}" type="datetimeFigureOut">
+              <a:rPr lang="en-US" smtClean="0"/>
+              <a:t>4/29/2026</a:t>
+            </a:fld>
+            <a:endParaRPr lang="en-US"/>
+          </a:p>
+        </p:txBody>
+      </p:sp>
+      <p:sp>
+        <p:nvSpPr>
+          <p:cNvPr id="5" name="Footer Placeholder 4">
+            <a:extLst>
+              <a:ext uri="{FF2B5EF4-FFF2-40B4-BE49-F238E27FC236}">
+                <a16:creationId xmlns:a16="http://schemas.microsoft.com/office/drawing/2014/main" id="{9892753D-0E21-4FDB-82B0-7F8F3F09998A}"/>
+              </a:ext>
+            </a:extLst>
+          </p:cNvPr>
+          <p:cNvSpPr>
+            <a:spLocks noGrp="1"/>
+          </p:cNvSpPr>
+          <p:nvPr>
+            <p:ph type="ftr" sz="quarter" idx="11"/>
+          </p:nvPr>
+        </p:nvSpPr>
+        <p:spPr/>
+        <p:txBody>
+          <a:bodyPr/>
+          <a:lstStyle/>
+          <a:p>
+            <a:endParaRPr lang="en-US"/>
+          </a:p>
+        </p:txBody>
+      </p:sp>
+      <p:sp>
+        <p:nvSpPr>
+          <p:cNvPr id="6" name="Slide Number Placeholder 5">
+            <a:extLst>
+              <a:ext uri="{FF2B5EF4-FFF2-40B4-BE49-F238E27FC236}">
+                <a16:creationId xmlns:a16="http://schemas.microsoft.com/office/drawing/2014/main" id="{AF588069-A43B-4E6F-A666-DB8538C07990}"/>
+              </a:ext>
+            </a:extLst>
+          </p:cNvPr>
+          <p:cNvSpPr>
+            <a:spLocks noGrp="1"/>
+          </p:cNvSpPr>
+          <p:nvPr>
+            <p:ph type="sldNum" sz="quarter" idx="12"/>
+          </p:nvPr>
+        </p:nvSpPr>
+        <p:spPr/>
+        <p:txBody>
+          <a:bodyPr/>
+          <a:lstStyle/>
+          <a:p>
+            <a:fld id="{6C87352C-6AF1-4D42-A15A-45C6FA13D254}" type="slidenum">
+              <a:rPr lang="en-US" smtClean="0"/>
+              <a:t>‹#›</a:t>
+            </a:fld>
+            <a:endParaRPr lang="en-US"/>
+          </a:p>
+        </p:txBody>
+      </p:sp>
+    </p:spTree>
+    <p:extLst>
+      <p:ext uri="{BB962C8B-B14F-4D97-AF65-F5344CB8AC3E}">
+        <p14:creationId xmlns:p14="http://schemas.microsoft.com/office/powerpoint/2010/main" val="3092193445"/>
+      </p:ext>
+    </p:extLst>
+  </p:cSld>
+  <p:clrMapOvr>
+    <a:masterClrMapping/>
+  </p:clrMapOvr>
+</p:sldLayout>
+</file>
+
+<file path=ppt/slideLayouts/slideLayout14.xml><?xml version="1.0" encoding="utf-8"?>
+<p:sldLayout xmlns:a="http://schemas.openxmlformats.org/drawingml/2006/main" xmlns:r="http://schemas.openxmlformats.org/officeDocument/2006/relationships" xmlns:p="http://schemas.openxmlformats.org/presentationml/2006/main" type="secHead" preserve="1">
+  <p:cSld name="Section Header">
+    <p:spTree>
+      <p:nvGrpSpPr>
+        <p:cNvPr id="1" name=""/>
+        <p:cNvGrpSpPr/>
+        <p:nvPr/>
+      </p:nvGrpSpPr>
+      <p:grpSpPr>
+        <a:xfrm>
+          <a:off x="0" y="0"/>
+          <a:ext cx="0" cy="0"/>
+          <a:chOff x="0" y="0"/>
+          <a:chExt cx="0" cy="0"/>
+        </a:xfrm>
+      </p:grpSpPr>
+      <p:sp>
+        <p:nvSpPr>
+          <p:cNvPr id="2" name="Title 1">
+            <a:extLst>
+              <a:ext uri="{FF2B5EF4-FFF2-40B4-BE49-F238E27FC236}">
+                <a16:creationId xmlns:a16="http://schemas.microsoft.com/office/drawing/2014/main" id="{D6EB819F-5EF8-462B-81F5-242BA48038B0}"/>
+              </a:ext>
+            </a:extLst>
+          </p:cNvPr>
+          <p:cNvSpPr>
+            <a:spLocks noGrp="1"/>
+          </p:cNvSpPr>
+          <p:nvPr>
+            <p:ph type="title"/>
+          </p:nvPr>
+        </p:nvSpPr>
+        <p:spPr>
+          <a:xfrm>
+            <a:off x="831850" y="1709738"/>
+            <a:ext cx="10515600" cy="2852737"/>
+          </a:xfrm>
+        </p:spPr>
+        <p:txBody>
+          <a:bodyPr anchor="b"/>
+          <a:lstStyle>
+            <a:lvl1pPr>
+              <a:defRPr sz="6000"/>
+            </a:lvl1pPr>
+          </a:lstStyle>
+          <a:p>
+            <a:r>
+              <a:rPr lang="en-US"/>
+              <a:t>Click to edit Master title style</a:t>
+            </a:r>
+          </a:p>
+        </p:txBody>
+      </p:sp>
+      <p:sp>
+        <p:nvSpPr>
+          <p:cNvPr id="3" name="Text Placeholder 2">
+            <a:extLst>
+              <a:ext uri="{FF2B5EF4-FFF2-40B4-BE49-F238E27FC236}">
+                <a16:creationId xmlns:a16="http://schemas.microsoft.com/office/drawing/2014/main" id="{5877B780-66FE-439F-85AE-04FF909A0024}"/>
+              </a:ext>
+            </a:extLst>
+          </p:cNvPr>
+          <p:cNvSpPr>
+            <a:spLocks noGrp="1"/>
+          </p:cNvSpPr>
+          <p:nvPr>
+            <p:ph type="body" idx="1"/>
+          </p:nvPr>
+        </p:nvSpPr>
+        <p:spPr>
+          <a:xfrm>
+            <a:off x="831850" y="4589463"/>
+            <a:ext cx="10515600" cy="1500187"/>
+          </a:xfrm>
+        </p:spPr>
+        <p:txBody>
+          <a:bodyPr/>
+          <a:lstStyle>
+            <a:lvl1pPr marL="0" indent="0">
+              <a:buNone/>
+              <a:defRPr sz="2400">
+                <a:solidFill>
+                  <a:schemeClr val="tx1">
+                    <a:tint val="75000"/>
+                  </a:schemeClr>
+                </a:solidFill>
+              </a:defRPr>
+            </a:lvl1pPr>
+            <a:lvl2pPr marL="457200" indent="0">
+              <a:buNone/>
+              <a:defRPr sz="2000">
+                <a:solidFill>
+                  <a:schemeClr val="tx1">
+                    <a:tint val="75000"/>
+                  </a:schemeClr>
+                </a:solidFill>
+              </a:defRPr>
+            </a:lvl2pPr>
+            <a:lvl3pPr marL="914400" indent="0">
+              <a:buNone/>
+              <a:defRPr sz="1800">
+                <a:solidFill>
+                  <a:schemeClr val="tx1">
+                    <a:tint val="75000"/>
+                  </a:schemeClr>
+                </a:solidFill>
+              </a:defRPr>
+            </a:lvl3pPr>
+            <a:lvl4pPr marL="1371600" indent="0">
+              <a:buNone/>
+              <a:defRPr sz="1600">
+                <a:solidFill>
+                  <a:schemeClr val="tx1">
+                    <a:tint val="75000"/>
+                  </a:schemeClr>
+                </a:solidFill>
+              </a:defRPr>
+            </a:lvl4pPr>
+            <a:lvl5pPr marL="1828800" indent="0">
+              <a:buNone/>
+              <a:defRPr sz="1600">
+                <a:solidFill>
+                  <a:schemeClr val="tx1">
+                    <a:tint val="75000"/>
+                  </a:schemeClr>
+                </a:solidFill>
+              </a:defRPr>
+            </a:lvl5pPr>
+            <a:lvl6pPr marL="2286000" indent="0">
+              <a:buNone/>
+              <a:defRPr sz="1600">
+                <a:solidFill>
+                  <a:schemeClr val="tx1">
+                    <a:tint val="75000"/>
+                  </a:schemeClr>
+                </a:solidFill>
+              </a:defRPr>
+            </a:lvl6pPr>
+            <a:lvl7pPr marL="2743200" indent="0">
+              <a:buNone/>
+              <a:defRPr sz="1600">
+                <a:solidFill>
+                  <a:schemeClr val="tx1">
+                    <a:tint val="75000"/>
+                  </a:schemeClr>
+                </a:solidFill>
+              </a:defRPr>
+            </a:lvl7pPr>
+            <a:lvl8pPr marL="3200400" indent="0">
+              <a:buNone/>
+              <a:defRPr sz="1600">
+                <a:solidFill>
+                  <a:schemeClr val="tx1">
+                    <a:tint val="75000"/>
+                  </a:schemeClr>
+                </a:solidFill>
+              </a:defRPr>
+            </a:lvl8pPr>
+            <a:lvl9pPr marL="3657600" indent="0">
+              <a:buNone/>
+              <a:defRPr sz="1600">
+                <a:solidFill>
+                  <a:schemeClr val="tx1">
+                    <a:tint val="75000"/>
+                  </a:schemeClr>
+                </a:solidFill>
+              </a:defRPr>
+            </a:lvl9pPr>
+          </a:lstStyle>
+          <a:p>
+            <a:pPr lvl="0"/>
+            <a:r>
+              <a:rPr lang="en-US"/>
+              <a:t>Click to edit Master text styles</a:t>
+            </a:r>
+          </a:p>
+        </p:txBody>
+      </p:sp>
+      <p:sp>
+        <p:nvSpPr>
+          <p:cNvPr id="4" name="Date Placeholder 3">
+            <a:extLst>
+              <a:ext uri="{FF2B5EF4-FFF2-40B4-BE49-F238E27FC236}">
+                <a16:creationId xmlns:a16="http://schemas.microsoft.com/office/drawing/2014/main" id="{876540FF-F5C5-43E7-980B-6288E92BAEB8}"/>
+              </a:ext>
+            </a:extLst>
+          </p:cNvPr>
+          <p:cNvSpPr>
+            <a:spLocks noGrp="1"/>
+          </p:cNvSpPr>
+          <p:nvPr>
+            <p:ph type="dt" sz="half" idx="10"/>
+          </p:nvPr>
+        </p:nvSpPr>
+        <p:spPr/>
+        <p:txBody>
+          <a:bodyPr/>
+          <a:lstStyle/>
+          <a:p>
+            <a:fld id="{1804209A-C6D7-496B-8537-5782FDB96C12}" type="datetimeFigureOut">
+              <a:rPr lang="en-US" smtClean="0"/>
+              <a:t>4/29/2026</a:t>
+            </a:fld>
+            <a:endParaRPr lang="en-US"/>
+          </a:p>
+        </p:txBody>
+      </p:sp>
+      <p:sp>
+        <p:nvSpPr>
+          <p:cNvPr id="5" name="Footer Placeholder 4">
+            <a:extLst>
+              <a:ext uri="{FF2B5EF4-FFF2-40B4-BE49-F238E27FC236}">
+                <a16:creationId xmlns:a16="http://schemas.microsoft.com/office/drawing/2014/main" id="{EE0A5E5B-7404-4425-92F7-661962D32B03}"/>
+              </a:ext>
+            </a:extLst>
+          </p:cNvPr>
+          <p:cNvSpPr>
+            <a:spLocks noGrp="1"/>
+          </p:cNvSpPr>
+          <p:nvPr>
+            <p:ph type="ftr" sz="quarter" idx="11"/>
+          </p:nvPr>
+        </p:nvSpPr>
+        <p:spPr/>
+        <p:txBody>
+          <a:bodyPr/>
+          <a:lstStyle/>
+          <a:p>
+            <a:endParaRPr lang="en-US"/>
+          </a:p>
+        </p:txBody>
+      </p:sp>
+      <p:sp>
+        <p:nvSpPr>
+          <p:cNvPr id="6" name="Slide Number Placeholder 5">
+            <a:extLst>
+              <a:ext uri="{FF2B5EF4-FFF2-40B4-BE49-F238E27FC236}">
+                <a16:creationId xmlns:a16="http://schemas.microsoft.com/office/drawing/2014/main" id="{25683244-D302-4753-9011-3085E6041B2C}"/>
+              </a:ext>
+            </a:extLst>
+          </p:cNvPr>
+          <p:cNvSpPr>
+            <a:spLocks noGrp="1"/>
+          </p:cNvSpPr>
+          <p:nvPr>
+            <p:ph type="sldNum" sz="quarter" idx="12"/>
+          </p:nvPr>
+        </p:nvSpPr>
+        <p:spPr/>
+        <p:txBody>
+          <a:bodyPr/>
+          <a:lstStyle/>
+          <a:p>
+            <a:fld id="{6C87352C-6AF1-4D42-A15A-45C6FA13D254}" type="slidenum">
+              <a:rPr lang="en-US" smtClean="0"/>
+              <a:t>‹#›</a:t>
+            </a:fld>
+            <a:endParaRPr lang="en-US"/>
+          </a:p>
+        </p:txBody>
+      </p:sp>
+    </p:spTree>
+    <p:extLst>
+      <p:ext uri="{BB962C8B-B14F-4D97-AF65-F5344CB8AC3E}">
+        <p14:creationId xmlns:p14="http://schemas.microsoft.com/office/powerpoint/2010/main" val="562924158"/>
+      </p:ext>
+    </p:extLst>
+  </p:cSld>
+  <p:clrMapOvr>
+    <a:masterClrMapping/>
+  </p:clrMapOvr>
+</p:sldLayout>
+</file>
+
+<file path=ppt/slideLayouts/slideLayout15.xml><?xml version="1.0" encoding="utf-8"?>
+<p:sldLayout xmlns:a="http://schemas.openxmlformats.org/drawingml/2006/main" xmlns:r="http://schemas.openxmlformats.org/officeDocument/2006/relationships" xmlns:p="http://schemas.openxmlformats.org/presentationml/2006/main" type="twoObj" preserve="1">
+  <p:cSld name="Two Content">
+    <p:spTree>
+      <p:nvGrpSpPr>
+        <p:cNvPr id="1" name=""/>
+        <p:cNvGrpSpPr/>
+        <p:nvPr/>
+      </p:nvGrpSpPr>
+      <p:grpSpPr>
+        <a:xfrm>
+          <a:off x="0" y="0"/>
+          <a:ext cx="0" cy="0"/>
+          <a:chOff x="0" y="0"/>
+          <a:chExt cx="0" cy="0"/>
+        </a:xfrm>
+      </p:grpSpPr>
+      <p:sp>
+        <p:nvSpPr>
+          <p:cNvPr id="2" name="Title 1">
+            <a:extLst>
+              <a:ext uri="{FF2B5EF4-FFF2-40B4-BE49-F238E27FC236}">
+                <a16:creationId xmlns:a16="http://schemas.microsoft.com/office/drawing/2014/main" id="{6E4C4737-73F0-488A-8143-23784699FAAD}"/>
+              </a:ext>
+            </a:extLst>
+          </p:cNvPr>
+          <p:cNvSpPr>
+            <a:spLocks noGrp="1"/>
+          </p:cNvSpPr>
+          <p:nvPr>
+            <p:ph type="title"/>
+          </p:nvPr>
+        </p:nvSpPr>
+        <p:spPr/>
+        <p:txBody>
+          <a:bodyPr/>
+          <a:lstStyle/>
+          <a:p>
+            <a:r>
+              <a:rPr lang="en-US"/>
+              <a:t>Click to edit Master title style</a:t>
+            </a:r>
+          </a:p>
+        </p:txBody>
+      </p:sp>
+      <p:sp>
+        <p:nvSpPr>
+          <p:cNvPr id="3" name="Content Placeholder 2">
+            <a:extLst>
+              <a:ext uri="{FF2B5EF4-FFF2-40B4-BE49-F238E27FC236}">
+                <a16:creationId xmlns:a16="http://schemas.microsoft.com/office/drawing/2014/main" id="{389F13FD-7FB4-405C-9701-8AC68AF3AB70}"/>
+              </a:ext>
+            </a:extLst>
+          </p:cNvPr>
+          <p:cNvSpPr>
+            <a:spLocks noGrp="1"/>
+          </p:cNvSpPr>
+          <p:nvPr>
+            <p:ph sz="half" idx="1"/>
+          </p:nvPr>
+        </p:nvSpPr>
+        <p:spPr>
+          <a:xfrm>
+            <a:off x="838200" y="1825625"/>
+            <a:ext cx="5181600" cy="4351338"/>
+          </a:xfrm>
+        </p:spPr>
+        <p:txBody>
+          <a:bodyPr/>
+          <a:lstStyle/>
+          <a:p>
+            <a:pPr lvl="0"/>
+            <a:r>
+              <a:rPr lang="en-US"/>
+              <a:t>Click to edit Master text styles</a:t>
+            </a:r>
+          </a:p>
+          <a:p>
+            <a:pPr lvl="1"/>
+            <a:r>
+              <a:rPr lang="en-US"/>
+              <a:t>Second level</a:t>
+            </a:r>
+          </a:p>
+          <a:p>
+            <a:pPr lvl="2"/>
+            <a:r>
+              <a:rPr lang="en-US"/>
+              <a:t>Third level</a:t>
+            </a:r>
+          </a:p>
+          <a:p>
+            <a:pPr lvl="3"/>
+            <a:r>
+              <a:rPr lang="en-US"/>
+              <a:t>Fourth level</a:t>
+            </a:r>
+          </a:p>
+          <a:p>
+            <a:pPr lvl="4"/>
+            <a:r>
+              <a:rPr lang="en-US"/>
+              <a:t>Fifth level</a:t>
+            </a:r>
+          </a:p>
+        </p:txBody>
+      </p:sp>
+      <p:sp>
+        <p:nvSpPr>
+          <p:cNvPr id="4" name="Content Placeholder 3">
+            <a:extLst>
+              <a:ext uri="{FF2B5EF4-FFF2-40B4-BE49-F238E27FC236}">
+                <a16:creationId xmlns:a16="http://schemas.microsoft.com/office/drawing/2014/main" id="{EB8BEA1A-FFC1-4D32-8E39-484C61747BB0}"/>
+              </a:ext>
+            </a:extLst>
+          </p:cNvPr>
+          <p:cNvSpPr>
+            <a:spLocks noGrp="1"/>
+          </p:cNvSpPr>
+          <p:nvPr>
+            <p:ph sz="half" idx="2"/>
+          </p:nvPr>
+        </p:nvSpPr>
+        <p:spPr>
+          <a:xfrm>
+            <a:off x="6172200" y="1825625"/>
+            <a:ext cx="5181600" cy="4351338"/>
+          </a:xfrm>
+        </p:spPr>
+        <p:txBody>
+          <a:bodyPr/>
+          <a:lstStyle/>
+          <a:p>
+            <a:pPr lvl="0"/>
+            <a:r>
+              <a:rPr lang="en-US"/>
+              <a:t>Click to edit Master text styles</a:t>
+            </a:r>
+          </a:p>
+          <a:p>
+            <a:pPr lvl="1"/>
+            <a:r>
+              <a:rPr lang="en-US"/>
+              <a:t>Second level</a:t>
+            </a:r>
+          </a:p>
+          <a:p>
+            <a:pPr lvl="2"/>
+            <a:r>
+              <a:rPr lang="en-US"/>
+              <a:t>Third level</a:t>
+            </a:r>
+          </a:p>
+          <a:p>
+            <a:pPr lvl="3"/>
+            <a:r>
+              <a:rPr lang="en-US"/>
+              <a:t>Fourth level</a:t>
+            </a:r>
+          </a:p>
+          <a:p>
+            <a:pPr lvl="4"/>
+            <a:r>
+              <a:rPr lang="en-US"/>
+              <a:t>Fifth level</a:t>
+            </a:r>
+          </a:p>
+        </p:txBody>
+      </p:sp>
+      <p:sp>
+        <p:nvSpPr>
+          <p:cNvPr id="5" name="Date Placeholder 4">
+            <a:extLst>
+              <a:ext uri="{FF2B5EF4-FFF2-40B4-BE49-F238E27FC236}">
+                <a16:creationId xmlns:a16="http://schemas.microsoft.com/office/drawing/2014/main" id="{A8A4E644-5BEF-48FA-94A5-8DDF95D3B708}"/>
+              </a:ext>
+            </a:extLst>
+          </p:cNvPr>
+          <p:cNvSpPr>
+            <a:spLocks noGrp="1"/>
+          </p:cNvSpPr>
+          <p:nvPr>
+            <p:ph type="dt" sz="half" idx="10"/>
+          </p:nvPr>
+        </p:nvSpPr>
+        <p:spPr/>
+        <p:txBody>
+          <a:bodyPr/>
+          <a:lstStyle/>
+          <a:p>
+            <a:fld id="{1804209A-C6D7-496B-8537-5782FDB96C12}" type="datetimeFigureOut">
+              <a:rPr lang="en-US" smtClean="0"/>
+              <a:t>4/29/2026</a:t>
+            </a:fld>
+            <a:endParaRPr lang="en-US"/>
+          </a:p>
+        </p:txBody>
+      </p:sp>
+      <p:sp>
+        <p:nvSpPr>
+          <p:cNvPr id="6" name="Footer Placeholder 5">
+            <a:extLst>
+              <a:ext uri="{FF2B5EF4-FFF2-40B4-BE49-F238E27FC236}">
+                <a16:creationId xmlns:a16="http://schemas.microsoft.com/office/drawing/2014/main" id="{1EA6D34E-62BE-42CB-954A-BFADC5C9BDE0}"/>
+              </a:ext>
+            </a:extLst>
+          </p:cNvPr>
+          <p:cNvSpPr>
+            <a:spLocks noGrp="1"/>
+          </p:cNvSpPr>
+          <p:nvPr>
+            <p:ph type="ftr" sz="quarter" idx="11"/>
+          </p:nvPr>
+        </p:nvSpPr>
+        <p:spPr/>
+        <p:txBody>
+          <a:bodyPr/>
+          <a:lstStyle/>
+          <a:p>
+            <a:endParaRPr lang="en-US"/>
+          </a:p>
+        </p:txBody>
+      </p:sp>
+      <p:sp>
+        <p:nvSpPr>
+          <p:cNvPr id="7" name="Slide Number Placeholder 6">
+            <a:extLst>
+              <a:ext uri="{FF2B5EF4-FFF2-40B4-BE49-F238E27FC236}">
+                <a16:creationId xmlns:a16="http://schemas.microsoft.com/office/drawing/2014/main" id="{913B9ABC-C756-4BCD-A926-C8B1CCFDB57E}"/>
+              </a:ext>
+            </a:extLst>
+          </p:cNvPr>
+          <p:cNvSpPr>
+            <a:spLocks noGrp="1"/>
+          </p:cNvSpPr>
+          <p:nvPr>
+            <p:ph type="sldNum" sz="quarter" idx="12"/>
+          </p:nvPr>
+        </p:nvSpPr>
+        <p:spPr/>
+        <p:txBody>
+          <a:bodyPr/>
+          <a:lstStyle/>
+          <a:p>
+            <a:fld id="{6C87352C-6AF1-4D42-A15A-45C6FA13D254}" type="slidenum">
+              <a:rPr lang="en-US" smtClean="0"/>
+              <a:t>‹#›</a:t>
+            </a:fld>
+            <a:endParaRPr lang="en-US"/>
+          </a:p>
+        </p:txBody>
+      </p:sp>
+    </p:spTree>
+    <p:extLst>
+      <p:ext uri="{BB962C8B-B14F-4D97-AF65-F5344CB8AC3E}">
+        <p14:creationId xmlns:p14="http://schemas.microsoft.com/office/powerpoint/2010/main" val="4085489864"/>
+      </p:ext>
+    </p:extLst>
+  </p:cSld>
+  <p:clrMapOvr>
+    <a:masterClrMapping/>
+  </p:clrMapOvr>
+</p:sldLayout>
+</file>
+
+<file path=ppt/slideLayouts/slideLayout16.xml><?xml version="1.0" encoding="utf-8"?>
+<p:sldLayout xmlns:a="http://schemas.openxmlformats.org/drawingml/2006/main" xmlns:r="http://schemas.openxmlformats.org/officeDocument/2006/relationships" xmlns:p="http://schemas.openxmlformats.org/presentationml/2006/main" type="twoTxTwoObj" preserve="1">
+  <p:cSld name="Comparison">
+    <p:spTree>
+      <p:nvGrpSpPr>
+        <p:cNvPr id="1" name=""/>
+        <p:cNvGrpSpPr/>
+        <p:nvPr/>
+      </p:nvGrpSpPr>
+      <p:grpSpPr>
+        <a:xfrm>
+          <a:off x="0" y="0"/>
+          <a:ext cx="0" cy="0"/>
+          <a:chOff x="0" y="0"/>
+          <a:chExt cx="0" cy="0"/>
+        </a:xfrm>
+      </p:grpSpPr>
+      <p:sp>
+        <p:nvSpPr>
+          <p:cNvPr id="2" name="Title 1">
+            <a:extLst>
+              <a:ext uri="{FF2B5EF4-FFF2-40B4-BE49-F238E27FC236}">
+                <a16:creationId xmlns:a16="http://schemas.microsoft.com/office/drawing/2014/main" id="{152824D4-E554-4CA4-88B9-85F44618138C}"/>
+              </a:ext>
+            </a:extLst>
+          </p:cNvPr>
+          <p:cNvSpPr>
+            <a:spLocks noGrp="1"/>
+          </p:cNvSpPr>
+          <p:nvPr>
+            <p:ph type="title"/>
+          </p:nvPr>
+        </p:nvSpPr>
+        <p:spPr>
+          <a:xfrm>
+            <a:off x="839788" y="365125"/>
+            <a:ext cx="10515600" cy="1325563"/>
+          </a:xfrm>
+        </p:spPr>
+        <p:txBody>
+          <a:bodyPr/>
+          <a:lstStyle/>
+          <a:p>
+            <a:r>
+              <a:rPr lang="en-US"/>
+              <a:t>Click to edit Master title style</a:t>
+            </a:r>
+          </a:p>
+        </p:txBody>
+      </p:sp>
+      <p:sp>
+        <p:nvSpPr>
+          <p:cNvPr id="3" name="Text Placeholder 2">
+            <a:extLst>
+              <a:ext uri="{FF2B5EF4-FFF2-40B4-BE49-F238E27FC236}">
+                <a16:creationId xmlns:a16="http://schemas.microsoft.com/office/drawing/2014/main" id="{D508C30A-382B-4369-8F44-FB7D8F620247}"/>
+              </a:ext>
+            </a:extLst>
+          </p:cNvPr>
+          <p:cNvSpPr>
+            <a:spLocks noGrp="1"/>
+          </p:cNvSpPr>
+          <p:nvPr>
+            <p:ph type="body" idx="1"/>
+          </p:nvPr>
+        </p:nvSpPr>
+        <p:spPr>
+          <a:xfrm>
+            <a:off x="839788" y="1681163"/>
+            <a:ext cx="5157787" cy="823912"/>
+          </a:xfrm>
+        </p:spPr>
+        <p:txBody>
+          <a:bodyPr anchor="b"/>
+          <a:lstStyle>
+            <a:lvl1pPr marL="0" indent="0">
+              <a:buNone/>
+              <a:defRPr sz="2400" b="1"/>
+            </a:lvl1pPr>
+            <a:lvl2pPr marL="457200" indent="0">
+              <a:buNone/>
+              <a:defRPr sz="2000" b="1"/>
+            </a:lvl2pPr>
+            <a:lvl3pPr marL="914400" indent="0">
+              <a:buNone/>
+              <a:defRPr sz="1800" b="1"/>
+            </a:lvl3pPr>
+            <a:lvl4pPr marL="1371600" indent="0">
+              <a:buNone/>
+              <a:defRPr sz="1600" b="1"/>
+            </a:lvl4pPr>
+            <a:lvl5pPr marL="1828800" indent="0">
+              <a:buNone/>
+              <a:defRPr sz="1600" b="1"/>
+            </a:lvl5pPr>
+            <a:lvl6pPr marL="2286000" indent="0">
+              <a:buNone/>
+              <a:defRPr sz="1600" b="1"/>
+            </a:lvl6pPr>
+            <a:lvl7pPr marL="2743200" indent="0">
+              <a:buNone/>
+              <a:defRPr sz="1600" b="1"/>
+            </a:lvl7pPr>
+            <a:lvl8pPr marL="3200400" indent="0">
+              <a:buNone/>
+              <a:defRPr sz="1600" b="1"/>
+            </a:lvl8pPr>
+            <a:lvl9pPr marL="3657600" indent="0">
+              <a:buNone/>
+              <a:defRPr sz="1600" b="1"/>
+            </a:lvl9pPr>
+          </a:lstStyle>
+          <a:p>
+            <a:pPr lvl="0"/>
+            <a:r>
+              <a:rPr lang="en-US"/>
+              <a:t>Click to edit Master text styles</a:t>
+            </a:r>
+          </a:p>
+        </p:txBody>
+      </p:sp>
+      <p:sp>
+        <p:nvSpPr>
+          <p:cNvPr id="4" name="Content Placeholder 3">
+            <a:extLst>
+              <a:ext uri="{FF2B5EF4-FFF2-40B4-BE49-F238E27FC236}">
+                <a16:creationId xmlns:a16="http://schemas.microsoft.com/office/drawing/2014/main" id="{38051816-F25D-4A70-9847-2D391C1E2F40}"/>
+              </a:ext>
+            </a:extLst>
+          </p:cNvPr>
+          <p:cNvSpPr>
+            <a:spLocks noGrp="1"/>
+          </p:cNvSpPr>
+          <p:nvPr>
+            <p:ph sz="half" idx="2"/>
+          </p:nvPr>
+        </p:nvSpPr>
+        <p:spPr>
+          <a:xfrm>
+            <a:off x="839788" y="2505075"/>
+            <a:ext cx="5157787" cy="3684588"/>
+          </a:xfrm>
+        </p:spPr>
+        <p:txBody>
+          <a:bodyPr/>
+          <a:lstStyle/>
+          <a:p>
+            <a:pPr lvl="0"/>
+            <a:r>
+              <a:rPr lang="en-US"/>
+              <a:t>Click to edit Master text styles</a:t>
+            </a:r>
+          </a:p>
+          <a:p>
+            <a:pPr lvl="1"/>
+            <a:r>
+              <a:rPr lang="en-US"/>
+              <a:t>Second level</a:t>
+            </a:r>
+          </a:p>
+          <a:p>
+            <a:pPr lvl="2"/>
+            <a:r>
+              <a:rPr lang="en-US"/>
+              <a:t>Third level</a:t>
+            </a:r>
+          </a:p>
+          <a:p>
+            <a:pPr lvl="3"/>
+            <a:r>
+              <a:rPr lang="en-US"/>
+              <a:t>Fourth level</a:t>
+            </a:r>
+          </a:p>
+          <a:p>
+            <a:pPr lvl="4"/>
+            <a:r>
+              <a:rPr lang="en-US"/>
+              <a:t>Fifth level</a:t>
+            </a:r>
+          </a:p>
+        </p:txBody>
+      </p:sp>
+      <p:sp>
+        <p:nvSpPr>
+          <p:cNvPr id="5" name="Text Placeholder 4">
+            <a:extLst>
+              <a:ext uri="{FF2B5EF4-FFF2-40B4-BE49-F238E27FC236}">
+                <a16:creationId xmlns:a16="http://schemas.microsoft.com/office/drawing/2014/main" id="{BC3088ED-9888-4E6B-8267-000EF5B3478B}"/>
+              </a:ext>
+            </a:extLst>
+          </p:cNvPr>
+          <p:cNvSpPr>
+            <a:spLocks noGrp="1"/>
+          </p:cNvSpPr>
+          <p:nvPr>
+            <p:ph type="body" sz="quarter" idx="3"/>
+          </p:nvPr>
+        </p:nvSpPr>
+        <p:spPr>
+          <a:xfrm>
+            <a:off x="6172200" y="1681163"/>
+            <a:ext cx="5183188" cy="823912"/>
+          </a:xfrm>
+        </p:spPr>
+        <p:txBody>
+          <a:bodyPr anchor="b"/>
+          <a:lstStyle>
+            <a:lvl1pPr marL="0" indent="0">
+              <a:buNone/>
+              <a:defRPr sz="2400" b="1"/>
+            </a:lvl1pPr>
+            <a:lvl2pPr marL="457200" indent="0">
+              <a:buNone/>
+              <a:defRPr sz="2000" b="1"/>
+            </a:lvl2pPr>
+            <a:lvl3pPr marL="914400" indent="0">
+              <a:buNone/>
+              <a:defRPr sz="1800" b="1"/>
+            </a:lvl3pPr>
+            <a:lvl4pPr marL="1371600" indent="0">
+              <a:buNone/>
+              <a:defRPr sz="1600" b="1"/>
+            </a:lvl4pPr>
+            <a:lvl5pPr marL="1828800" indent="0">
+              <a:buNone/>
+              <a:defRPr sz="1600" b="1"/>
+            </a:lvl5pPr>
+            <a:lvl6pPr marL="2286000" indent="0">
+              <a:buNone/>
+              <a:defRPr sz="1600" b="1"/>
+            </a:lvl6pPr>
+            <a:lvl7pPr marL="2743200" indent="0">
+              <a:buNone/>
+              <a:defRPr sz="1600" b="1"/>
+            </a:lvl7pPr>
+            <a:lvl8pPr marL="3200400" indent="0">
+              <a:buNone/>
+              <a:defRPr sz="1600" b="1"/>
+            </a:lvl8pPr>
+            <a:lvl9pPr marL="3657600" indent="0">
+              <a:buNone/>
+              <a:defRPr sz="1600" b="1"/>
+            </a:lvl9pPr>
+          </a:lstStyle>
+          <a:p>
+            <a:pPr lvl="0"/>
+            <a:r>
+              <a:rPr lang="en-US"/>
+              <a:t>Click to edit Master text styles</a:t>
+            </a:r>
+          </a:p>
+        </p:txBody>
+      </p:sp>
+      <p:sp>
+        <p:nvSpPr>
+          <p:cNvPr id="6" name="Content Placeholder 5">
+            <a:extLst>
+              <a:ext uri="{FF2B5EF4-FFF2-40B4-BE49-F238E27FC236}">
+                <a16:creationId xmlns:a16="http://schemas.microsoft.com/office/drawing/2014/main" id="{C9BECD2C-3967-4873-B333-A55664A0B547}"/>
+              </a:ext>
+            </a:extLst>
+          </p:cNvPr>
+          <p:cNvSpPr>
+            <a:spLocks noGrp="1"/>
+          </p:cNvSpPr>
+          <p:nvPr>
+            <p:ph sz="quarter" idx="4"/>
+          </p:nvPr>
+        </p:nvSpPr>
+        <p:spPr>
+          <a:xfrm>
+            <a:off x="6172200" y="2505075"/>
+            <a:ext cx="5183188" cy="3684588"/>
+          </a:xfrm>
+        </p:spPr>
+        <p:txBody>
+          <a:bodyPr/>
+          <a:lstStyle/>
+          <a:p>
+            <a:pPr lvl="0"/>
+            <a:r>
+              <a:rPr lang="en-US"/>
+              <a:t>Click to edit Master text styles</a:t>
+            </a:r>
+          </a:p>
+          <a:p>
+            <a:pPr lvl="1"/>
+            <a:r>
+              <a:rPr lang="en-US"/>
+              <a:t>Second level</a:t>
+            </a:r>
+          </a:p>
+          <a:p>
+            <a:pPr lvl="2"/>
+            <a:r>
+              <a:rPr lang="en-US"/>
+              <a:t>Third level</a:t>
+            </a:r>
+          </a:p>
+          <a:p>
+            <a:pPr lvl="3"/>
+            <a:r>
+              <a:rPr lang="en-US"/>
+              <a:t>Fourth level</a:t>
+            </a:r>
+          </a:p>
+          <a:p>
+            <a:pPr lvl="4"/>
+            <a:r>
+              <a:rPr lang="en-US"/>
+              <a:t>Fifth level</a:t>
+            </a:r>
+          </a:p>
+        </p:txBody>
+      </p:sp>
+      <p:sp>
+        <p:nvSpPr>
+          <p:cNvPr id="7" name="Date Placeholder 6">
+            <a:extLst>
+              <a:ext uri="{FF2B5EF4-FFF2-40B4-BE49-F238E27FC236}">
+                <a16:creationId xmlns:a16="http://schemas.microsoft.com/office/drawing/2014/main" id="{03E8580D-F28E-4B19-BC9E-ECC5985A519D}"/>
+              </a:ext>
+            </a:extLst>
+          </p:cNvPr>
+          <p:cNvSpPr>
+            <a:spLocks noGrp="1"/>
+          </p:cNvSpPr>
+          <p:nvPr>
+            <p:ph type="dt" sz="half" idx="10"/>
+          </p:nvPr>
+        </p:nvSpPr>
+        <p:spPr/>
+        <p:txBody>
+          <a:bodyPr/>
+          <a:lstStyle/>
+          <a:p>
+            <a:fld id="{1804209A-C6D7-496B-8537-5782FDB96C12}" type="datetimeFigureOut">
+              <a:rPr lang="en-US" smtClean="0"/>
+              <a:t>4/29/2026</a:t>
+            </a:fld>
+            <a:endParaRPr lang="en-US"/>
+          </a:p>
+        </p:txBody>
+      </p:sp>
+      <p:sp>
+        <p:nvSpPr>
+          <p:cNvPr id="8" name="Footer Placeholder 7">
+            <a:extLst>
+              <a:ext uri="{FF2B5EF4-FFF2-40B4-BE49-F238E27FC236}">
+                <a16:creationId xmlns:a16="http://schemas.microsoft.com/office/drawing/2014/main" id="{3530A328-AECD-4DD2-A016-8BCD85C2A3D1}"/>
+              </a:ext>
+            </a:extLst>
+          </p:cNvPr>
+          <p:cNvSpPr>
+            <a:spLocks noGrp="1"/>
+          </p:cNvSpPr>
+          <p:nvPr>
+            <p:ph type="ftr" sz="quarter" idx="11"/>
+          </p:nvPr>
+        </p:nvSpPr>
+        <p:spPr/>
+        <p:txBody>
+          <a:bodyPr/>
+          <a:lstStyle/>
+          <a:p>
+            <a:endParaRPr lang="en-US"/>
+          </a:p>
+        </p:txBody>
+      </p:sp>
+      <p:sp>
+        <p:nvSpPr>
+          <p:cNvPr id="9" name="Slide Number Placeholder 8">
+            <a:extLst>
+              <a:ext uri="{FF2B5EF4-FFF2-40B4-BE49-F238E27FC236}">
+                <a16:creationId xmlns:a16="http://schemas.microsoft.com/office/drawing/2014/main" id="{E86B5C51-7186-4B3B-BCB4-8B3ECE62D3EE}"/>
+              </a:ext>
+            </a:extLst>
+          </p:cNvPr>
+          <p:cNvSpPr>
+            <a:spLocks noGrp="1"/>
+          </p:cNvSpPr>
+          <p:nvPr>
+            <p:ph type="sldNum" sz="quarter" idx="12"/>
+          </p:nvPr>
+        </p:nvSpPr>
+        <p:spPr/>
+        <p:txBody>
+          <a:bodyPr/>
+          <a:lstStyle/>
+          <a:p>
+            <a:fld id="{6C87352C-6AF1-4D42-A15A-45C6FA13D254}" type="slidenum">
+              <a:rPr lang="en-US" smtClean="0"/>
+              <a:t>‹#›</a:t>
+            </a:fld>
+            <a:endParaRPr lang="en-US"/>
+          </a:p>
+        </p:txBody>
+      </p:sp>
+    </p:spTree>
+    <p:extLst>
+      <p:ext uri="{BB962C8B-B14F-4D97-AF65-F5344CB8AC3E}">
+        <p14:creationId xmlns:p14="http://schemas.microsoft.com/office/powerpoint/2010/main" val="3477252953"/>
+      </p:ext>
+    </p:extLst>
+  </p:cSld>
+  <p:clrMapOvr>
+    <a:masterClrMapping/>
+  </p:clrMapOvr>
+</p:sldLayout>
+</file>
+
+<file path=ppt/slideLayouts/slideLayout17.xml><?xml version="1.0" encoding="utf-8"?>
+<p:sldLayout xmlns:a="http://schemas.openxmlformats.org/drawingml/2006/main" xmlns:r="http://schemas.openxmlformats.org/officeDocument/2006/relationships" xmlns:p="http://schemas.openxmlformats.org/presentationml/2006/main" type="titleOnly" preserve="1">
+  <p:cSld name="Title Only">
+    <p:spTree>
+      <p:nvGrpSpPr>
+        <p:cNvPr id="1" name=""/>
+        <p:cNvGrpSpPr/>
+        <p:nvPr/>
+      </p:nvGrpSpPr>
+      <p:grpSpPr>
+        <a:xfrm>
+          <a:off x="0" y="0"/>
+          <a:ext cx="0" cy="0"/>
+          <a:chOff x="0" y="0"/>
+          <a:chExt cx="0" cy="0"/>
+        </a:xfrm>
+      </p:grpSpPr>
+      <p:sp>
+        <p:nvSpPr>
+          <p:cNvPr id="2" name="Title 1">
+            <a:extLst>
+              <a:ext uri="{FF2B5EF4-FFF2-40B4-BE49-F238E27FC236}">
+                <a16:creationId xmlns:a16="http://schemas.microsoft.com/office/drawing/2014/main" id="{CA18FF02-719D-4FFC-BF77-1860BD90C797}"/>
+              </a:ext>
+            </a:extLst>
+          </p:cNvPr>
+          <p:cNvSpPr>
+            <a:spLocks noGrp="1"/>
+          </p:cNvSpPr>
+          <p:nvPr>
+            <p:ph type="title"/>
+          </p:nvPr>
+        </p:nvSpPr>
+        <p:spPr/>
+        <p:txBody>
+          <a:bodyPr/>
+          <a:lstStyle/>
+          <a:p>
+            <a:r>
+              <a:rPr lang="en-US"/>
+              <a:t>Click to edit Master title style</a:t>
+            </a:r>
+          </a:p>
+        </p:txBody>
+      </p:sp>
+      <p:sp>
+        <p:nvSpPr>
+          <p:cNvPr id="3" name="Date Placeholder 2">
+            <a:extLst>
+              <a:ext uri="{FF2B5EF4-FFF2-40B4-BE49-F238E27FC236}">
+                <a16:creationId xmlns:a16="http://schemas.microsoft.com/office/drawing/2014/main" id="{E1F69F0B-E328-495F-9C5E-509BDA933AE6}"/>
+              </a:ext>
+            </a:extLst>
+          </p:cNvPr>
+          <p:cNvSpPr>
+            <a:spLocks noGrp="1"/>
+          </p:cNvSpPr>
+          <p:nvPr>
+            <p:ph type="dt" sz="half" idx="10"/>
+          </p:nvPr>
+        </p:nvSpPr>
+        <p:spPr/>
+        <p:txBody>
+          <a:bodyPr/>
+          <a:lstStyle/>
+          <a:p>
+            <a:fld id="{1804209A-C6D7-496B-8537-5782FDB96C12}" type="datetimeFigureOut">
+              <a:rPr lang="en-US" smtClean="0"/>
+              <a:t>4/29/2026</a:t>
+            </a:fld>
+            <a:endParaRPr lang="en-US"/>
+          </a:p>
+        </p:txBody>
+      </p:sp>
+      <p:sp>
+        <p:nvSpPr>
+          <p:cNvPr id="4" name="Footer Placeholder 3">
+            <a:extLst>
+              <a:ext uri="{FF2B5EF4-FFF2-40B4-BE49-F238E27FC236}">
+                <a16:creationId xmlns:a16="http://schemas.microsoft.com/office/drawing/2014/main" id="{10322280-409B-4DB7-B729-72B71C09DF94}"/>
+              </a:ext>
+            </a:extLst>
+          </p:cNvPr>
+          <p:cNvSpPr>
+            <a:spLocks noGrp="1"/>
+          </p:cNvSpPr>
+          <p:nvPr>
+            <p:ph type="ftr" sz="quarter" idx="11"/>
+          </p:nvPr>
+        </p:nvSpPr>
+        <p:spPr/>
+        <p:txBody>
+          <a:bodyPr/>
+          <a:lstStyle/>
+          <a:p>
+            <a:endParaRPr lang="en-US"/>
+          </a:p>
+        </p:txBody>
+      </p:sp>
+      <p:sp>
+        <p:nvSpPr>
+          <p:cNvPr id="5" name="Slide Number Placeholder 4">
+            <a:extLst>
+              <a:ext uri="{FF2B5EF4-FFF2-40B4-BE49-F238E27FC236}">
+                <a16:creationId xmlns:a16="http://schemas.microsoft.com/office/drawing/2014/main" id="{288E1517-4C78-472E-8444-8DDCEE82159C}"/>
+              </a:ext>
+            </a:extLst>
+          </p:cNvPr>
+          <p:cNvSpPr>
+            <a:spLocks noGrp="1"/>
+          </p:cNvSpPr>
+          <p:nvPr>
+            <p:ph type="sldNum" sz="quarter" idx="12"/>
+          </p:nvPr>
+        </p:nvSpPr>
+        <p:spPr/>
+        <p:txBody>
+          <a:bodyPr/>
+          <a:lstStyle/>
+          <a:p>
+            <a:fld id="{6C87352C-6AF1-4D42-A15A-45C6FA13D254}" type="slidenum">
+              <a:rPr lang="en-US" smtClean="0"/>
+              <a:t>‹#›</a:t>
+            </a:fld>
+            <a:endParaRPr lang="en-US"/>
+          </a:p>
+        </p:txBody>
+      </p:sp>
+    </p:spTree>
+    <p:extLst>
+      <p:ext uri="{BB962C8B-B14F-4D97-AF65-F5344CB8AC3E}">
+        <p14:creationId xmlns:p14="http://schemas.microsoft.com/office/powerpoint/2010/main" val="2034397320"/>
+      </p:ext>
+    </p:extLst>
+  </p:cSld>
+  <p:clrMapOvr>
+    <a:masterClrMapping/>
+  </p:clrMapOvr>
+</p:sldLayout>
+</file>
+
+<file path=ppt/slideLayouts/slideLayout18.xml><?xml version="1.0" encoding="utf-8"?>
+<p:sldLayout xmlns:a="http://schemas.openxmlformats.org/drawingml/2006/main" xmlns:r="http://schemas.openxmlformats.org/officeDocument/2006/relationships" xmlns:p="http://schemas.openxmlformats.org/presentationml/2006/main" type="blank" preserve="1">
+  <p:cSld name="Blank">
+    <p:spTree>
+      <p:nvGrpSpPr>
+        <p:cNvPr id="1" name=""/>
+        <p:cNvGrpSpPr/>
+        <p:nvPr/>
+      </p:nvGrpSpPr>
+      <p:grpSpPr>
+        <a:xfrm>
+          <a:off x="0" y="0"/>
+          <a:ext cx="0" cy="0"/>
+          <a:chOff x="0" y="0"/>
+          <a:chExt cx="0" cy="0"/>
+        </a:xfrm>
+      </p:grpSpPr>
+      <p:sp>
+        <p:nvSpPr>
+          <p:cNvPr id="2" name="Date Placeholder 1">
+            <a:extLst>
+              <a:ext uri="{FF2B5EF4-FFF2-40B4-BE49-F238E27FC236}">
+                <a16:creationId xmlns:a16="http://schemas.microsoft.com/office/drawing/2014/main" id="{32846AA6-92A2-4226-BB84-60EE33DF0041}"/>
+              </a:ext>
+            </a:extLst>
+          </p:cNvPr>
+          <p:cNvSpPr>
+            <a:spLocks noGrp="1"/>
+          </p:cNvSpPr>
+          <p:nvPr>
+            <p:ph type="dt" sz="half" idx="10"/>
+          </p:nvPr>
+        </p:nvSpPr>
+        <p:spPr/>
+        <p:txBody>
+          <a:bodyPr/>
+          <a:lstStyle/>
+          <a:p>
+            <a:fld id="{1804209A-C6D7-496B-8537-5782FDB96C12}" type="datetimeFigureOut">
+              <a:rPr lang="en-US" smtClean="0"/>
+              <a:t>4/29/2026</a:t>
+            </a:fld>
+            <a:endParaRPr lang="en-US"/>
+          </a:p>
+        </p:txBody>
+      </p:sp>
+      <p:sp>
+        <p:nvSpPr>
+          <p:cNvPr id="3" name="Footer Placeholder 2">
+            <a:extLst>
+              <a:ext uri="{FF2B5EF4-FFF2-40B4-BE49-F238E27FC236}">
+                <a16:creationId xmlns:a16="http://schemas.microsoft.com/office/drawing/2014/main" id="{494E6895-C3B0-4240-821D-70BD698BB14E}"/>
+              </a:ext>
+            </a:extLst>
+          </p:cNvPr>
+          <p:cNvSpPr>
+            <a:spLocks noGrp="1"/>
+          </p:cNvSpPr>
+          <p:nvPr>
+            <p:ph type="ftr" sz="quarter" idx="11"/>
+          </p:nvPr>
+        </p:nvSpPr>
+        <p:spPr/>
+        <p:txBody>
+          <a:bodyPr/>
+          <a:lstStyle/>
+          <a:p>
+            <a:endParaRPr lang="en-US"/>
+          </a:p>
+        </p:txBody>
+      </p:sp>
+      <p:sp>
+        <p:nvSpPr>
+          <p:cNvPr id="4" name="Slide Number Placeholder 3">
+            <a:extLst>
+              <a:ext uri="{FF2B5EF4-FFF2-40B4-BE49-F238E27FC236}">
+                <a16:creationId xmlns:a16="http://schemas.microsoft.com/office/drawing/2014/main" id="{2EC811DD-B229-4CE6-B27E-C9DDD717A41E}"/>
+              </a:ext>
+            </a:extLst>
+          </p:cNvPr>
+          <p:cNvSpPr>
+            <a:spLocks noGrp="1"/>
+          </p:cNvSpPr>
+          <p:nvPr>
+            <p:ph type="sldNum" sz="quarter" idx="12"/>
+          </p:nvPr>
+        </p:nvSpPr>
+        <p:spPr/>
+        <p:txBody>
+          <a:bodyPr/>
+          <a:lstStyle/>
+          <a:p>
+            <a:fld id="{6C87352C-6AF1-4D42-A15A-45C6FA13D254}" type="slidenum">
+              <a:rPr lang="en-US" smtClean="0"/>
+              <a:t>‹#›</a:t>
+            </a:fld>
+            <a:endParaRPr lang="en-US"/>
+          </a:p>
+        </p:txBody>
+      </p:sp>
+    </p:spTree>
+    <p:extLst>
+      <p:ext uri="{BB962C8B-B14F-4D97-AF65-F5344CB8AC3E}">
+        <p14:creationId xmlns:p14="http://schemas.microsoft.com/office/powerpoint/2010/main" val="3643013017"/>
+      </p:ext>
+    </p:extLst>
+  </p:cSld>
+  <p:clrMapOvr>
+    <a:masterClrMapping/>
+  </p:clrMapOvr>
+</p:sldLayout>
+</file>
+
+<file path=ppt/slideLayouts/slideLayout19.xml><?xml version="1.0" encoding="utf-8"?>
+<p:sldLayout xmlns:a="http://schemas.openxmlformats.org/drawingml/2006/main" xmlns:r="http://schemas.openxmlformats.org/officeDocument/2006/relationships" xmlns:p="http://schemas.openxmlformats.org/presentationml/2006/main" type="objTx" preserve="1">
+  <p:cSld name="Content with Caption">
+    <p:spTree>
+      <p:nvGrpSpPr>
+        <p:cNvPr id="1" name=""/>
+        <p:cNvGrpSpPr/>
+        <p:nvPr/>
+      </p:nvGrpSpPr>
+      <p:grpSpPr>
+        <a:xfrm>
+          <a:off x="0" y="0"/>
+          <a:ext cx="0" cy="0"/>
+          <a:chOff x="0" y="0"/>
+          <a:chExt cx="0" cy="0"/>
+        </a:xfrm>
+      </p:grpSpPr>
+      <p:sp>
+        <p:nvSpPr>
+          <p:cNvPr id="2" name="Title 1">
+            <a:extLst>
+              <a:ext uri="{FF2B5EF4-FFF2-40B4-BE49-F238E27FC236}">
+                <a16:creationId xmlns:a16="http://schemas.microsoft.com/office/drawing/2014/main" id="{61A76C51-B600-4F09-BDD2-2B4724C91C8D}"/>
+              </a:ext>
+            </a:extLst>
+          </p:cNvPr>
+          <p:cNvSpPr>
+            <a:spLocks noGrp="1"/>
+          </p:cNvSpPr>
+          <p:nvPr>
+            <p:ph type="title"/>
+          </p:nvPr>
+        </p:nvSpPr>
+        <p:spPr>
+          <a:xfrm>
+            <a:off x="839788" y="457200"/>
+            <a:ext cx="3932237" cy="1600200"/>
+          </a:xfrm>
+        </p:spPr>
+        <p:txBody>
+          <a:bodyPr anchor="b"/>
+          <a:lstStyle>
+            <a:lvl1pPr>
+              <a:defRPr sz="3200"/>
+            </a:lvl1pPr>
+          </a:lstStyle>
+          <a:p>
+            <a:r>
+              <a:rPr lang="en-US"/>
+              <a:t>Click to edit Master title style</a:t>
+            </a:r>
+          </a:p>
+        </p:txBody>
+      </p:sp>
+      <p:sp>
+        <p:nvSpPr>
+          <p:cNvPr id="3" name="Content Placeholder 2">
+            <a:extLst>
+              <a:ext uri="{FF2B5EF4-FFF2-40B4-BE49-F238E27FC236}">
+                <a16:creationId xmlns:a16="http://schemas.microsoft.com/office/drawing/2014/main" id="{0585F864-8307-4BB0-8286-75110D953D14}"/>
+              </a:ext>
+            </a:extLst>
+          </p:cNvPr>
+          <p:cNvSpPr>
+            <a:spLocks noGrp="1"/>
+          </p:cNvSpPr>
+          <p:nvPr>
+            <p:ph idx="1"/>
+          </p:nvPr>
+        </p:nvSpPr>
+        <p:spPr>
+          <a:xfrm>
+            <a:off x="5183188" y="987425"/>
+            <a:ext cx="6172200" cy="4873625"/>
+          </a:xfrm>
+        </p:spPr>
+        <p:txBody>
+          <a:bodyPr/>
+          <a:lstStyle>
+            <a:lvl1pPr>
+              <a:defRPr sz="3200"/>
+            </a:lvl1pPr>
+            <a:lvl2pPr>
+              <a:defRPr sz="2800"/>
+            </a:lvl2pPr>
+            <a:lvl3pPr>
+              <a:defRPr sz="2400"/>
+            </a:lvl3pPr>
+            <a:lvl4pPr>
+              <a:defRPr sz="2000"/>
+            </a:lvl4pPr>
+            <a:lvl5pPr>
+              <a:defRPr sz="2000"/>
+            </a:lvl5pPr>
+            <a:lvl6pPr>
+              <a:defRPr sz="2000"/>
+            </a:lvl6pPr>
+            <a:lvl7pPr>
+              <a:defRPr sz="2000"/>
+            </a:lvl7pPr>
+            <a:lvl8pPr>
+              <a:defRPr sz="2000"/>
+            </a:lvl8pPr>
+            <a:lvl9pPr>
+              <a:defRPr sz="2000"/>
+            </a:lvl9pPr>
+          </a:lstStyle>
+          <a:p>
+            <a:pPr lvl="0"/>
+            <a:r>
+              <a:rPr lang="en-US"/>
+              <a:t>Click to edit Master text styles</a:t>
+            </a:r>
+          </a:p>
+          <a:p>
+            <a:pPr lvl="1"/>
+            <a:r>
+              <a:rPr lang="en-US"/>
+              <a:t>Second level</a:t>
+            </a:r>
+          </a:p>
+          <a:p>
+            <a:pPr lvl="2"/>
+            <a:r>
+              <a:rPr lang="en-US"/>
+              <a:t>Third level</a:t>
+            </a:r>
+          </a:p>
+          <a:p>
+            <a:pPr lvl="3"/>
+            <a:r>
+              <a:rPr lang="en-US"/>
+              <a:t>Fourth level</a:t>
+            </a:r>
+          </a:p>
+          <a:p>
+            <a:pPr lvl="4"/>
+            <a:r>
+              <a:rPr lang="en-US"/>
+              <a:t>Fifth level</a:t>
+            </a:r>
+          </a:p>
+        </p:txBody>
+      </p:sp>
+      <p:sp>
+        <p:nvSpPr>
+          <p:cNvPr id="4" name="Text Placeholder 3">
+            <a:extLst>
+              <a:ext uri="{FF2B5EF4-FFF2-40B4-BE49-F238E27FC236}">
+                <a16:creationId xmlns:a16="http://schemas.microsoft.com/office/drawing/2014/main" id="{106ED6D0-0213-4761-A2FF-207AF681F9C9}"/>
+              </a:ext>
+            </a:extLst>
+          </p:cNvPr>
+          <p:cNvSpPr>
+            <a:spLocks noGrp="1"/>
+          </p:cNvSpPr>
+          <p:nvPr>
+            <p:ph type="body" sz="half" idx="2"/>
+          </p:nvPr>
+        </p:nvSpPr>
+        <p:spPr>
+          <a:xfrm>
+            <a:off x="839788" y="2057400"/>
+            <a:ext cx="3932237" cy="3811588"/>
+          </a:xfrm>
+        </p:spPr>
+        <p:txBody>
+          <a:bodyPr/>
+          <a:lstStyle>
+            <a:lvl1pPr marL="0" indent="0">
+              <a:buNone/>
+              <a:defRPr sz="1600"/>
+            </a:lvl1pPr>
+            <a:lvl2pPr marL="457200" indent="0">
+              <a:buNone/>
+              <a:defRPr sz="1400"/>
+            </a:lvl2pPr>
+            <a:lvl3pPr marL="914400" indent="0">
+              <a:buNone/>
+              <a:defRPr sz="1200"/>
+            </a:lvl3pPr>
+            <a:lvl4pPr marL="1371600" indent="0">
+              <a:buNone/>
+              <a:defRPr sz="1000"/>
+            </a:lvl4pPr>
+            <a:lvl5pPr marL="1828800" indent="0">
+              <a:buNone/>
+              <a:defRPr sz="1000"/>
+            </a:lvl5pPr>
+            <a:lvl6pPr marL="2286000" indent="0">
+              <a:buNone/>
+              <a:defRPr sz="1000"/>
+            </a:lvl6pPr>
+            <a:lvl7pPr marL="2743200" indent="0">
+              <a:buNone/>
+              <a:defRPr sz="1000"/>
+            </a:lvl7pPr>
+            <a:lvl8pPr marL="3200400" indent="0">
+              <a:buNone/>
+              <a:defRPr sz="1000"/>
+            </a:lvl8pPr>
+            <a:lvl9pPr marL="3657600" indent="0">
+              <a:buNone/>
+              <a:defRPr sz="1000"/>
+            </a:lvl9pPr>
+          </a:lstStyle>
+          <a:p>
+            <a:pPr lvl="0"/>
+            <a:r>
+              <a:rPr lang="en-US"/>
+              <a:t>Click to edit Master text styles</a:t>
+            </a:r>
+          </a:p>
+        </p:txBody>
+      </p:sp>
+      <p:sp>
+        <p:nvSpPr>
+          <p:cNvPr id="5" name="Date Placeholder 4">
+            <a:extLst>
+              <a:ext uri="{FF2B5EF4-FFF2-40B4-BE49-F238E27FC236}">
+                <a16:creationId xmlns:a16="http://schemas.microsoft.com/office/drawing/2014/main" id="{8A63E146-30D1-4B24-8061-A6C8FF8D32FE}"/>
+              </a:ext>
+            </a:extLst>
+          </p:cNvPr>
+          <p:cNvSpPr>
+            <a:spLocks noGrp="1"/>
+          </p:cNvSpPr>
+          <p:nvPr>
+            <p:ph type="dt" sz="half" idx="10"/>
+          </p:nvPr>
+        </p:nvSpPr>
+        <p:spPr/>
+        <p:txBody>
+          <a:bodyPr/>
+          <a:lstStyle/>
+          <a:p>
+            <a:fld id="{1804209A-C6D7-496B-8537-5782FDB96C12}" type="datetimeFigureOut">
+              <a:rPr lang="en-US" smtClean="0"/>
+              <a:t>4/29/2026</a:t>
+            </a:fld>
+            <a:endParaRPr lang="en-US"/>
+          </a:p>
+        </p:txBody>
+      </p:sp>
+      <p:sp>
+        <p:nvSpPr>
+          <p:cNvPr id="6" name="Footer Placeholder 5">
+            <a:extLst>
+              <a:ext uri="{FF2B5EF4-FFF2-40B4-BE49-F238E27FC236}">
+                <a16:creationId xmlns:a16="http://schemas.microsoft.com/office/drawing/2014/main" id="{B86F91EE-3404-4217-A0A3-C9E2B397B1A5}"/>
+              </a:ext>
+            </a:extLst>
+          </p:cNvPr>
+          <p:cNvSpPr>
+            <a:spLocks noGrp="1"/>
+          </p:cNvSpPr>
+          <p:nvPr>
+            <p:ph type="ftr" sz="quarter" idx="11"/>
+          </p:nvPr>
+        </p:nvSpPr>
+        <p:spPr/>
+        <p:txBody>
+          <a:bodyPr/>
+          <a:lstStyle/>
+          <a:p>
+            <a:endParaRPr lang="en-US"/>
+          </a:p>
+        </p:txBody>
+      </p:sp>
+      <p:sp>
+        <p:nvSpPr>
+          <p:cNvPr id="7" name="Slide Number Placeholder 6">
+            <a:extLst>
+              <a:ext uri="{FF2B5EF4-FFF2-40B4-BE49-F238E27FC236}">
+                <a16:creationId xmlns:a16="http://schemas.microsoft.com/office/drawing/2014/main" id="{2A73FBE4-DEF7-4F86-BF25-3503D58F8ABC}"/>
+              </a:ext>
+            </a:extLst>
+          </p:cNvPr>
+          <p:cNvSpPr>
+            <a:spLocks noGrp="1"/>
+          </p:cNvSpPr>
+          <p:nvPr>
+            <p:ph type="sldNum" sz="quarter" idx="12"/>
+          </p:nvPr>
+        </p:nvSpPr>
+        <p:spPr/>
+        <p:txBody>
+          <a:bodyPr/>
+          <a:lstStyle/>
+          <a:p>
+            <a:fld id="{6C87352C-6AF1-4D42-A15A-45C6FA13D254}" type="slidenum">
+              <a:rPr lang="en-US" smtClean="0"/>
+              <a:t>‹#›</a:t>
+            </a:fld>
+            <a:endParaRPr lang="en-US"/>
+          </a:p>
+        </p:txBody>
+      </p:sp>
+    </p:spTree>
+    <p:extLst>
+      <p:ext uri="{BB962C8B-B14F-4D97-AF65-F5344CB8AC3E}">
+        <p14:creationId xmlns:p14="http://schemas.microsoft.com/office/powerpoint/2010/main" val="3253384276"/>
       </p:ext>
     </p:extLst>
   </p:cSld>
@@ -745,10 +2691,9 @@
           <a:lstStyle/>
           <a:p>
             <a:r>
-              <a:rPr lang="en-US" smtClean="0"/>
+              <a:rPr lang="en-US"/>
               <a:t>Click to edit Master title style</a:t>
             </a:r>
-            <a:endParaRPr lang="en-US"/>
           </a:p>
         </p:txBody>
       </p:sp>
@@ -769,38 +2714,37 @@
           <a:p>
             <a:pPr lvl="0"/>
             <a:r>
-              <a:rPr lang="en-US" smtClean="0"/>
+              <a:rPr lang="en-US"/>
               <a:t>Click to edit Master text styles</a:t>
             </a:r>
           </a:p>
           <a:p>
             <a:pPr lvl="1"/>
             <a:r>
-              <a:rPr lang="en-US" smtClean="0"/>
+              <a:rPr lang="en-US"/>
               <a:t>Second level</a:t>
             </a:r>
           </a:p>
           <a:p>
             <a:pPr lvl="2"/>
             <a:r>
-              <a:rPr lang="en-US" smtClean="0"/>
+              <a:rPr lang="en-US"/>
               <a:t>Third level</a:t>
             </a:r>
           </a:p>
           <a:p>
             <a:pPr lvl="3"/>
             <a:r>
-              <a:rPr lang="en-US" smtClean="0"/>
+              <a:rPr lang="en-US"/>
               <a:t>Fourth level</a:t>
             </a:r>
           </a:p>
           <a:p>
             <a:pPr lvl="4"/>
             <a:r>
-              <a:rPr lang="en-US" smtClean="0"/>
+              <a:rPr lang="en-US"/>
               <a:t>Fifth level</a:t>
             </a:r>
-            <a:endParaRPr lang="en-US"/>
           </a:p>
         </p:txBody>
       </p:sp>
@@ -821,7 +2765,7 @@
           <a:p>
             <a:fld id="{5BCAD085-E8A6-8845-BD4E-CB4CCA059FC4}" type="datetimeFigureOut">
               <a:rPr lang="en-US" smtClean="0"/>
-              <a:t>1/27/13</a:t>
+              <a:t>4/29/2026</a:t>
             </a:fld>
             <a:endParaRPr lang="en-US"/>
           </a:p>
@@ -873,6 +2817,700 @@
     <p:extLst>
       <p:ext uri="{BB962C8B-B14F-4D97-AF65-F5344CB8AC3E}">
         <p14:creationId xmlns:p14="http://schemas.microsoft.com/office/powerpoint/2010/main" val="2614314258"/>
+      </p:ext>
+    </p:extLst>
+  </p:cSld>
+  <p:clrMapOvr>
+    <a:masterClrMapping/>
+  </p:clrMapOvr>
+</p:sldLayout>
+</file>
+
+<file path=ppt/slideLayouts/slideLayout20.xml><?xml version="1.0" encoding="utf-8"?>
+<p:sldLayout xmlns:a="http://schemas.openxmlformats.org/drawingml/2006/main" xmlns:r="http://schemas.openxmlformats.org/officeDocument/2006/relationships" xmlns:p="http://schemas.openxmlformats.org/presentationml/2006/main" type="picTx" preserve="1">
+  <p:cSld name="Picture with Caption">
+    <p:spTree>
+      <p:nvGrpSpPr>
+        <p:cNvPr id="1" name=""/>
+        <p:cNvGrpSpPr/>
+        <p:nvPr/>
+      </p:nvGrpSpPr>
+      <p:grpSpPr>
+        <a:xfrm>
+          <a:off x="0" y="0"/>
+          <a:ext cx="0" cy="0"/>
+          <a:chOff x="0" y="0"/>
+          <a:chExt cx="0" cy="0"/>
+        </a:xfrm>
+      </p:grpSpPr>
+      <p:sp>
+        <p:nvSpPr>
+          <p:cNvPr id="2" name="Title 1">
+            <a:extLst>
+              <a:ext uri="{FF2B5EF4-FFF2-40B4-BE49-F238E27FC236}">
+                <a16:creationId xmlns:a16="http://schemas.microsoft.com/office/drawing/2014/main" id="{E142E020-BD4C-4344-848C-8138D3A69AAA}"/>
+              </a:ext>
+            </a:extLst>
+          </p:cNvPr>
+          <p:cNvSpPr>
+            <a:spLocks noGrp="1"/>
+          </p:cNvSpPr>
+          <p:nvPr>
+            <p:ph type="title"/>
+          </p:nvPr>
+        </p:nvSpPr>
+        <p:spPr>
+          <a:xfrm>
+            <a:off x="839788" y="457200"/>
+            <a:ext cx="3932237" cy="1600200"/>
+          </a:xfrm>
+        </p:spPr>
+        <p:txBody>
+          <a:bodyPr anchor="b"/>
+          <a:lstStyle>
+            <a:lvl1pPr>
+              <a:defRPr sz="3200"/>
+            </a:lvl1pPr>
+          </a:lstStyle>
+          <a:p>
+            <a:r>
+              <a:rPr lang="en-US"/>
+              <a:t>Click to edit Master title style</a:t>
+            </a:r>
+          </a:p>
+        </p:txBody>
+      </p:sp>
+      <p:sp>
+        <p:nvSpPr>
+          <p:cNvPr id="3" name="Picture Placeholder 2">
+            <a:extLst>
+              <a:ext uri="{FF2B5EF4-FFF2-40B4-BE49-F238E27FC236}">
+                <a16:creationId xmlns:a16="http://schemas.microsoft.com/office/drawing/2014/main" id="{E9197018-A452-4434-A6EB-6A6F84874460}"/>
+              </a:ext>
+            </a:extLst>
+          </p:cNvPr>
+          <p:cNvSpPr>
+            <a:spLocks noGrp="1"/>
+          </p:cNvSpPr>
+          <p:nvPr>
+            <p:ph type="pic" idx="1"/>
+          </p:nvPr>
+        </p:nvSpPr>
+        <p:spPr>
+          <a:xfrm>
+            <a:off x="5183188" y="987425"/>
+            <a:ext cx="6172200" cy="4873625"/>
+          </a:xfrm>
+        </p:spPr>
+        <p:txBody>
+          <a:bodyPr/>
+          <a:lstStyle>
+            <a:lvl1pPr marL="0" indent="0">
+              <a:buNone/>
+              <a:defRPr sz="3200"/>
+            </a:lvl1pPr>
+            <a:lvl2pPr marL="457200" indent="0">
+              <a:buNone/>
+              <a:defRPr sz="2800"/>
+            </a:lvl2pPr>
+            <a:lvl3pPr marL="914400" indent="0">
+              <a:buNone/>
+              <a:defRPr sz="2400"/>
+            </a:lvl3pPr>
+            <a:lvl4pPr marL="1371600" indent="0">
+              <a:buNone/>
+              <a:defRPr sz="2000"/>
+            </a:lvl4pPr>
+            <a:lvl5pPr marL="1828800" indent="0">
+              <a:buNone/>
+              <a:defRPr sz="2000"/>
+            </a:lvl5pPr>
+            <a:lvl6pPr marL="2286000" indent="0">
+              <a:buNone/>
+              <a:defRPr sz="2000"/>
+            </a:lvl6pPr>
+            <a:lvl7pPr marL="2743200" indent="0">
+              <a:buNone/>
+              <a:defRPr sz="2000"/>
+            </a:lvl7pPr>
+            <a:lvl8pPr marL="3200400" indent="0">
+              <a:buNone/>
+              <a:defRPr sz="2000"/>
+            </a:lvl8pPr>
+            <a:lvl9pPr marL="3657600" indent="0">
+              <a:buNone/>
+              <a:defRPr sz="2000"/>
+            </a:lvl9pPr>
+          </a:lstStyle>
+          <a:p>
+            <a:endParaRPr lang="en-US"/>
+          </a:p>
+        </p:txBody>
+      </p:sp>
+      <p:sp>
+        <p:nvSpPr>
+          <p:cNvPr id="4" name="Text Placeholder 3">
+            <a:extLst>
+              <a:ext uri="{FF2B5EF4-FFF2-40B4-BE49-F238E27FC236}">
+                <a16:creationId xmlns:a16="http://schemas.microsoft.com/office/drawing/2014/main" id="{1284A571-6865-4C63-9372-ED1496784FCC}"/>
+              </a:ext>
+            </a:extLst>
+          </p:cNvPr>
+          <p:cNvSpPr>
+            <a:spLocks noGrp="1"/>
+          </p:cNvSpPr>
+          <p:nvPr>
+            <p:ph type="body" sz="half" idx="2"/>
+          </p:nvPr>
+        </p:nvSpPr>
+        <p:spPr>
+          <a:xfrm>
+            <a:off x="839788" y="2057400"/>
+            <a:ext cx="3932237" cy="3811588"/>
+          </a:xfrm>
+        </p:spPr>
+        <p:txBody>
+          <a:bodyPr/>
+          <a:lstStyle>
+            <a:lvl1pPr marL="0" indent="0">
+              <a:buNone/>
+              <a:defRPr sz="1600"/>
+            </a:lvl1pPr>
+            <a:lvl2pPr marL="457200" indent="0">
+              <a:buNone/>
+              <a:defRPr sz="1400"/>
+            </a:lvl2pPr>
+            <a:lvl3pPr marL="914400" indent="0">
+              <a:buNone/>
+              <a:defRPr sz="1200"/>
+            </a:lvl3pPr>
+            <a:lvl4pPr marL="1371600" indent="0">
+              <a:buNone/>
+              <a:defRPr sz="1000"/>
+            </a:lvl4pPr>
+            <a:lvl5pPr marL="1828800" indent="0">
+              <a:buNone/>
+              <a:defRPr sz="1000"/>
+            </a:lvl5pPr>
+            <a:lvl6pPr marL="2286000" indent="0">
+              <a:buNone/>
+              <a:defRPr sz="1000"/>
+            </a:lvl6pPr>
+            <a:lvl7pPr marL="2743200" indent="0">
+              <a:buNone/>
+              <a:defRPr sz="1000"/>
+            </a:lvl7pPr>
+            <a:lvl8pPr marL="3200400" indent="0">
+              <a:buNone/>
+              <a:defRPr sz="1000"/>
+            </a:lvl8pPr>
+            <a:lvl9pPr marL="3657600" indent="0">
+              <a:buNone/>
+              <a:defRPr sz="1000"/>
+            </a:lvl9pPr>
+          </a:lstStyle>
+          <a:p>
+            <a:pPr lvl="0"/>
+            <a:r>
+              <a:rPr lang="en-US"/>
+              <a:t>Click to edit Master text styles</a:t>
+            </a:r>
+          </a:p>
+        </p:txBody>
+      </p:sp>
+      <p:sp>
+        <p:nvSpPr>
+          <p:cNvPr id="5" name="Date Placeholder 4">
+            <a:extLst>
+              <a:ext uri="{FF2B5EF4-FFF2-40B4-BE49-F238E27FC236}">
+                <a16:creationId xmlns:a16="http://schemas.microsoft.com/office/drawing/2014/main" id="{75DC2509-3A6D-4AE4-A63E-A9ECC5E47DBB}"/>
+              </a:ext>
+            </a:extLst>
+          </p:cNvPr>
+          <p:cNvSpPr>
+            <a:spLocks noGrp="1"/>
+          </p:cNvSpPr>
+          <p:nvPr>
+            <p:ph type="dt" sz="half" idx="10"/>
+          </p:nvPr>
+        </p:nvSpPr>
+        <p:spPr/>
+        <p:txBody>
+          <a:bodyPr/>
+          <a:lstStyle/>
+          <a:p>
+            <a:fld id="{1804209A-C6D7-496B-8537-5782FDB96C12}" type="datetimeFigureOut">
+              <a:rPr lang="en-US" smtClean="0"/>
+              <a:t>4/29/2026</a:t>
+            </a:fld>
+            <a:endParaRPr lang="en-US"/>
+          </a:p>
+        </p:txBody>
+      </p:sp>
+      <p:sp>
+        <p:nvSpPr>
+          <p:cNvPr id="6" name="Footer Placeholder 5">
+            <a:extLst>
+              <a:ext uri="{FF2B5EF4-FFF2-40B4-BE49-F238E27FC236}">
+                <a16:creationId xmlns:a16="http://schemas.microsoft.com/office/drawing/2014/main" id="{EA427C3F-25C2-48A9-9D23-4341D6F19FA3}"/>
+              </a:ext>
+            </a:extLst>
+          </p:cNvPr>
+          <p:cNvSpPr>
+            <a:spLocks noGrp="1"/>
+          </p:cNvSpPr>
+          <p:nvPr>
+            <p:ph type="ftr" sz="quarter" idx="11"/>
+          </p:nvPr>
+        </p:nvSpPr>
+        <p:spPr/>
+        <p:txBody>
+          <a:bodyPr/>
+          <a:lstStyle/>
+          <a:p>
+            <a:endParaRPr lang="en-US"/>
+          </a:p>
+        </p:txBody>
+      </p:sp>
+      <p:sp>
+        <p:nvSpPr>
+          <p:cNvPr id="7" name="Slide Number Placeholder 6">
+            <a:extLst>
+              <a:ext uri="{FF2B5EF4-FFF2-40B4-BE49-F238E27FC236}">
+                <a16:creationId xmlns:a16="http://schemas.microsoft.com/office/drawing/2014/main" id="{63B3DBA2-438D-4462-A28E-7AC292EADAAD}"/>
+              </a:ext>
+            </a:extLst>
+          </p:cNvPr>
+          <p:cNvSpPr>
+            <a:spLocks noGrp="1"/>
+          </p:cNvSpPr>
+          <p:nvPr>
+            <p:ph type="sldNum" sz="quarter" idx="12"/>
+          </p:nvPr>
+        </p:nvSpPr>
+        <p:spPr/>
+        <p:txBody>
+          <a:bodyPr/>
+          <a:lstStyle/>
+          <a:p>
+            <a:fld id="{6C87352C-6AF1-4D42-A15A-45C6FA13D254}" type="slidenum">
+              <a:rPr lang="en-US" smtClean="0"/>
+              <a:t>‹#›</a:t>
+            </a:fld>
+            <a:endParaRPr lang="en-US"/>
+          </a:p>
+        </p:txBody>
+      </p:sp>
+    </p:spTree>
+    <p:extLst>
+      <p:ext uri="{BB962C8B-B14F-4D97-AF65-F5344CB8AC3E}">
+        <p14:creationId xmlns:p14="http://schemas.microsoft.com/office/powerpoint/2010/main" val="2434158445"/>
+      </p:ext>
+    </p:extLst>
+  </p:cSld>
+  <p:clrMapOvr>
+    <a:masterClrMapping/>
+  </p:clrMapOvr>
+</p:sldLayout>
+</file>
+
+<file path=ppt/slideLayouts/slideLayout21.xml><?xml version="1.0" encoding="utf-8"?>
+<p:sldLayout xmlns:a="http://schemas.openxmlformats.org/drawingml/2006/main" xmlns:r="http://schemas.openxmlformats.org/officeDocument/2006/relationships" xmlns:p="http://schemas.openxmlformats.org/presentationml/2006/main" type="vertTx" preserve="1">
+  <p:cSld name="Title and Vertical Text">
+    <p:spTree>
+      <p:nvGrpSpPr>
+        <p:cNvPr id="1" name=""/>
+        <p:cNvGrpSpPr/>
+        <p:nvPr/>
+      </p:nvGrpSpPr>
+      <p:grpSpPr>
+        <a:xfrm>
+          <a:off x="0" y="0"/>
+          <a:ext cx="0" cy="0"/>
+          <a:chOff x="0" y="0"/>
+          <a:chExt cx="0" cy="0"/>
+        </a:xfrm>
+      </p:grpSpPr>
+      <p:sp>
+        <p:nvSpPr>
+          <p:cNvPr id="2" name="Title 1">
+            <a:extLst>
+              <a:ext uri="{FF2B5EF4-FFF2-40B4-BE49-F238E27FC236}">
+                <a16:creationId xmlns:a16="http://schemas.microsoft.com/office/drawing/2014/main" id="{64CE4C59-BFB9-4648-8769-81D7F727D96E}"/>
+              </a:ext>
+            </a:extLst>
+          </p:cNvPr>
+          <p:cNvSpPr>
+            <a:spLocks noGrp="1"/>
+          </p:cNvSpPr>
+          <p:nvPr>
+            <p:ph type="title"/>
+          </p:nvPr>
+        </p:nvSpPr>
+        <p:spPr/>
+        <p:txBody>
+          <a:bodyPr/>
+          <a:lstStyle/>
+          <a:p>
+            <a:r>
+              <a:rPr lang="en-US"/>
+              <a:t>Click to edit Master title style</a:t>
+            </a:r>
+          </a:p>
+        </p:txBody>
+      </p:sp>
+      <p:sp>
+        <p:nvSpPr>
+          <p:cNvPr id="3" name="Vertical Text Placeholder 2">
+            <a:extLst>
+              <a:ext uri="{FF2B5EF4-FFF2-40B4-BE49-F238E27FC236}">
+                <a16:creationId xmlns:a16="http://schemas.microsoft.com/office/drawing/2014/main" id="{89BC954F-CF0A-4E8E-8FFC-A03842B30491}"/>
+              </a:ext>
+            </a:extLst>
+          </p:cNvPr>
+          <p:cNvSpPr>
+            <a:spLocks noGrp="1"/>
+          </p:cNvSpPr>
+          <p:nvPr>
+            <p:ph type="body" orient="vert" idx="1"/>
+          </p:nvPr>
+        </p:nvSpPr>
+        <p:spPr/>
+        <p:txBody>
+          <a:bodyPr vert="eaVert"/>
+          <a:lstStyle/>
+          <a:p>
+            <a:pPr lvl="0"/>
+            <a:r>
+              <a:rPr lang="en-US"/>
+              <a:t>Click to edit Master text styles</a:t>
+            </a:r>
+          </a:p>
+          <a:p>
+            <a:pPr lvl="1"/>
+            <a:r>
+              <a:rPr lang="en-US"/>
+              <a:t>Second level</a:t>
+            </a:r>
+          </a:p>
+          <a:p>
+            <a:pPr lvl="2"/>
+            <a:r>
+              <a:rPr lang="en-US"/>
+              <a:t>Third level</a:t>
+            </a:r>
+          </a:p>
+          <a:p>
+            <a:pPr lvl="3"/>
+            <a:r>
+              <a:rPr lang="en-US"/>
+              <a:t>Fourth level</a:t>
+            </a:r>
+          </a:p>
+          <a:p>
+            <a:pPr lvl="4"/>
+            <a:r>
+              <a:rPr lang="en-US"/>
+              <a:t>Fifth level</a:t>
+            </a:r>
+          </a:p>
+        </p:txBody>
+      </p:sp>
+      <p:sp>
+        <p:nvSpPr>
+          <p:cNvPr id="4" name="Date Placeholder 3">
+            <a:extLst>
+              <a:ext uri="{FF2B5EF4-FFF2-40B4-BE49-F238E27FC236}">
+                <a16:creationId xmlns:a16="http://schemas.microsoft.com/office/drawing/2014/main" id="{AD63C079-FBAA-4617-9C03-2BFC538D0004}"/>
+              </a:ext>
+            </a:extLst>
+          </p:cNvPr>
+          <p:cNvSpPr>
+            <a:spLocks noGrp="1"/>
+          </p:cNvSpPr>
+          <p:nvPr>
+            <p:ph type="dt" sz="half" idx="10"/>
+          </p:nvPr>
+        </p:nvSpPr>
+        <p:spPr/>
+        <p:txBody>
+          <a:bodyPr/>
+          <a:lstStyle/>
+          <a:p>
+            <a:fld id="{1804209A-C6D7-496B-8537-5782FDB96C12}" type="datetimeFigureOut">
+              <a:rPr lang="en-US" smtClean="0"/>
+              <a:t>4/29/2026</a:t>
+            </a:fld>
+            <a:endParaRPr lang="en-US"/>
+          </a:p>
+        </p:txBody>
+      </p:sp>
+      <p:sp>
+        <p:nvSpPr>
+          <p:cNvPr id="5" name="Footer Placeholder 4">
+            <a:extLst>
+              <a:ext uri="{FF2B5EF4-FFF2-40B4-BE49-F238E27FC236}">
+                <a16:creationId xmlns:a16="http://schemas.microsoft.com/office/drawing/2014/main" id="{D9ECF761-8E7C-4A50-B727-6F60869065BC}"/>
+              </a:ext>
+            </a:extLst>
+          </p:cNvPr>
+          <p:cNvSpPr>
+            <a:spLocks noGrp="1"/>
+          </p:cNvSpPr>
+          <p:nvPr>
+            <p:ph type="ftr" sz="quarter" idx="11"/>
+          </p:nvPr>
+        </p:nvSpPr>
+        <p:spPr/>
+        <p:txBody>
+          <a:bodyPr/>
+          <a:lstStyle/>
+          <a:p>
+            <a:endParaRPr lang="en-US"/>
+          </a:p>
+        </p:txBody>
+      </p:sp>
+      <p:sp>
+        <p:nvSpPr>
+          <p:cNvPr id="6" name="Slide Number Placeholder 5">
+            <a:extLst>
+              <a:ext uri="{FF2B5EF4-FFF2-40B4-BE49-F238E27FC236}">
+                <a16:creationId xmlns:a16="http://schemas.microsoft.com/office/drawing/2014/main" id="{71EF500C-A4CB-4A2A-9F5D-A3F8FFABFB54}"/>
+              </a:ext>
+            </a:extLst>
+          </p:cNvPr>
+          <p:cNvSpPr>
+            <a:spLocks noGrp="1"/>
+          </p:cNvSpPr>
+          <p:nvPr>
+            <p:ph type="sldNum" sz="quarter" idx="12"/>
+          </p:nvPr>
+        </p:nvSpPr>
+        <p:spPr/>
+        <p:txBody>
+          <a:bodyPr/>
+          <a:lstStyle/>
+          <a:p>
+            <a:fld id="{6C87352C-6AF1-4D42-A15A-45C6FA13D254}" type="slidenum">
+              <a:rPr lang="en-US" smtClean="0"/>
+              <a:t>‹#›</a:t>
+            </a:fld>
+            <a:endParaRPr lang="en-US"/>
+          </a:p>
+        </p:txBody>
+      </p:sp>
+    </p:spTree>
+    <p:extLst>
+      <p:ext uri="{BB962C8B-B14F-4D97-AF65-F5344CB8AC3E}">
+        <p14:creationId xmlns:p14="http://schemas.microsoft.com/office/powerpoint/2010/main" val="3109234676"/>
+      </p:ext>
+    </p:extLst>
+  </p:cSld>
+  <p:clrMapOvr>
+    <a:masterClrMapping/>
+  </p:clrMapOvr>
+</p:sldLayout>
+</file>
+
+<file path=ppt/slideLayouts/slideLayout22.xml><?xml version="1.0" encoding="utf-8"?>
+<p:sldLayout xmlns:a="http://schemas.openxmlformats.org/drawingml/2006/main" xmlns:r="http://schemas.openxmlformats.org/officeDocument/2006/relationships" xmlns:p="http://schemas.openxmlformats.org/presentationml/2006/main" type="vertTitleAndTx" preserve="1">
+  <p:cSld name="Vertical Title and Text">
+    <p:spTree>
+      <p:nvGrpSpPr>
+        <p:cNvPr id="1" name=""/>
+        <p:cNvGrpSpPr/>
+        <p:nvPr/>
+      </p:nvGrpSpPr>
+      <p:grpSpPr>
+        <a:xfrm>
+          <a:off x="0" y="0"/>
+          <a:ext cx="0" cy="0"/>
+          <a:chOff x="0" y="0"/>
+          <a:chExt cx="0" cy="0"/>
+        </a:xfrm>
+      </p:grpSpPr>
+      <p:sp>
+        <p:nvSpPr>
+          <p:cNvPr id="2" name="Vertical Title 1">
+            <a:extLst>
+              <a:ext uri="{FF2B5EF4-FFF2-40B4-BE49-F238E27FC236}">
+                <a16:creationId xmlns:a16="http://schemas.microsoft.com/office/drawing/2014/main" id="{4FDFE6EE-C625-433F-A4C1-17FE127D072D}"/>
+              </a:ext>
+            </a:extLst>
+          </p:cNvPr>
+          <p:cNvSpPr>
+            <a:spLocks noGrp="1"/>
+          </p:cNvSpPr>
+          <p:nvPr>
+            <p:ph type="title" orient="vert"/>
+          </p:nvPr>
+        </p:nvSpPr>
+        <p:spPr>
+          <a:xfrm>
+            <a:off x="8724900" y="365125"/>
+            <a:ext cx="2628900" cy="5811838"/>
+          </a:xfrm>
+        </p:spPr>
+        <p:txBody>
+          <a:bodyPr vert="eaVert"/>
+          <a:lstStyle/>
+          <a:p>
+            <a:r>
+              <a:rPr lang="en-US"/>
+              <a:t>Click to edit Master title style</a:t>
+            </a:r>
+          </a:p>
+        </p:txBody>
+      </p:sp>
+      <p:sp>
+        <p:nvSpPr>
+          <p:cNvPr id="3" name="Vertical Text Placeholder 2">
+            <a:extLst>
+              <a:ext uri="{FF2B5EF4-FFF2-40B4-BE49-F238E27FC236}">
+                <a16:creationId xmlns:a16="http://schemas.microsoft.com/office/drawing/2014/main" id="{EDA67B4D-7F6B-4A95-83B1-7991DDC8B9E1}"/>
+              </a:ext>
+            </a:extLst>
+          </p:cNvPr>
+          <p:cNvSpPr>
+            <a:spLocks noGrp="1"/>
+          </p:cNvSpPr>
+          <p:nvPr>
+            <p:ph type="body" orient="vert" idx="1"/>
+          </p:nvPr>
+        </p:nvSpPr>
+        <p:spPr>
+          <a:xfrm>
+            <a:off x="838200" y="365125"/>
+            <a:ext cx="7734300" cy="5811838"/>
+          </a:xfrm>
+        </p:spPr>
+        <p:txBody>
+          <a:bodyPr vert="eaVert"/>
+          <a:lstStyle/>
+          <a:p>
+            <a:pPr lvl="0"/>
+            <a:r>
+              <a:rPr lang="en-US"/>
+              <a:t>Click to edit Master text styles</a:t>
+            </a:r>
+          </a:p>
+          <a:p>
+            <a:pPr lvl="1"/>
+            <a:r>
+              <a:rPr lang="en-US"/>
+              <a:t>Second level</a:t>
+            </a:r>
+          </a:p>
+          <a:p>
+            <a:pPr lvl="2"/>
+            <a:r>
+              <a:rPr lang="en-US"/>
+              <a:t>Third level</a:t>
+            </a:r>
+          </a:p>
+          <a:p>
+            <a:pPr lvl="3"/>
+            <a:r>
+              <a:rPr lang="en-US"/>
+              <a:t>Fourth level</a:t>
+            </a:r>
+          </a:p>
+          <a:p>
+            <a:pPr lvl="4"/>
+            <a:r>
+              <a:rPr lang="en-US"/>
+              <a:t>Fifth level</a:t>
+            </a:r>
+          </a:p>
+        </p:txBody>
+      </p:sp>
+      <p:sp>
+        <p:nvSpPr>
+          <p:cNvPr id="4" name="Date Placeholder 3">
+            <a:extLst>
+              <a:ext uri="{FF2B5EF4-FFF2-40B4-BE49-F238E27FC236}">
+                <a16:creationId xmlns:a16="http://schemas.microsoft.com/office/drawing/2014/main" id="{C354C59D-F805-4DE1-A743-958927DEC935}"/>
+              </a:ext>
+            </a:extLst>
+          </p:cNvPr>
+          <p:cNvSpPr>
+            <a:spLocks noGrp="1"/>
+          </p:cNvSpPr>
+          <p:nvPr>
+            <p:ph type="dt" sz="half" idx="10"/>
+          </p:nvPr>
+        </p:nvSpPr>
+        <p:spPr/>
+        <p:txBody>
+          <a:bodyPr/>
+          <a:lstStyle/>
+          <a:p>
+            <a:fld id="{1804209A-C6D7-496B-8537-5782FDB96C12}" type="datetimeFigureOut">
+              <a:rPr lang="en-US" smtClean="0"/>
+              <a:t>4/29/2026</a:t>
+            </a:fld>
+            <a:endParaRPr lang="en-US"/>
+          </a:p>
+        </p:txBody>
+      </p:sp>
+      <p:sp>
+        <p:nvSpPr>
+          <p:cNvPr id="5" name="Footer Placeholder 4">
+            <a:extLst>
+              <a:ext uri="{FF2B5EF4-FFF2-40B4-BE49-F238E27FC236}">
+                <a16:creationId xmlns:a16="http://schemas.microsoft.com/office/drawing/2014/main" id="{74B82274-7ABC-4F74-A181-96FA51F2EF1F}"/>
+              </a:ext>
+            </a:extLst>
+          </p:cNvPr>
+          <p:cNvSpPr>
+            <a:spLocks noGrp="1"/>
+          </p:cNvSpPr>
+          <p:nvPr>
+            <p:ph type="ftr" sz="quarter" idx="11"/>
+          </p:nvPr>
+        </p:nvSpPr>
+        <p:spPr/>
+        <p:txBody>
+          <a:bodyPr/>
+          <a:lstStyle/>
+          <a:p>
+            <a:endParaRPr lang="en-US"/>
+          </a:p>
+        </p:txBody>
+      </p:sp>
+      <p:sp>
+        <p:nvSpPr>
+          <p:cNvPr id="6" name="Slide Number Placeholder 5">
+            <a:extLst>
+              <a:ext uri="{FF2B5EF4-FFF2-40B4-BE49-F238E27FC236}">
+                <a16:creationId xmlns:a16="http://schemas.microsoft.com/office/drawing/2014/main" id="{87708FD9-33BB-4C87-9B32-07D183E3414E}"/>
+              </a:ext>
+            </a:extLst>
+          </p:cNvPr>
+          <p:cNvSpPr>
+            <a:spLocks noGrp="1"/>
+          </p:cNvSpPr>
+          <p:nvPr>
+            <p:ph type="sldNum" sz="quarter" idx="12"/>
+          </p:nvPr>
+        </p:nvSpPr>
+        <p:spPr/>
+        <p:txBody>
+          <a:bodyPr/>
+          <a:lstStyle/>
+          <a:p>
+            <a:fld id="{6C87352C-6AF1-4D42-A15A-45C6FA13D254}" type="slidenum">
+              <a:rPr lang="en-US" smtClean="0"/>
+              <a:t>‹#›</a:t>
+            </a:fld>
+            <a:endParaRPr lang="en-US"/>
+          </a:p>
+        </p:txBody>
+      </p:sp>
+    </p:spTree>
+    <p:extLst>
+      <p:ext uri="{BB962C8B-B14F-4D97-AF65-F5344CB8AC3E}">
+        <p14:creationId xmlns:p14="http://schemas.microsoft.com/office/powerpoint/2010/main" val="856274245"/>
       </p:ext>
     </p:extLst>
   </p:cSld>
@@ -924,10 +3562,9 @@
           </a:lstStyle>
           <a:p>
             <a:r>
-              <a:rPr lang="en-US" smtClean="0"/>
+              <a:rPr lang="en-US"/>
               <a:t>Click to edit Master title style</a:t>
             </a:r>
-            <a:endParaRPr lang="en-US"/>
           </a:p>
         </p:txBody>
       </p:sp>
@@ -1044,7 +3681,7 @@
           <a:p>
             <a:pPr lvl="0"/>
             <a:r>
-              <a:rPr lang="en-US" smtClean="0"/>
+              <a:rPr lang="en-US"/>
               <a:t>Click to edit Master text styles</a:t>
             </a:r>
           </a:p>
@@ -1067,7 +3704,7 @@
           <a:p>
             <a:fld id="{5BCAD085-E8A6-8845-BD4E-CB4CCA059FC4}" type="datetimeFigureOut">
               <a:rPr lang="en-US" smtClean="0"/>
-              <a:t>1/27/13</a:t>
+              <a:t>4/29/2026</a:t>
             </a:fld>
             <a:endParaRPr lang="en-US"/>
           </a:p>
@@ -1161,10 +3798,9 @@
           <a:lstStyle/>
           <a:p>
             <a:r>
-              <a:rPr lang="en-US" smtClean="0"/>
+              <a:rPr lang="en-US"/>
               <a:t>Click to edit Master title style</a:t>
             </a:r>
-            <a:endParaRPr lang="en-US"/>
           </a:p>
         </p:txBody>
       </p:sp>
@@ -1218,38 +3854,37 @@
           <a:p>
             <a:pPr lvl="0"/>
             <a:r>
-              <a:rPr lang="en-US" smtClean="0"/>
+              <a:rPr lang="en-US"/>
               <a:t>Click to edit Master text styles</a:t>
             </a:r>
           </a:p>
           <a:p>
             <a:pPr lvl="1"/>
             <a:r>
-              <a:rPr lang="en-US" smtClean="0"/>
+              <a:rPr lang="en-US"/>
               <a:t>Second level</a:t>
             </a:r>
           </a:p>
           <a:p>
             <a:pPr lvl="2"/>
             <a:r>
-              <a:rPr lang="en-US" smtClean="0"/>
+              <a:rPr lang="en-US"/>
               <a:t>Third level</a:t>
             </a:r>
           </a:p>
           <a:p>
             <a:pPr lvl="3"/>
             <a:r>
-              <a:rPr lang="en-US" smtClean="0"/>
+              <a:rPr lang="en-US"/>
               <a:t>Fourth level</a:t>
             </a:r>
           </a:p>
           <a:p>
             <a:pPr lvl="4"/>
             <a:r>
-              <a:rPr lang="en-US" smtClean="0"/>
+              <a:rPr lang="en-US"/>
               <a:t>Fifth level</a:t>
             </a:r>
-            <a:endParaRPr lang="en-US"/>
           </a:p>
         </p:txBody>
       </p:sp>
@@ -1303,38 +3938,37 @@
           <a:p>
             <a:pPr lvl="0"/>
             <a:r>
-              <a:rPr lang="en-US" smtClean="0"/>
+              <a:rPr lang="en-US"/>
               <a:t>Click to edit Master text styles</a:t>
             </a:r>
           </a:p>
           <a:p>
             <a:pPr lvl="1"/>
             <a:r>
-              <a:rPr lang="en-US" smtClean="0"/>
+              <a:rPr lang="en-US"/>
               <a:t>Second level</a:t>
             </a:r>
           </a:p>
           <a:p>
             <a:pPr lvl="2"/>
             <a:r>
-              <a:rPr lang="en-US" smtClean="0"/>
+              <a:rPr lang="en-US"/>
               <a:t>Third level</a:t>
             </a:r>
           </a:p>
           <a:p>
             <a:pPr lvl="3"/>
             <a:r>
-              <a:rPr lang="en-US" smtClean="0"/>
+              <a:rPr lang="en-US"/>
               <a:t>Fourth level</a:t>
             </a:r>
           </a:p>
           <a:p>
             <a:pPr lvl="4"/>
             <a:r>
-              <a:rPr lang="en-US" smtClean="0"/>
+              <a:rPr lang="en-US"/>
               <a:t>Fifth level</a:t>
             </a:r>
-            <a:endParaRPr lang="en-US"/>
           </a:p>
         </p:txBody>
       </p:sp>
@@ -1355,7 +3989,7 @@
           <a:p>
             <a:fld id="{5BCAD085-E8A6-8845-BD4E-CB4CCA059FC4}" type="datetimeFigureOut">
               <a:rPr lang="en-US" smtClean="0"/>
-              <a:t>1/27/13</a:t>
+              <a:t>4/29/2026</a:t>
             </a:fld>
             <a:endParaRPr lang="en-US"/>
           </a:p>
@@ -1453,10 +4087,9 @@
           </a:lstStyle>
           <a:p>
             <a:r>
-              <a:rPr lang="en-US" smtClean="0"/>
+              <a:rPr lang="en-US"/>
               <a:t>Click to edit Master title style</a:t>
             </a:r>
-            <a:endParaRPr lang="en-US"/>
           </a:p>
         </p:txBody>
       </p:sp>
@@ -1519,7 +4152,7 @@
           <a:p>
             <a:pPr lvl="0"/>
             <a:r>
-              <a:rPr lang="en-US" smtClean="0"/>
+              <a:rPr lang="en-US"/>
               <a:t>Click to edit Master text styles</a:t>
             </a:r>
           </a:p>
@@ -1575,38 +4208,37 @@
           <a:p>
             <a:pPr lvl="0"/>
             <a:r>
-              <a:rPr lang="en-US" smtClean="0"/>
+              <a:rPr lang="en-US"/>
               <a:t>Click to edit Master text styles</a:t>
             </a:r>
           </a:p>
           <a:p>
             <a:pPr lvl="1"/>
             <a:r>
-              <a:rPr lang="en-US" smtClean="0"/>
+              <a:rPr lang="en-US"/>
               <a:t>Second level</a:t>
             </a:r>
           </a:p>
           <a:p>
             <a:pPr lvl="2"/>
             <a:r>
-              <a:rPr lang="en-US" smtClean="0"/>
+              <a:rPr lang="en-US"/>
               <a:t>Third level</a:t>
             </a:r>
           </a:p>
           <a:p>
             <a:pPr lvl="3"/>
             <a:r>
-              <a:rPr lang="en-US" smtClean="0"/>
+              <a:rPr lang="en-US"/>
               <a:t>Fourth level</a:t>
             </a:r>
           </a:p>
           <a:p>
             <a:pPr lvl="4"/>
             <a:r>
-              <a:rPr lang="en-US" smtClean="0"/>
+              <a:rPr lang="en-US"/>
               <a:t>Fifth level</a:t>
             </a:r>
-            <a:endParaRPr lang="en-US"/>
           </a:p>
         </p:txBody>
       </p:sp>
@@ -1669,7 +4301,7 @@
           <a:p>
             <a:pPr lvl="0"/>
             <a:r>
-              <a:rPr lang="en-US" smtClean="0"/>
+              <a:rPr lang="en-US"/>
               <a:t>Click to edit Master text styles</a:t>
             </a:r>
           </a:p>
@@ -1725,38 +4357,37 @@
           <a:p>
             <a:pPr lvl="0"/>
             <a:r>
-              <a:rPr lang="en-US" smtClean="0"/>
+              <a:rPr lang="en-US"/>
               <a:t>Click to edit Master text styles</a:t>
             </a:r>
           </a:p>
           <a:p>
             <a:pPr lvl="1"/>
             <a:r>
-              <a:rPr lang="en-US" smtClean="0"/>
+              <a:rPr lang="en-US"/>
               <a:t>Second level</a:t>
             </a:r>
           </a:p>
           <a:p>
             <a:pPr lvl="2"/>
             <a:r>
-              <a:rPr lang="en-US" smtClean="0"/>
+              <a:rPr lang="en-US"/>
               <a:t>Third level</a:t>
             </a:r>
           </a:p>
           <a:p>
             <a:pPr lvl="3"/>
             <a:r>
-              <a:rPr lang="en-US" smtClean="0"/>
+              <a:rPr lang="en-US"/>
               <a:t>Fourth level</a:t>
             </a:r>
           </a:p>
           <a:p>
             <a:pPr lvl="4"/>
             <a:r>
-              <a:rPr lang="en-US" smtClean="0"/>
+              <a:rPr lang="en-US"/>
               <a:t>Fifth level</a:t>
             </a:r>
-            <a:endParaRPr lang="en-US"/>
           </a:p>
         </p:txBody>
       </p:sp>
@@ -1777,7 +4408,7 @@
           <a:p>
             <a:fld id="{5BCAD085-E8A6-8845-BD4E-CB4CCA059FC4}" type="datetimeFigureOut">
               <a:rPr lang="en-US" smtClean="0"/>
-              <a:t>1/27/13</a:t>
+              <a:t>4/29/2026</a:t>
             </a:fld>
             <a:endParaRPr lang="en-US"/>
           </a:p>
@@ -1871,10 +4502,9 @@
           <a:lstStyle/>
           <a:p>
             <a:r>
-              <a:rPr lang="en-US" smtClean="0"/>
+              <a:rPr lang="en-US"/>
               <a:t>Click to edit Master title style</a:t>
             </a:r>
-            <a:endParaRPr lang="en-US"/>
           </a:p>
         </p:txBody>
       </p:sp>
@@ -1895,7 +4525,7 @@
           <a:p>
             <a:fld id="{5BCAD085-E8A6-8845-BD4E-CB4CCA059FC4}" type="datetimeFigureOut">
               <a:rPr lang="en-US" smtClean="0"/>
-              <a:t>1/27/13</a:t>
+              <a:t>4/29/2026</a:t>
             </a:fld>
             <a:endParaRPr lang="en-US"/>
           </a:p>
@@ -1990,7 +4620,7 @@
           <a:p>
             <a:fld id="{5BCAD085-E8A6-8845-BD4E-CB4CCA059FC4}" type="datetimeFigureOut">
               <a:rPr lang="en-US" smtClean="0"/>
-              <a:t>1/27/13</a:t>
+              <a:t>4/29/2026</a:t>
             </a:fld>
             <a:endParaRPr lang="en-US"/>
           </a:p>
@@ -2093,10 +4723,9 @@
           </a:lstStyle>
           <a:p>
             <a:r>
-              <a:rPr lang="en-US" smtClean="0"/>
+              <a:rPr lang="en-US"/>
               <a:t>Click to edit Master title style</a:t>
             </a:r>
-            <a:endParaRPr lang="en-US"/>
           </a:p>
         </p:txBody>
       </p:sp>
@@ -2150,38 +4779,37 @@
           <a:p>
             <a:pPr lvl="0"/>
             <a:r>
-              <a:rPr lang="en-US" smtClean="0"/>
+              <a:rPr lang="en-US"/>
               <a:t>Click to edit Master text styles</a:t>
             </a:r>
           </a:p>
           <a:p>
             <a:pPr lvl="1"/>
             <a:r>
-              <a:rPr lang="en-US" smtClean="0"/>
+              <a:rPr lang="en-US"/>
               <a:t>Second level</a:t>
             </a:r>
           </a:p>
           <a:p>
             <a:pPr lvl="2"/>
             <a:r>
-              <a:rPr lang="en-US" smtClean="0"/>
+              <a:rPr lang="en-US"/>
               <a:t>Third level</a:t>
             </a:r>
           </a:p>
           <a:p>
             <a:pPr lvl="3"/>
             <a:r>
-              <a:rPr lang="en-US" smtClean="0"/>
+              <a:rPr lang="en-US"/>
               <a:t>Fourth level</a:t>
             </a:r>
           </a:p>
           <a:p>
             <a:pPr lvl="4"/>
             <a:r>
-              <a:rPr lang="en-US" smtClean="0"/>
+              <a:rPr lang="en-US"/>
               <a:t>Fifth level</a:t>
             </a:r>
-            <a:endParaRPr lang="en-US"/>
           </a:p>
         </p:txBody>
       </p:sp>
@@ -2244,7 +4872,7 @@
           <a:p>
             <a:pPr lvl="0"/>
             <a:r>
-              <a:rPr lang="en-US" smtClean="0"/>
+              <a:rPr lang="en-US"/>
               <a:t>Click to edit Master text styles</a:t>
             </a:r>
           </a:p>
@@ -2267,7 +4895,7 @@
           <a:p>
             <a:fld id="{5BCAD085-E8A6-8845-BD4E-CB4CCA059FC4}" type="datetimeFigureOut">
               <a:rPr lang="en-US" smtClean="0"/>
-              <a:t>1/27/13</a:t>
+              <a:t>4/29/2026</a:t>
             </a:fld>
             <a:endParaRPr lang="en-US"/>
           </a:p>
@@ -2370,10 +4998,9 @@
           </a:lstStyle>
           <a:p>
             <a:r>
-              <a:rPr lang="en-US" smtClean="0"/>
+              <a:rPr lang="en-US"/>
               <a:t>Click to edit Master title style</a:t>
             </a:r>
-            <a:endParaRPr lang="en-US"/>
           </a:p>
         </p:txBody>
       </p:sp>
@@ -2497,7 +5124,7 @@
           <a:p>
             <a:pPr lvl="0"/>
             <a:r>
-              <a:rPr lang="en-US" smtClean="0"/>
+              <a:rPr lang="en-US"/>
               <a:t>Click to edit Master text styles</a:t>
             </a:r>
           </a:p>
@@ -2520,7 +5147,7 @@
           <a:p>
             <a:fld id="{5BCAD085-E8A6-8845-BD4E-CB4CCA059FC4}" type="datetimeFigureOut">
               <a:rPr lang="en-US" smtClean="0"/>
-              <a:t>1/27/13</a:t>
+              <a:t>4/29/2026</a:t>
             </a:fld>
             <a:endParaRPr lang="en-US"/>
           </a:p>
@@ -2629,10 +5256,9 @@
           <a:lstStyle/>
           <a:p>
             <a:r>
-              <a:rPr lang="en-US" smtClean="0"/>
+              <a:rPr lang="en-US"/>
               <a:t>Click to edit Master title style</a:t>
             </a:r>
-            <a:endParaRPr lang="en-US"/>
           </a:p>
         </p:txBody>
       </p:sp>
@@ -2663,38 +5289,37 @@
           <a:p>
             <a:pPr lvl="0"/>
             <a:r>
-              <a:rPr lang="en-US" smtClean="0"/>
+              <a:rPr lang="en-US"/>
               <a:t>Click to edit Master text styles</a:t>
             </a:r>
           </a:p>
           <a:p>
             <a:pPr lvl="1"/>
             <a:r>
-              <a:rPr lang="en-US" smtClean="0"/>
+              <a:rPr lang="en-US"/>
               <a:t>Second level</a:t>
             </a:r>
           </a:p>
           <a:p>
             <a:pPr lvl="2"/>
             <a:r>
-              <a:rPr lang="en-US" smtClean="0"/>
+              <a:rPr lang="en-US"/>
               <a:t>Third level</a:t>
             </a:r>
           </a:p>
           <a:p>
             <a:pPr lvl="3"/>
             <a:r>
-              <a:rPr lang="en-US" smtClean="0"/>
+              <a:rPr lang="en-US"/>
               <a:t>Fourth level</a:t>
             </a:r>
           </a:p>
           <a:p>
             <a:pPr lvl="4"/>
             <a:r>
-              <a:rPr lang="en-US" smtClean="0"/>
+              <a:rPr lang="en-US"/>
               <a:t>Fifth level</a:t>
             </a:r>
-            <a:endParaRPr lang="en-US"/>
           </a:p>
         </p:txBody>
       </p:sp>
@@ -2733,7 +5358,7 @@
           <a:p>
             <a:fld id="{5BCAD085-E8A6-8845-BD4E-CB4CCA059FC4}" type="datetimeFigureOut">
               <a:rPr lang="en-US" smtClean="0"/>
-              <a:t>1/27/13</a:t>
+              <a:t>4/29/2026</a:t>
             </a:fld>
             <a:endParaRPr lang="en-US"/>
           </a:p>
@@ -3091,8 +5716,584 @@
 </p:sldMaster>
 </file>
 
+<file path=ppt/slideMasters/slideMaster2.xml><?xml version="1.0" encoding="utf-8"?>
+<p:sldMaster xmlns:a="http://schemas.openxmlformats.org/drawingml/2006/main" xmlns:r="http://schemas.openxmlformats.org/officeDocument/2006/relationships" xmlns:p="http://schemas.openxmlformats.org/presentationml/2006/main">
+  <p:cSld>
+    <p:bg>
+      <p:bgRef idx="1001">
+        <a:schemeClr val="bg1"/>
+      </p:bgRef>
+    </p:bg>
+    <p:spTree>
+      <p:nvGrpSpPr>
+        <p:cNvPr id="1" name=""/>
+        <p:cNvGrpSpPr/>
+        <p:nvPr/>
+      </p:nvGrpSpPr>
+      <p:grpSpPr>
+        <a:xfrm>
+          <a:off x="0" y="0"/>
+          <a:ext cx="0" cy="0"/>
+          <a:chOff x="0" y="0"/>
+          <a:chExt cx="0" cy="0"/>
+        </a:xfrm>
+      </p:grpSpPr>
+      <p:sp>
+        <p:nvSpPr>
+          <p:cNvPr id="2" name="Title Placeholder 1">
+            <a:extLst>
+              <a:ext uri="{FF2B5EF4-FFF2-40B4-BE49-F238E27FC236}">
+                <a16:creationId xmlns:a16="http://schemas.microsoft.com/office/drawing/2014/main" id="{449781C5-E59C-4BB0-8873-BAE364B44A1B}"/>
+              </a:ext>
+            </a:extLst>
+          </p:cNvPr>
+          <p:cNvSpPr>
+            <a:spLocks noGrp="1"/>
+          </p:cNvSpPr>
+          <p:nvPr>
+            <p:ph type="title"/>
+          </p:nvPr>
+        </p:nvSpPr>
+        <p:spPr>
+          <a:xfrm>
+            <a:off x="838200" y="365125"/>
+            <a:ext cx="10515600" cy="1325563"/>
+          </a:xfrm>
+          <a:prstGeom prst="rect">
+            <a:avLst/>
+          </a:prstGeom>
+        </p:spPr>
+        <p:txBody>
+          <a:bodyPr vert="horz" lIns="91440" tIns="45720" rIns="91440" bIns="45720" rtlCol="0" anchor="ctr">
+            <a:normAutofit/>
+          </a:bodyPr>
+          <a:lstStyle/>
+          <a:p>
+            <a:r>
+              <a:rPr lang="en-US"/>
+              <a:t>Click to edit Master title style</a:t>
+            </a:r>
+          </a:p>
+        </p:txBody>
+      </p:sp>
+      <p:sp>
+        <p:nvSpPr>
+          <p:cNvPr id="3" name="Text Placeholder 2">
+            <a:extLst>
+              <a:ext uri="{FF2B5EF4-FFF2-40B4-BE49-F238E27FC236}">
+                <a16:creationId xmlns:a16="http://schemas.microsoft.com/office/drawing/2014/main" id="{ECA6E6EC-8099-4621-86BD-B6DF198E7A2B}"/>
+              </a:ext>
+            </a:extLst>
+          </p:cNvPr>
+          <p:cNvSpPr>
+            <a:spLocks noGrp="1"/>
+          </p:cNvSpPr>
+          <p:nvPr>
+            <p:ph type="body" idx="1"/>
+          </p:nvPr>
+        </p:nvSpPr>
+        <p:spPr>
+          <a:xfrm>
+            <a:off x="838200" y="1825625"/>
+            <a:ext cx="10515600" cy="4351338"/>
+          </a:xfrm>
+          <a:prstGeom prst="rect">
+            <a:avLst/>
+          </a:prstGeom>
+        </p:spPr>
+        <p:txBody>
+          <a:bodyPr vert="horz" lIns="91440" tIns="45720" rIns="91440" bIns="45720" rtlCol="0">
+            <a:normAutofit/>
+          </a:bodyPr>
+          <a:lstStyle/>
+          <a:p>
+            <a:pPr lvl="0"/>
+            <a:r>
+              <a:rPr lang="en-US"/>
+              <a:t>Click to edit Master text styles</a:t>
+            </a:r>
+          </a:p>
+          <a:p>
+            <a:pPr lvl="1"/>
+            <a:r>
+              <a:rPr lang="en-US"/>
+              <a:t>Second level</a:t>
+            </a:r>
+          </a:p>
+          <a:p>
+            <a:pPr lvl="2"/>
+            <a:r>
+              <a:rPr lang="en-US"/>
+              <a:t>Third level</a:t>
+            </a:r>
+          </a:p>
+          <a:p>
+            <a:pPr lvl="3"/>
+            <a:r>
+              <a:rPr lang="en-US"/>
+              <a:t>Fourth level</a:t>
+            </a:r>
+          </a:p>
+          <a:p>
+            <a:pPr lvl="4"/>
+            <a:r>
+              <a:rPr lang="en-US"/>
+              <a:t>Fifth level</a:t>
+            </a:r>
+          </a:p>
+        </p:txBody>
+      </p:sp>
+      <p:sp>
+        <p:nvSpPr>
+          <p:cNvPr id="4" name="Date Placeholder 3">
+            <a:extLst>
+              <a:ext uri="{FF2B5EF4-FFF2-40B4-BE49-F238E27FC236}">
+                <a16:creationId xmlns:a16="http://schemas.microsoft.com/office/drawing/2014/main" id="{205271C2-25A2-4664-A0AB-5B82465A653F}"/>
+              </a:ext>
+            </a:extLst>
+          </p:cNvPr>
+          <p:cNvSpPr>
+            <a:spLocks noGrp="1"/>
+          </p:cNvSpPr>
+          <p:nvPr>
+            <p:ph type="dt" sz="half" idx="2"/>
+          </p:nvPr>
+        </p:nvSpPr>
+        <p:spPr>
+          <a:xfrm>
+            <a:off x="838200" y="6356350"/>
+            <a:ext cx="2743200" cy="365125"/>
+          </a:xfrm>
+          <a:prstGeom prst="rect">
+            <a:avLst/>
+          </a:prstGeom>
+        </p:spPr>
+        <p:txBody>
+          <a:bodyPr vert="horz" lIns="91440" tIns="45720" rIns="91440" bIns="45720" rtlCol="0" anchor="ctr"/>
+          <a:lstStyle>
+            <a:lvl1pPr algn="l">
+              <a:defRPr sz="1200">
+                <a:solidFill>
+                  <a:schemeClr val="tx1">
+                    <a:tint val="75000"/>
+                  </a:schemeClr>
+                </a:solidFill>
+                <a:latin typeface="Cambria" panose="02040503050406030204" pitchFamily="18" charset="0"/>
+                <a:ea typeface="Cambria" panose="02040503050406030204" pitchFamily="18" charset="0"/>
+              </a:defRPr>
+            </a:lvl1pPr>
+          </a:lstStyle>
+          <a:p>
+            <a:fld id="{1804209A-C6D7-496B-8537-5782FDB96C12}" type="datetimeFigureOut">
+              <a:rPr lang="en-US" smtClean="0"/>
+              <a:pPr/>
+              <a:t>4/29/2026</a:t>
+            </a:fld>
+            <a:endParaRPr lang="en-US"/>
+          </a:p>
+        </p:txBody>
+      </p:sp>
+      <p:sp>
+        <p:nvSpPr>
+          <p:cNvPr id="5" name="Footer Placeholder 4">
+            <a:extLst>
+              <a:ext uri="{FF2B5EF4-FFF2-40B4-BE49-F238E27FC236}">
+                <a16:creationId xmlns:a16="http://schemas.microsoft.com/office/drawing/2014/main" id="{3E049414-77F4-48CA-8DC1-3DC095D90F80}"/>
+              </a:ext>
+            </a:extLst>
+          </p:cNvPr>
+          <p:cNvSpPr>
+            <a:spLocks noGrp="1"/>
+          </p:cNvSpPr>
+          <p:nvPr>
+            <p:ph type="ftr" sz="quarter" idx="3"/>
+          </p:nvPr>
+        </p:nvSpPr>
+        <p:spPr>
+          <a:xfrm>
+            <a:off x="4038600" y="6356350"/>
+            <a:ext cx="4114800" cy="365125"/>
+          </a:xfrm>
+          <a:prstGeom prst="rect">
+            <a:avLst/>
+          </a:prstGeom>
+        </p:spPr>
+        <p:txBody>
+          <a:bodyPr vert="horz" lIns="91440" tIns="45720" rIns="91440" bIns="45720" rtlCol="0" anchor="ctr"/>
+          <a:lstStyle>
+            <a:lvl1pPr algn="ctr">
+              <a:defRPr sz="1200">
+                <a:solidFill>
+                  <a:schemeClr val="tx1">
+                    <a:tint val="75000"/>
+                  </a:schemeClr>
+                </a:solidFill>
+                <a:latin typeface="Cambria" panose="02040503050406030204" pitchFamily="18" charset="0"/>
+                <a:ea typeface="Cambria" panose="02040503050406030204" pitchFamily="18" charset="0"/>
+              </a:defRPr>
+            </a:lvl1pPr>
+          </a:lstStyle>
+          <a:p>
+            <a:endParaRPr lang="en-US"/>
+          </a:p>
+        </p:txBody>
+      </p:sp>
+      <p:sp>
+        <p:nvSpPr>
+          <p:cNvPr id="6" name="Slide Number Placeholder 5">
+            <a:extLst>
+              <a:ext uri="{FF2B5EF4-FFF2-40B4-BE49-F238E27FC236}">
+                <a16:creationId xmlns:a16="http://schemas.microsoft.com/office/drawing/2014/main" id="{752AD38D-6CAF-4577-964B-6FC51F26655F}"/>
+              </a:ext>
+            </a:extLst>
+          </p:cNvPr>
+          <p:cNvSpPr>
+            <a:spLocks noGrp="1"/>
+          </p:cNvSpPr>
+          <p:nvPr>
+            <p:ph type="sldNum" sz="quarter" idx="4"/>
+          </p:nvPr>
+        </p:nvSpPr>
+        <p:spPr>
+          <a:xfrm>
+            <a:off x="8610600" y="6356350"/>
+            <a:ext cx="2743200" cy="365125"/>
+          </a:xfrm>
+          <a:prstGeom prst="rect">
+            <a:avLst/>
+          </a:prstGeom>
+        </p:spPr>
+        <p:txBody>
+          <a:bodyPr vert="horz" lIns="91440" tIns="45720" rIns="91440" bIns="45720" rtlCol="0" anchor="ctr"/>
+          <a:lstStyle>
+            <a:lvl1pPr algn="r">
+              <a:defRPr sz="1200">
+                <a:solidFill>
+                  <a:schemeClr val="tx1">
+                    <a:tint val="75000"/>
+                  </a:schemeClr>
+                </a:solidFill>
+                <a:latin typeface="Cambria" panose="02040503050406030204" pitchFamily="18" charset="0"/>
+                <a:ea typeface="Cambria" panose="02040503050406030204" pitchFamily="18" charset="0"/>
+              </a:defRPr>
+            </a:lvl1pPr>
+          </a:lstStyle>
+          <a:p>
+            <a:fld id="{6C87352C-6AF1-4D42-A15A-45C6FA13D254}" type="slidenum">
+              <a:rPr lang="en-US" smtClean="0"/>
+              <a:pPr/>
+              <a:t>‹#›</a:t>
+            </a:fld>
+            <a:endParaRPr lang="en-US"/>
+          </a:p>
+        </p:txBody>
+      </p:sp>
+    </p:spTree>
+    <p:extLst>
+      <p:ext uri="{BB962C8B-B14F-4D97-AF65-F5344CB8AC3E}">
+        <p14:creationId xmlns:p14="http://schemas.microsoft.com/office/powerpoint/2010/main" val="272896385"/>
+      </p:ext>
+    </p:extLst>
+  </p:cSld>
+  <p:clrMap bg1="lt1" tx1="dk1" bg2="lt2" tx2="dk2" accent1="accent1" accent2="accent2" accent3="accent3" accent4="accent4" accent5="accent5" accent6="accent6" hlink="hlink" folHlink="folHlink"/>
+  <p:sldLayoutIdLst>
+    <p:sldLayoutId id="2147483661" r:id="rId1"/>
+    <p:sldLayoutId id="2147483662" r:id="rId2"/>
+    <p:sldLayoutId id="2147483663" r:id="rId3"/>
+    <p:sldLayoutId id="2147483664" r:id="rId4"/>
+    <p:sldLayoutId id="2147483665" r:id="rId5"/>
+    <p:sldLayoutId id="2147483666" r:id="rId6"/>
+    <p:sldLayoutId id="2147483667" r:id="rId7"/>
+    <p:sldLayoutId id="2147483668" r:id="rId8"/>
+    <p:sldLayoutId id="2147483669" r:id="rId9"/>
+    <p:sldLayoutId id="2147483670" r:id="rId10"/>
+    <p:sldLayoutId id="2147483671" r:id="rId11"/>
+  </p:sldLayoutIdLst>
+  <p:txStyles>
+    <p:titleStyle>
+      <a:lvl1pPr algn="l" defTabSz="914400" rtl="0" eaLnBrk="1" latinLnBrk="0" hangingPunct="1">
+        <a:lnSpc>
+          <a:spcPct val="90000"/>
+        </a:lnSpc>
+        <a:spcBef>
+          <a:spcPct val="0"/>
+        </a:spcBef>
+        <a:buNone/>
+        <a:defRPr sz="4400" kern="1200">
+          <a:solidFill>
+            <a:schemeClr val="tx1"/>
+          </a:solidFill>
+          <a:latin typeface="Cambria" panose="02040503050406030204" pitchFamily="18" charset="0"/>
+          <a:ea typeface="Cambria" panose="02040503050406030204" pitchFamily="18" charset="0"/>
+          <a:cs typeface="+mj-cs"/>
+        </a:defRPr>
+      </a:lvl1pPr>
+    </p:titleStyle>
+    <p:bodyStyle>
+      <a:lvl1pPr marL="228600" indent="-228600" algn="l" defTabSz="914400" rtl="0" eaLnBrk="1" latinLnBrk="0" hangingPunct="1">
+        <a:lnSpc>
+          <a:spcPct val="90000"/>
+        </a:lnSpc>
+        <a:spcBef>
+          <a:spcPts val="1000"/>
+        </a:spcBef>
+        <a:buFont typeface="Arial" panose="020B0604020202020204" pitchFamily="34" charset="0"/>
+        <a:buChar char="•"/>
+        <a:defRPr sz="2800" kern="1200">
+          <a:solidFill>
+            <a:schemeClr val="tx1"/>
+          </a:solidFill>
+          <a:latin typeface="Cambria" panose="02040503050406030204" pitchFamily="18" charset="0"/>
+          <a:ea typeface="Cambria" panose="02040503050406030204" pitchFamily="18" charset="0"/>
+          <a:cs typeface="+mn-cs"/>
+        </a:defRPr>
+      </a:lvl1pPr>
+      <a:lvl2pPr marL="685800" indent="-228600" algn="l" defTabSz="914400" rtl="0" eaLnBrk="1" latinLnBrk="0" hangingPunct="1">
+        <a:lnSpc>
+          <a:spcPct val="90000"/>
+        </a:lnSpc>
+        <a:spcBef>
+          <a:spcPts val="500"/>
+        </a:spcBef>
+        <a:buFont typeface="Arial" panose="020B0604020202020204" pitchFamily="34" charset="0"/>
+        <a:buChar char="•"/>
+        <a:defRPr sz="2400" kern="1200">
+          <a:solidFill>
+            <a:schemeClr val="tx1"/>
+          </a:solidFill>
+          <a:latin typeface="Cambria" panose="02040503050406030204" pitchFamily="18" charset="0"/>
+          <a:ea typeface="Cambria" panose="02040503050406030204" pitchFamily="18" charset="0"/>
+          <a:cs typeface="+mn-cs"/>
+        </a:defRPr>
+      </a:lvl2pPr>
+      <a:lvl3pPr marL="1143000" indent="-228600" algn="l" defTabSz="914400" rtl="0" eaLnBrk="1" latinLnBrk="0" hangingPunct="1">
+        <a:lnSpc>
+          <a:spcPct val="90000"/>
+        </a:lnSpc>
+        <a:spcBef>
+          <a:spcPts val="500"/>
+        </a:spcBef>
+        <a:buFont typeface="Arial" panose="020B0604020202020204" pitchFamily="34" charset="0"/>
+        <a:buChar char="•"/>
+        <a:defRPr sz="2000" kern="1200">
+          <a:solidFill>
+            <a:schemeClr val="tx1"/>
+          </a:solidFill>
+          <a:latin typeface="Cambria" panose="02040503050406030204" pitchFamily="18" charset="0"/>
+          <a:ea typeface="Cambria" panose="02040503050406030204" pitchFamily="18" charset="0"/>
+          <a:cs typeface="+mn-cs"/>
+        </a:defRPr>
+      </a:lvl3pPr>
+      <a:lvl4pPr marL="1600200" indent="-228600" algn="l" defTabSz="914400" rtl="0" eaLnBrk="1" latinLnBrk="0" hangingPunct="1">
+        <a:lnSpc>
+          <a:spcPct val="90000"/>
+        </a:lnSpc>
+        <a:spcBef>
+          <a:spcPts val="500"/>
+        </a:spcBef>
+        <a:buFont typeface="Arial" panose="020B0604020202020204" pitchFamily="34" charset="0"/>
+        <a:buChar char="•"/>
+        <a:defRPr sz="1800" kern="1200">
+          <a:solidFill>
+            <a:schemeClr val="tx1"/>
+          </a:solidFill>
+          <a:latin typeface="Cambria" panose="02040503050406030204" pitchFamily="18" charset="0"/>
+          <a:ea typeface="Cambria" panose="02040503050406030204" pitchFamily="18" charset="0"/>
+          <a:cs typeface="+mn-cs"/>
+        </a:defRPr>
+      </a:lvl4pPr>
+      <a:lvl5pPr marL="2057400" indent="-228600" algn="l" defTabSz="914400" rtl="0" eaLnBrk="1" latinLnBrk="0" hangingPunct="1">
+        <a:lnSpc>
+          <a:spcPct val="90000"/>
+        </a:lnSpc>
+        <a:spcBef>
+          <a:spcPts val="500"/>
+        </a:spcBef>
+        <a:buFont typeface="Arial" panose="020B0604020202020204" pitchFamily="34" charset="0"/>
+        <a:buChar char="•"/>
+        <a:defRPr sz="1800" kern="1200">
+          <a:solidFill>
+            <a:schemeClr val="tx1"/>
+          </a:solidFill>
+          <a:latin typeface="Cambria" panose="02040503050406030204" pitchFamily="18" charset="0"/>
+          <a:ea typeface="Cambria" panose="02040503050406030204" pitchFamily="18" charset="0"/>
+          <a:cs typeface="+mn-cs"/>
+        </a:defRPr>
+      </a:lvl5pPr>
+      <a:lvl6pPr marL="2514600" indent="-228600" algn="l" defTabSz="914400" rtl="0" eaLnBrk="1" latinLnBrk="0" hangingPunct="1">
+        <a:lnSpc>
+          <a:spcPct val="90000"/>
+        </a:lnSpc>
+        <a:spcBef>
+          <a:spcPts val="500"/>
+        </a:spcBef>
+        <a:buFont typeface="Arial" panose="020B0604020202020204" pitchFamily="34" charset="0"/>
+        <a:buChar char="•"/>
+        <a:defRPr sz="1800" kern="1200">
+          <a:solidFill>
+            <a:schemeClr val="tx1"/>
+          </a:solidFill>
+          <a:latin typeface="+mn-lt"/>
+          <a:ea typeface="+mn-ea"/>
+          <a:cs typeface="+mn-cs"/>
+        </a:defRPr>
+      </a:lvl6pPr>
+      <a:lvl7pPr marL="2971800" indent="-228600" algn="l" defTabSz="914400" rtl="0" eaLnBrk="1" latinLnBrk="0" hangingPunct="1">
+        <a:lnSpc>
+          <a:spcPct val="90000"/>
+        </a:lnSpc>
+        <a:spcBef>
+          <a:spcPts val="500"/>
+        </a:spcBef>
+        <a:buFont typeface="Arial" panose="020B0604020202020204" pitchFamily="34" charset="0"/>
+        <a:buChar char="•"/>
+        <a:defRPr sz="1800" kern="1200">
+          <a:solidFill>
+            <a:schemeClr val="tx1"/>
+          </a:solidFill>
+          <a:latin typeface="+mn-lt"/>
+          <a:ea typeface="+mn-ea"/>
+          <a:cs typeface="+mn-cs"/>
+        </a:defRPr>
+      </a:lvl7pPr>
+      <a:lvl8pPr marL="3429000" indent="-228600" algn="l" defTabSz="914400" rtl="0" eaLnBrk="1" latinLnBrk="0" hangingPunct="1">
+        <a:lnSpc>
+          <a:spcPct val="90000"/>
+        </a:lnSpc>
+        <a:spcBef>
+          <a:spcPts val="500"/>
+        </a:spcBef>
+        <a:buFont typeface="Arial" panose="020B0604020202020204" pitchFamily="34" charset="0"/>
+        <a:buChar char="•"/>
+        <a:defRPr sz="1800" kern="1200">
+          <a:solidFill>
+            <a:schemeClr val="tx1"/>
+          </a:solidFill>
+          <a:latin typeface="+mn-lt"/>
+          <a:ea typeface="+mn-ea"/>
+          <a:cs typeface="+mn-cs"/>
+        </a:defRPr>
+      </a:lvl8pPr>
+      <a:lvl9pPr marL="3886200" indent="-228600" algn="l" defTabSz="914400" rtl="0" eaLnBrk="1" latinLnBrk="0" hangingPunct="1">
+        <a:lnSpc>
+          <a:spcPct val="90000"/>
+        </a:lnSpc>
+        <a:spcBef>
+          <a:spcPts val="500"/>
+        </a:spcBef>
+        <a:buFont typeface="Arial" panose="020B0604020202020204" pitchFamily="34" charset="0"/>
+        <a:buChar char="•"/>
+        <a:defRPr sz="1800" kern="1200">
+          <a:solidFill>
+            <a:schemeClr val="tx1"/>
+          </a:solidFill>
+          <a:latin typeface="+mn-lt"/>
+          <a:ea typeface="+mn-ea"/>
+          <a:cs typeface="+mn-cs"/>
+        </a:defRPr>
+      </a:lvl9pPr>
+    </p:bodyStyle>
+    <p:otherStyle>
+      <a:defPPr>
+        <a:defRPr lang="en-US"/>
+      </a:defPPr>
+      <a:lvl1pPr marL="0" algn="l" defTabSz="914400" rtl="0" eaLnBrk="1" latinLnBrk="0" hangingPunct="1">
+        <a:defRPr sz="1800" kern="1200">
+          <a:solidFill>
+            <a:schemeClr val="tx1"/>
+          </a:solidFill>
+          <a:latin typeface="+mn-lt"/>
+          <a:ea typeface="+mn-ea"/>
+          <a:cs typeface="+mn-cs"/>
+        </a:defRPr>
+      </a:lvl1pPr>
+      <a:lvl2pPr marL="457200" algn="l" defTabSz="914400" rtl="0" eaLnBrk="1" latinLnBrk="0" hangingPunct="1">
+        <a:defRPr sz="1800" kern="1200">
+          <a:solidFill>
+            <a:schemeClr val="tx1"/>
+          </a:solidFill>
+          <a:latin typeface="+mn-lt"/>
+          <a:ea typeface="+mn-ea"/>
+          <a:cs typeface="+mn-cs"/>
+        </a:defRPr>
+      </a:lvl2pPr>
+      <a:lvl3pPr marL="914400" algn="l" defTabSz="914400" rtl="0" eaLnBrk="1" latinLnBrk="0" hangingPunct="1">
+        <a:defRPr sz="1800" kern="1200">
+          <a:solidFill>
+            <a:schemeClr val="tx1"/>
+          </a:solidFill>
+          <a:latin typeface="+mn-lt"/>
+          <a:ea typeface="+mn-ea"/>
+          <a:cs typeface="+mn-cs"/>
+        </a:defRPr>
+      </a:lvl3pPr>
+      <a:lvl4pPr marL="1371600" algn="l" defTabSz="914400" rtl="0" eaLnBrk="1" latinLnBrk="0" hangingPunct="1">
+        <a:defRPr sz="1800" kern="1200">
+          <a:solidFill>
+            <a:schemeClr val="tx1"/>
+          </a:solidFill>
+          <a:latin typeface="+mn-lt"/>
+          <a:ea typeface="+mn-ea"/>
+          <a:cs typeface="+mn-cs"/>
+        </a:defRPr>
+      </a:lvl4pPr>
+      <a:lvl5pPr marL="1828800" algn="l" defTabSz="914400" rtl="0" eaLnBrk="1" latinLnBrk="0" hangingPunct="1">
+        <a:defRPr sz="1800" kern="1200">
+          <a:solidFill>
+            <a:schemeClr val="tx1"/>
+          </a:solidFill>
+          <a:latin typeface="+mn-lt"/>
+          <a:ea typeface="+mn-ea"/>
+          <a:cs typeface="+mn-cs"/>
+        </a:defRPr>
+      </a:lvl5pPr>
+      <a:lvl6pPr marL="2286000" algn="l" defTabSz="914400" rtl="0" eaLnBrk="1" latinLnBrk="0" hangingPunct="1">
+        <a:defRPr sz="1800" kern="1200">
+          <a:solidFill>
+            <a:schemeClr val="tx1"/>
+          </a:solidFill>
+          <a:latin typeface="+mn-lt"/>
+          <a:ea typeface="+mn-ea"/>
+          <a:cs typeface="+mn-cs"/>
+        </a:defRPr>
+      </a:lvl6pPr>
+      <a:lvl7pPr marL="2743200" algn="l" defTabSz="914400" rtl="0" eaLnBrk="1" latinLnBrk="0" hangingPunct="1">
+        <a:defRPr sz="1800" kern="1200">
+          <a:solidFill>
+            <a:schemeClr val="tx1"/>
+          </a:solidFill>
+          <a:latin typeface="+mn-lt"/>
+          <a:ea typeface="+mn-ea"/>
+          <a:cs typeface="+mn-cs"/>
+        </a:defRPr>
+      </a:lvl7pPr>
+      <a:lvl8pPr marL="3200400" algn="l" defTabSz="914400" rtl="0" eaLnBrk="1" latinLnBrk="0" hangingPunct="1">
+        <a:defRPr sz="1800" kern="1200">
+          <a:solidFill>
+            <a:schemeClr val="tx1"/>
+          </a:solidFill>
+          <a:latin typeface="+mn-lt"/>
+          <a:ea typeface="+mn-ea"/>
+          <a:cs typeface="+mn-cs"/>
+        </a:defRPr>
+      </a:lvl8pPr>
+      <a:lvl9pPr marL="3657600" algn="l" defTabSz="914400" rtl="0" eaLnBrk="1" latinLnBrk="0" hangingPunct="1">
+        <a:defRPr sz="1800" kern="1200">
+          <a:solidFill>
+            <a:schemeClr val="tx1"/>
+          </a:solidFill>
+          <a:latin typeface="+mn-lt"/>
+          <a:ea typeface="+mn-ea"/>
+          <a:cs typeface="+mn-cs"/>
+        </a:defRPr>
+      </a:lvl9pPr>
+    </p:otherStyle>
+  </p:txStyles>
+</p:sldMaster>
+</file>
+
 <file path=ppt/slides/slide1.xml><?xml version="1.0" encoding="utf-8"?>
-<p:sld xmlns:a="http://schemas.openxmlformats.org/drawingml/2006/main" xmlns:p="http://schemas.openxmlformats.org/presentationml/2006/main" xmlns:r="http://schemas.openxmlformats.org/officeDocument/2006/relationships">
+<p:sld xmlns:a="http://schemas.openxmlformats.org/drawingml/2006/main" xmlns:r="http://schemas.openxmlformats.org/officeDocument/2006/relationships" xmlns:p="http://schemas.openxmlformats.org/presentationml/2006/main">
   <p:cSld>
     <p:spTree>
       <p:nvGrpSpPr>
@@ -3100,97 +6301,91 @@
         <p:cNvGrpSpPr/>
         <p:nvPr/>
       </p:nvGrpSpPr>
-      <p:grpSpPr/>
-      <p:sp>
-        <p:nvSpPr>
-          <p:cNvPr id="2" name="TextBox 1"/>
-          <p:cNvSpPr txBox="1"/>
-          <p:nvPr/>
+      <p:grpSpPr>
+        <a:xfrm>
+          <a:off x="0" y="0"/>
+          <a:ext cx="0" cy="0"/>
+          <a:chOff x="0" y="0"/>
+          <a:chExt cx="0" cy="0"/>
+        </a:xfrm>
+      </p:grpSpPr>
+      <p:sp>
+        <p:nvSpPr>
+          <p:cNvPr id="2" name="Title 1">
+            <a:extLst>
+              <a:ext uri="{FF2B5EF4-FFF2-40B4-BE49-F238E27FC236}">
+                <a16:creationId xmlns:a16="http://schemas.microsoft.com/office/drawing/2014/main" id="{41546C8B-9AB5-4B36-A44B-C6B45DD2D01C}"/>
+              </a:ext>
+            </a:extLst>
+          </p:cNvPr>
+          <p:cNvSpPr>
+            <a:spLocks noGrp="1"/>
+          </p:cNvSpPr>
+          <p:nvPr>
+            <p:ph type="ctrTitle"/>
+          </p:nvPr>
         </p:nvSpPr>
         <p:spPr>
           <a:xfrm>
-            <a:off x="502920" y="228600"/>
-            <a:ext cx="7315200" cy="411480"/>
+            <a:off x="1524000" y="2756288"/>
+            <a:ext cx="9144000" cy="2387600"/>
           </a:xfrm>
-          <a:prstGeom prst="rect">
-            <a:avLst/>
-          </a:prstGeom>
-          <a:noFill/>
-          <a:ln>
-            <a:solidFill>
-              <a:srgbClr val="FFFFFF"/>
-            </a:solidFill>
-          </a:ln>
         </p:spPr>
         <p:txBody>
-          <a:bodyPr wrap="square" lIns="101600" rIns="101600" tIns="76200" bIns="76200">
-            <a:spAutoFit/>
+          <a:bodyPr>
+            <a:normAutofit fontScale="90000"/>
           </a:bodyPr>
           <a:lstStyle/>
           <a:p>
-            <a:pPr algn="l"/>
-            <a:r>
-              <a:rPr sz="1500" b="0">
-                <a:solidFill>
-                  <a:srgbClr val="191919"/>
-                </a:solidFill>
-                <a:latin typeface="Cambria"/>
-              </a:rPr>
+            <a:r>
+              <a:rPr lang="en-US" dirty="0"/>
               <a:t>INST 414: Data Science Techniques</a:t>
             </a:r>
-          </a:p>
-        </p:txBody>
-      </p:sp>
-      <p:sp>
-        <p:nvSpPr>
-          <p:cNvPr id="3" name="TextBox 2"/>
-          <p:cNvSpPr txBox="1"/>
-          <p:nvPr/>
-        </p:nvSpPr>
-        <p:spPr>
-          <a:xfrm>
-            <a:off x="502920" y="731520"/>
-            <a:ext cx="9601200" cy="548640"/>
-          </a:xfrm>
-          <a:prstGeom prst="rect">
-            <a:avLst/>
-          </a:prstGeom>
-          <a:noFill/>
-          <a:ln>
-            <a:solidFill>
-              <a:srgbClr val="FFFFFF"/>
-            </a:solidFill>
-          </a:ln>
-        </p:spPr>
-        <p:txBody>
-          <a:bodyPr wrap="square" lIns="101600" rIns="101600" tIns="76200" bIns="76200">
-            <a:spAutoFit/>
-          </a:bodyPr>
-          <a:lstStyle/>
-          <a:p>
-            <a:pPr algn="l"/>
-            <a:r>
-              <a:rPr sz="2600" b="0">
-                <a:solidFill>
-                  <a:srgbClr val="191919"/>
-                </a:solidFill>
-                <a:latin typeface="Cambria"/>
-              </a:rPr>
-              <a:t>Lecture 13 | Feature Importance</a:t>
-            </a:r>
+            <a:br>
+              <a:rPr lang="en-US" dirty="0"/>
+            </a:br>
+            <a:r>
+              <a:rPr lang="en-US" dirty="0"/>
+              <a:t> </a:t>
+            </a:r>
+            <a:br>
+              <a:rPr lang="en-US" sz="4900" dirty="0"/>
+            </a:br>
+            <a:r>
+              <a:rPr lang="en-US" sz="4900" dirty="0"/>
+              <a:t>Feature Importance</a:t>
+            </a:r>
+            <a:endParaRPr lang="en-US" dirty="0"/>
           </a:p>
         </p:txBody>
       </p:sp>
     </p:spTree>
+    <p:extLst>
+      <p:ext uri="{BB962C8B-B14F-4D97-AF65-F5344CB8AC3E}">
+        <p14:creationId xmlns:p14="http://schemas.microsoft.com/office/powerpoint/2010/main" val="3922373063"/>
+      </p:ext>
+    </p:extLst>
   </p:cSld>
   <p:clrMapOvr>
     <a:masterClrMapping/>
   </p:clrMapOvr>
+  <mc:AlternateContent xmlns:mc="http://schemas.openxmlformats.org/markup-compatibility/2006" xmlns:p159="http://schemas.microsoft.com/office/powerpoint/2015/09/main">
+    <mc:Choice Requires="p159">
+      <p:transition xmlns:p14="http://schemas.microsoft.com/office/powerpoint/2010/main" spd="slow" p14:dur="2000">
+        <p159:morph option="byObject"/>
+      </p:transition>
+    </mc:Choice>
+    <mc:Fallback xmlns="">
+      <p:transition spd="slow">
+        <p:fade/>
+      </p:transition>
+    </mc:Fallback>
+  </mc:AlternateContent>
 </p:sld>
 </file>
 
 <file path=ppt/slides/slide10.xml><?xml version="1.0" encoding="utf-8"?>
-<p:sld xmlns:a="http://schemas.openxmlformats.org/drawingml/2006/main" xmlns:p="http://schemas.openxmlformats.org/presentationml/2006/main" xmlns:r="http://schemas.openxmlformats.org/officeDocument/2006/relationships">
+<p:sld xmlns:a="http://schemas.openxmlformats.org/drawingml/2006/main" xmlns:r="http://schemas.openxmlformats.org/officeDocument/2006/relationships" xmlns:p="http://schemas.openxmlformats.org/presentationml/2006/main">
   <p:cSld>
     <p:spTree>
       <p:nvGrpSpPr>
@@ -3198,7 +6393,14 @@
         <p:cNvGrpSpPr/>
         <p:nvPr/>
       </p:nvGrpSpPr>
-      <p:grpSpPr/>
+      <p:grpSpPr>
+        <a:xfrm>
+          <a:off x="0" y="0"/>
+          <a:ext cx="0" cy="0"/>
+          <a:chOff x="0" y="0"/>
+          <a:chExt cx="0" cy="0"/>
+        </a:xfrm>
+      </p:grpSpPr>
       <p:sp>
         <p:nvSpPr>
           <p:cNvPr id="2" name="TextBox 1"/>
@@ -3242,7 +6444,7 @@
         <p:spPr>
           <a:xfrm>
             <a:off x="548640" y="1005840"/>
-            <a:ext cx="6492240" cy="4389120"/>
+            <a:ext cx="6492240" cy="3412922"/>
           </a:xfrm>
           <a:prstGeom prst="rect">
             <a:avLst/>
@@ -3250,7 +6452,7 @@
           <a:noFill/>
         </p:spPr>
         <p:txBody>
-          <a:bodyPr wrap="square" lIns="50800" rIns="50800" tIns="25400" bIns="25400">
+          <a:bodyPr wrap="square" lIns="50800" tIns="25400" rIns="50800" bIns="25400">
             <a:spAutoFit/>
           </a:bodyPr>
           <a:lstStyle/>
@@ -3267,8 +6469,13 @@
               </a:defRPr>
             </a:pPr>
             <a:r>
+              <a:rPr sz="2400" dirty="0"/>
               <a:t>• Ablation asks what the model loses when a feature group disappears.</a:t>
             </a:r>
+            <a:br>
+              <a:rPr lang="en-US" sz="2400" dirty="0"/>
+            </a:br>
+            <a:endParaRPr sz="2400" dirty="0"/>
           </a:p>
           <a:p>
             <a:pPr>
@@ -3283,8 +6490,13 @@
               </a:defRPr>
             </a:pPr>
             <a:r>
+              <a:rPr sz="2400" dirty="0"/>
               <a:t>• That is a direct way to see what the model depends on.</a:t>
             </a:r>
+            <a:br>
+              <a:rPr lang="en-US" sz="2400" dirty="0"/>
+            </a:br>
+            <a:endParaRPr sz="2400" dirty="0"/>
           </a:p>
           <a:p>
             <a:pPr>
@@ -3299,6 +6511,7 @@
               </a:defRPr>
             </a:pPr>
             <a:r>
+              <a:rPr sz="2400" dirty="0"/>
               <a:t>• Here we compare the full model to versions with one feature group removed.</a:t>
             </a:r>
           </a:p>
@@ -3326,7 +6539,7 @@
           </a:ln>
         </p:spPr>
         <p:txBody>
-          <a:bodyPr wrap="square" lIns="101600" rIns="101600" tIns="76200" bIns="76200">
+          <a:bodyPr wrap="square" lIns="101600" tIns="76200" rIns="101600" bIns="76200">
             <a:spAutoFit/>
           </a:bodyPr>
           <a:lstStyle/>
@@ -3355,7 +6568,7 @@
 </file>
 
 <file path=ppt/slides/slide11.xml><?xml version="1.0" encoding="utf-8"?>
-<p:sld xmlns:a="http://schemas.openxmlformats.org/drawingml/2006/main" xmlns:p="http://schemas.openxmlformats.org/presentationml/2006/main" xmlns:r="http://schemas.openxmlformats.org/officeDocument/2006/relationships">
+<p:sld xmlns:a="http://schemas.openxmlformats.org/drawingml/2006/main" xmlns:r="http://schemas.openxmlformats.org/officeDocument/2006/relationships" xmlns:p="http://schemas.openxmlformats.org/presentationml/2006/main">
   <p:cSld>
     <p:spTree>
       <p:nvGrpSpPr>
@@ -3363,7 +6576,14 @@
         <p:cNvGrpSpPr/>
         <p:nvPr/>
       </p:nvGrpSpPr>
-      <p:grpSpPr/>
+      <p:grpSpPr>
+        <a:xfrm>
+          <a:off x="0" y="0"/>
+          <a:ext cx="0" cy="0"/>
+          <a:chOff x="0" y="0"/>
+          <a:chExt cx="0" cy="0"/>
+        </a:xfrm>
+      </p:grpSpPr>
       <p:sp>
         <p:nvSpPr>
           <p:cNvPr id="2" name="TextBox 1"/>
@@ -3441,13 +6661,25 @@
                 <a:tableStyleId>{5C22544A-7EE6-4342-B048-85BDC9FD1C3A}</a:tableStyleId>
               </a:tblPr>
               <a:tblGrid>
-                <a:gridCol w="1828800"/>
-                <a:gridCol w="1828800"/>
+                <a:gridCol w="1828800">
+                  <a:extLst>
+                    <a:ext uri="{9D8B030D-6E8A-4147-A177-3AD203B41FA5}">
+                      <a16:colId xmlns:a16="http://schemas.microsoft.com/office/drawing/2014/main" val="20000"/>
+                    </a:ext>
+                  </a:extLst>
+                </a:gridCol>
+                <a:gridCol w="1828800">
+                  <a:extLst>
+                    <a:ext uri="{9D8B030D-6E8A-4147-A177-3AD203B41FA5}">
+                      <a16:colId xmlns:a16="http://schemas.microsoft.com/office/drawing/2014/main" val="20001"/>
+                    </a:ext>
+                  </a:extLst>
+                </a:gridCol>
               </a:tblGrid>
               <a:tr h="457200">
                 <a:tc>
                   <a:txBody>
-                    <a:bodyPr anchor="ctr"/>
+                    <a:bodyPr/>
                     <a:lstStyle/>
                     <a:p>
                       <a:pPr algn="ctr">
@@ -3471,7 +6703,7 @@
                 </a:tc>
                 <a:tc>
                   <a:txBody>
-                    <a:bodyPr anchor="ctr"/>
+                    <a:bodyPr/>
                     <a:lstStyle/>
                     <a:p>
                       <a:pPr algn="ctr">
@@ -3493,11 +6725,16 @@
                     </a:solidFill>
                   </a:tcPr>
                 </a:tc>
+                <a:extLst>
+                  <a:ext uri="{0D108BD9-81ED-4DB2-BD59-A6C34878D82A}">
+                    <a16:rowId xmlns:a16="http://schemas.microsoft.com/office/drawing/2014/main" val="10000"/>
+                  </a:ext>
+                </a:extLst>
               </a:tr>
               <a:tr h="457200">
                 <a:tc>
                   <a:txBody>
-                    <a:bodyPr anchor="ctr"/>
+                    <a:bodyPr/>
                     <a:lstStyle/>
                     <a:p>
                       <a:pPr algn="l">
@@ -3521,7 +6758,7 @@
                 </a:tc>
                 <a:tc>
                   <a:txBody>
-                    <a:bodyPr anchor="ctr"/>
+                    <a:bodyPr/>
                     <a:lstStyle/>
                     <a:p>
                       <a:pPr algn="ctr">
@@ -3543,11 +6780,16 @@
                     </a:solidFill>
                   </a:tcPr>
                 </a:tc>
+                <a:extLst>
+                  <a:ext uri="{0D108BD9-81ED-4DB2-BD59-A6C34878D82A}">
+                    <a16:rowId xmlns:a16="http://schemas.microsoft.com/office/drawing/2014/main" val="10001"/>
+                  </a:ext>
+                </a:extLst>
               </a:tr>
               <a:tr h="457200">
                 <a:tc>
                   <a:txBody>
-                    <a:bodyPr anchor="ctr"/>
+                    <a:bodyPr/>
                     <a:lstStyle/>
                     <a:p>
                       <a:pPr algn="l">
@@ -3571,7 +6813,7 @@
                 </a:tc>
                 <a:tc>
                   <a:txBody>
-                    <a:bodyPr anchor="ctr"/>
+                    <a:bodyPr/>
                     <a:lstStyle/>
                     <a:p>
                       <a:pPr algn="ctr">
@@ -3593,11 +6835,16 @@
                     </a:solidFill>
                   </a:tcPr>
                 </a:tc>
+                <a:extLst>
+                  <a:ext uri="{0D108BD9-81ED-4DB2-BD59-A6C34878D82A}">
+                    <a16:rowId xmlns:a16="http://schemas.microsoft.com/office/drawing/2014/main" val="10002"/>
+                  </a:ext>
+                </a:extLst>
               </a:tr>
               <a:tr h="457200">
                 <a:tc>
                   <a:txBody>
-                    <a:bodyPr anchor="ctr"/>
+                    <a:bodyPr/>
                     <a:lstStyle/>
                     <a:p>
                       <a:pPr algn="l">
@@ -3621,7 +6868,7 @@
                 </a:tc>
                 <a:tc>
                   <a:txBody>
-                    <a:bodyPr anchor="ctr"/>
+                    <a:bodyPr/>
                     <a:lstStyle/>
                     <a:p>
                       <a:pPr algn="ctr">
@@ -3643,11 +6890,16 @@
                     </a:solidFill>
                   </a:tcPr>
                 </a:tc>
+                <a:extLst>
+                  <a:ext uri="{0D108BD9-81ED-4DB2-BD59-A6C34878D82A}">
+                    <a16:rowId xmlns:a16="http://schemas.microsoft.com/office/drawing/2014/main" val="10003"/>
+                  </a:ext>
+                </a:extLst>
               </a:tr>
               <a:tr h="457200">
                 <a:tc>
                   <a:txBody>
-                    <a:bodyPr anchor="ctr"/>
+                    <a:bodyPr/>
                     <a:lstStyle/>
                     <a:p>
                       <a:pPr algn="l">
@@ -3671,7 +6923,7 @@
                 </a:tc>
                 <a:tc>
                   <a:txBody>
-                    <a:bodyPr anchor="ctr"/>
+                    <a:bodyPr/>
                     <a:lstStyle/>
                     <a:p>
                       <a:pPr algn="ctr">
@@ -3693,6 +6945,11 @@
                     </a:solidFill>
                   </a:tcPr>
                 </a:tc>
+                <a:extLst>
+                  <a:ext uri="{0D108BD9-81ED-4DB2-BD59-A6C34878D82A}">
+                    <a16:rowId xmlns:a16="http://schemas.microsoft.com/office/drawing/2014/main" val="10004"/>
+                  </a:ext>
+                </a:extLst>
               </a:tr>
             </a:tbl>
           </a:graphicData>
@@ -3720,7 +6977,7 @@
           </a:ln>
         </p:spPr>
         <p:txBody>
-          <a:bodyPr wrap="square" lIns="101600" rIns="101600" tIns="76200" bIns="76200">
+          <a:bodyPr wrap="square" lIns="101600" tIns="76200" rIns="101600" bIns="76200">
             <a:spAutoFit/>
           </a:bodyPr>
           <a:lstStyle/>
@@ -3747,7 +7004,7 @@
 </file>
 
 <file path=ppt/slides/slide12.xml><?xml version="1.0" encoding="utf-8"?>
-<p:sld xmlns:a="http://schemas.openxmlformats.org/drawingml/2006/main" xmlns:p="http://schemas.openxmlformats.org/presentationml/2006/main" xmlns:r="http://schemas.openxmlformats.org/officeDocument/2006/relationships">
+<p:sld xmlns:a="http://schemas.openxmlformats.org/drawingml/2006/main" xmlns:r="http://schemas.openxmlformats.org/officeDocument/2006/relationships" xmlns:p="http://schemas.openxmlformats.org/presentationml/2006/main">
   <p:cSld>
     <p:spTree>
       <p:nvGrpSpPr>
@@ -3755,7 +7012,14 @@
         <p:cNvGrpSpPr/>
         <p:nvPr/>
       </p:nvGrpSpPr>
-      <p:grpSpPr/>
+      <p:grpSpPr>
+        <a:xfrm>
+          <a:off x="0" y="0"/>
+          <a:ext cx="0" cy="0"/>
+          <a:chOff x="0" y="0"/>
+          <a:chExt cx="0" cy="0"/>
+        </a:xfrm>
+      </p:grpSpPr>
       <p:sp>
         <p:nvSpPr>
           <p:cNvPr id="2" name="TextBox 1"/>
@@ -3833,14 +7097,32 @@
                 <a:tableStyleId>{5C22544A-7EE6-4342-B048-85BDC9FD1C3A}</a:tableStyleId>
               </a:tblPr>
               <a:tblGrid>
-                <a:gridCol w="1219200"/>
-                <a:gridCol w="1219200"/>
-                <a:gridCol w="1219200"/>
+                <a:gridCol w="1219200">
+                  <a:extLst>
+                    <a:ext uri="{9D8B030D-6E8A-4147-A177-3AD203B41FA5}">
+                      <a16:colId xmlns:a16="http://schemas.microsoft.com/office/drawing/2014/main" val="20000"/>
+                    </a:ext>
+                  </a:extLst>
+                </a:gridCol>
+                <a:gridCol w="1219200">
+                  <a:extLst>
+                    <a:ext uri="{9D8B030D-6E8A-4147-A177-3AD203B41FA5}">
+                      <a16:colId xmlns:a16="http://schemas.microsoft.com/office/drawing/2014/main" val="20001"/>
+                    </a:ext>
+                  </a:extLst>
+                </a:gridCol>
+                <a:gridCol w="1219200">
+                  <a:extLst>
+                    <a:ext uri="{9D8B030D-6E8A-4147-A177-3AD203B41FA5}">
+                      <a16:colId xmlns:a16="http://schemas.microsoft.com/office/drawing/2014/main" val="20002"/>
+                    </a:ext>
+                  </a:extLst>
+                </a:gridCol>
               </a:tblGrid>
               <a:tr h="493776">
                 <a:tc>
                   <a:txBody>
-                    <a:bodyPr anchor="ctr"/>
+                    <a:bodyPr/>
                     <a:lstStyle/>
                     <a:p>
                       <a:pPr algn="ctr">
@@ -3864,7 +7146,7 @@
                 </a:tc>
                 <a:tc>
                   <a:txBody>
-                    <a:bodyPr anchor="ctr"/>
+                    <a:bodyPr/>
                     <a:lstStyle/>
                     <a:p>
                       <a:pPr algn="ctr">
@@ -3888,7 +7170,7 @@
                 </a:tc>
                 <a:tc>
                   <a:txBody>
-                    <a:bodyPr anchor="ctr"/>
+                    <a:bodyPr/>
                     <a:lstStyle/>
                     <a:p>
                       <a:pPr algn="ctr">
@@ -3910,11 +7192,16 @@
                     </a:solidFill>
                   </a:tcPr>
                 </a:tc>
+                <a:extLst>
+                  <a:ext uri="{0D108BD9-81ED-4DB2-BD59-A6C34878D82A}">
+                    <a16:rowId xmlns:a16="http://schemas.microsoft.com/office/drawing/2014/main" val="10000"/>
+                  </a:ext>
+                </a:extLst>
               </a:tr>
               <a:tr h="493776">
                 <a:tc>
                   <a:txBody>
-                    <a:bodyPr anchor="ctr"/>
+                    <a:bodyPr/>
                     <a:lstStyle/>
                     <a:p>
                       <a:pPr algn="l">
@@ -3938,7 +7225,7 @@
                 </a:tc>
                 <a:tc>
                   <a:txBody>
-                    <a:bodyPr anchor="ctr"/>
+                    <a:bodyPr/>
                     <a:lstStyle/>
                     <a:p>
                       <a:pPr algn="ctr">
@@ -3962,7 +7249,7 @@
                 </a:tc>
                 <a:tc>
                   <a:txBody>
-                    <a:bodyPr anchor="ctr"/>
+                    <a:bodyPr/>
                     <a:lstStyle/>
                     <a:p>
                       <a:pPr algn="ctr">
@@ -3984,11 +7271,16 @@
                     </a:solidFill>
                   </a:tcPr>
                 </a:tc>
+                <a:extLst>
+                  <a:ext uri="{0D108BD9-81ED-4DB2-BD59-A6C34878D82A}">
+                    <a16:rowId xmlns:a16="http://schemas.microsoft.com/office/drawing/2014/main" val="10001"/>
+                  </a:ext>
+                </a:extLst>
               </a:tr>
               <a:tr h="493776">
                 <a:tc>
                   <a:txBody>
-                    <a:bodyPr anchor="ctr"/>
+                    <a:bodyPr/>
                     <a:lstStyle/>
                     <a:p>
                       <a:pPr algn="l">
@@ -4012,7 +7304,7 @@
                 </a:tc>
                 <a:tc>
                   <a:txBody>
-                    <a:bodyPr anchor="ctr"/>
+                    <a:bodyPr/>
                     <a:lstStyle/>
                     <a:p>
                       <a:pPr algn="ctr">
@@ -4036,7 +7328,7 @@
                 </a:tc>
                 <a:tc>
                   <a:txBody>
-                    <a:bodyPr anchor="ctr"/>
+                    <a:bodyPr/>
                     <a:lstStyle/>
                     <a:p>
                       <a:pPr algn="ctr">
@@ -4058,11 +7350,16 @@
                     </a:solidFill>
                   </a:tcPr>
                 </a:tc>
+                <a:extLst>
+                  <a:ext uri="{0D108BD9-81ED-4DB2-BD59-A6C34878D82A}">
+                    <a16:rowId xmlns:a16="http://schemas.microsoft.com/office/drawing/2014/main" val="10002"/>
+                  </a:ext>
+                </a:extLst>
               </a:tr>
               <a:tr h="493776">
                 <a:tc>
                   <a:txBody>
-                    <a:bodyPr anchor="ctr"/>
+                    <a:bodyPr/>
                     <a:lstStyle/>
                     <a:p>
                       <a:pPr algn="l">
@@ -4086,7 +7383,7 @@
                 </a:tc>
                 <a:tc>
                   <a:txBody>
-                    <a:bodyPr anchor="ctr"/>
+                    <a:bodyPr/>
                     <a:lstStyle/>
                     <a:p>
                       <a:pPr algn="ctr">
@@ -4110,7 +7407,7 @@
                 </a:tc>
                 <a:tc>
                   <a:txBody>
-                    <a:bodyPr anchor="ctr"/>
+                    <a:bodyPr/>
                     <a:lstStyle/>
                     <a:p>
                       <a:pPr algn="ctr">
@@ -4132,11 +7429,16 @@
                     </a:solidFill>
                   </a:tcPr>
                 </a:tc>
+                <a:extLst>
+                  <a:ext uri="{0D108BD9-81ED-4DB2-BD59-A6C34878D82A}">
+                    <a16:rowId xmlns:a16="http://schemas.microsoft.com/office/drawing/2014/main" val="10003"/>
+                  </a:ext>
+                </a:extLst>
               </a:tr>
               <a:tr h="493776">
                 <a:tc>
                   <a:txBody>
-                    <a:bodyPr anchor="ctr"/>
+                    <a:bodyPr/>
                     <a:lstStyle/>
                     <a:p>
                       <a:pPr algn="l">
@@ -4160,7 +7462,7 @@
                 </a:tc>
                 <a:tc>
                   <a:txBody>
-                    <a:bodyPr anchor="ctr"/>
+                    <a:bodyPr/>
                     <a:lstStyle/>
                     <a:p>
                       <a:pPr algn="ctr">
@@ -4184,7 +7486,7 @@
                 </a:tc>
                 <a:tc>
                   <a:txBody>
-                    <a:bodyPr anchor="ctr"/>
+                    <a:bodyPr/>
                     <a:lstStyle/>
                     <a:p>
                       <a:pPr algn="ctr">
@@ -4206,6 +7508,11 @@
                     </a:solidFill>
                   </a:tcPr>
                 </a:tc>
+                <a:extLst>
+                  <a:ext uri="{0D108BD9-81ED-4DB2-BD59-A6C34878D82A}">
+                    <a16:rowId xmlns:a16="http://schemas.microsoft.com/office/drawing/2014/main" val="10004"/>
+                  </a:ext>
+                </a:extLst>
               </a:tr>
             </a:tbl>
           </a:graphicData>
@@ -4233,7 +7540,7 @@
           </a:ln>
         </p:spPr>
         <p:txBody>
-          <a:bodyPr wrap="square" lIns="101600" rIns="101600" tIns="76200" bIns="76200">
+          <a:bodyPr wrap="square" lIns="101600" tIns="76200" rIns="101600" bIns="76200">
             <a:spAutoFit/>
           </a:bodyPr>
           <a:lstStyle/>
@@ -4260,7 +7567,7 @@
 </file>
 
 <file path=ppt/slides/slide13.xml><?xml version="1.0" encoding="utf-8"?>
-<p:sld xmlns:a="http://schemas.openxmlformats.org/drawingml/2006/main" xmlns:p="http://schemas.openxmlformats.org/presentationml/2006/main" xmlns:r="http://schemas.openxmlformats.org/officeDocument/2006/relationships">
+<p:sld xmlns:a="http://schemas.openxmlformats.org/drawingml/2006/main" xmlns:r="http://schemas.openxmlformats.org/officeDocument/2006/relationships" xmlns:p="http://schemas.openxmlformats.org/presentationml/2006/main">
   <p:cSld>
     <p:spTree>
       <p:nvGrpSpPr>
@@ -4268,7 +7575,14 @@
         <p:cNvGrpSpPr/>
         <p:nvPr/>
       </p:nvGrpSpPr>
-      <p:grpSpPr/>
+      <p:grpSpPr>
+        <a:xfrm>
+          <a:off x="0" y="0"/>
+          <a:ext cx="0" cy="0"/>
+          <a:chOff x="0" y="0"/>
+          <a:chExt cx="0" cy="0"/>
+        </a:xfrm>
+      </p:grpSpPr>
       <p:sp>
         <p:nvSpPr>
           <p:cNvPr id="2" name="TextBox 1"/>
@@ -4346,16 +7660,46 @@
                 <a:tableStyleId>{5C22544A-7EE6-4342-B048-85BDC9FD1C3A}</a:tableStyleId>
               </a:tblPr>
               <a:tblGrid>
-                <a:gridCol w="603504"/>
-                <a:gridCol w="603504"/>
-                <a:gridCol w="603504"/>
-                <a:gridCol w="603504"/>
-                <a:gridCol w="603504"/>
+                <a:gridCol w="603504">
+                  <a:extLst>
+                    <a:ext uri="{9D8B030D-6E8A-4147-A177-3AD203B41FA5}">
+                      <a16:colId xmlns:a16="http://schemas.microsoft.com/office/drawing/2014/main" val="20000"/>
+                    </a:ext>
+                  </a:extLst>
+                </a:gridCol>
+                <a:gridCol w="603504">
+                  <a:extLst>
+                    <a:ext uri="{9D8B030D-6E8A-4147-A177-3AD203B41FA5}">
+                      <a16:colId xmlns:a16="http://schemas.microsoft.com/office/drawing/2014/main" val="20001"/>
+                    </a:ext>
+                  </a:extLst>
+                </a:gridCol>
+                <a:gridCol w="603504">
+                  <a:extLst>
+                    <a:ext uri="{9D8B030D-6E8A-4147-A177-3AD203B41FA5}">
+                      <a16:colId xmlns:a16="http://schemas.microsoft.com/office/drawing/2014/main" val="20002"/>
+                    </a:ext>
+                  </a:extLst>
+                </a:gridCol>
+                <a:gridCol w="603504">
+                  <a:extLst>
+                    <a:ext uri="{9D8B030D-6E8A-4147-A177-3AD203B41FA5}">
+                      <a16:colId xmlns:a16="http://schemas.microsoft.com/office/drawing/2014/main" val="20003"/>
+                    </a:ext>
+                  </a:extLst>
+                </a:gridCol>
+                <a:gridCol w="603504">
+                  <a:extLst>
+                    <a:ext uri="{9D8B030D-6E8A-4147-A177-3AD203B41FA5}">
+                      <a16:colId xmlns:a16="http://schemas.microsoft.com/office/drawing/2014/main" val="20004"/>
+                    </a:ext>
+                  </a:extLst>
+                </a:gridCol>
               </a:tblGrid>
               <a:tr h="877824">
                 <a:tc>
                   <a:txBody>
-                    <a:bodyPr anchor="ctr"/>
+                    <a:bodyPr/>
                     <a:lstStyle/>
                     <a:p>
                       <a:pPr algn="ctr">
@@ -4379,7 +7723,7 @@
                 </a:tc>
                 <a:tc>
                   <a:txBody>
-                    <a:bodyPr anchor="ctr"/>
+                    <a:bodyPr/>
                     <a:lstStyle/>
                     <a:p>
                       <a:pPr algn="ctr">
@@ -4403,7 +7747,7 @@
                 </a:tc>
                 <a:tc>
                   <a:txBody>
-                    <a:bodyPr anchor="ctr"/>
+                    <a:bodyPr/>
                     <a:lstStyle/>
                     <a:p>
                       <a:pPr algn="ctr">
@@ -4427,7 +7771,7 @@
                 </a:tc>
                 <a:tc>
                   <a:txBody>
-                    <a:bodyPr anchor="ctr"/>
+                    <a:bodyPr/>
                     <a:lstStyle/>
                     <a:p>
                       <a:pPr algn="ctr">
@@ -4451,7 +7795,7 @@
                 </a:tc>
                 <a:tc>
                   <a:txBody>
-                    <a:bodyPr anchor="ctr"/>
+                    <a:bodyPr/>
                     <a:lstStyle/>
                     <a:p>
                       <a:pPr algn="ctr">
@@ -4473,11 +7817,16 @@
                     </a:solidFill>
                   </a:tcPr>
                 </a:tc>
+                <a:extLst>
+                  <a:ext uri="{0D108BD9-81ED-4DB2-BD59-A6C34878D82A}">
+                    <a16:rowId xmlns:a16="http://schemas.microsoft.com/office/drawing/2014/main" val="10000"/>
+                  </a:ext>
+                </a:extLst>
               </a:tr>
               <a:tr h="877824">
                 <a:tc>
                   <a:txBody>
-                    <a:bodyPr anchor="ctr"/>
+                    <a:bodyPr/>
                     <a:lstStyle/>
                     <a:p>
                       <a:pPr algn="l">
@@ -4501,7 +7850,7 @@
                 </a:tc>
                 <a:tc>
                   <a:txBody>
-                    <a:bodyPr anchor="ctr"/>
+                    <a:bodyPr/>
                     <a:lstStyle/>
                     <a:p>
                       <a:pPr algn="ctr">
@@ -4525,7 +7874,7 @@
                 </a:tc>
                 <a:tc>
                   <a:txBody>
-                    <a:bodyPr anchor="ctr"/>
+                    <a:bodyPr/>
                     <a:lstStyle/>
                     <a:p>
                       <a:pPr algn="ctr">
@@ -4549,7 +7898,7 @@
                 </a:tc>
                 <a:tc>
                   <a:txBody>
-                    <a:bodyPr anchor="ctr"/>
+                    <a:bodyPr/>
                     <a:lstStyle/>
                     <a:p>
                       <a:pPr algn="ctr">
@@ -4573,7 +7922,7 @@
                 </a:tc>
                 <a:tc>
                   <a:txBody>
-                    <a:bodyPr anchor="ctr"/>
+                    <a:bodyPr/>
                     <a:lstStyle/>
                     <a:p>
                       <a:pPr algn="ctr">
@@ -4595,11 +7944,16 @@
                     </a:solidFill>
                   </a:tcPr>
                 </a:tc>
+                <a:extLst>
+                  <a:ext uri="{0D108BD9-81ED-4DB2-BD59-A6C34878D82A}">
+                    <a16:rowId xmlns:a16="http://schemas.microsoft.com/office/drawing/2014/main" val="10001"/>
+                  </a:ext>
+                </a:extLst>
               </a:tr>
               <a:tr h="877824">
                 <a:tc>
                   <a:txBody>
-                    <a:bodyPr anchor="ctr"/>
+                    <a:bodyPr/>
                     <a:lstStyle/>
                     <a:p>
                       <a:pPr algn="l">
@@ -4623,7 +7977,7 @@
                 </a:tc>
                 <a:tc>
                   <a:txBody>
-                    <a:bodyPr anchor="ctr"/>
+                    <a:bodyPr/>
                     <a:lstStyle/>
                     <a:p>
                       <a:pPr algn="ctr">
@@ -4647,7 +8001,7 @@
                 </a:tc>
                 <a:tc>
                   <a:txBody>
-                    <a:bodyPr anchor="ctr"/>
+                    <a:bodyPr/>
                     <a:lstStyle/>
                     <a:p>
                       <a:pPr algn="ctr">
@@ -4671,7 +8025,7 @@
                 </a:tc>
                 <a:tc>
                   <a:txBody>
-                    <a:bodyPr anchor="ctr"/>
+                    <a:bodyPr/>
                     <a:lstStyle/>
                     <a:p>
                       <a:pPr algn="ctr">
@@ -4695,7 +8049,7 @@
                 </a:tc>
                 <a:tc>
                   <a:txBody>
-                    <a:bodyPr anchor="ctr"/>
+                    <a:bodyPr/>
                     <a:lstStyle/>
                     <a:p>
                       <a:pPr algn="ctr">
@@ -4717,11 +8071,16 @@
                     </a:solidFill>
                   </a:tcPr>
                 </a:tc>
+                <a:extLst>
+                  <a:ext uri="{0D108BD9-81ED-4DB2-BD59-A6C34878D82A}">
+                    <a16:rowId xmlns:a16="http://schemas.microsoft.com/office/drawing/2014/main" val="10002"/>
+                  </a:ext>
+                </a:extLst>
               </a:tr>
               <a:tr h="877824">
                 <a:tc>
                   <a:txBody>
-                    <a:bodyPr anchor="ctr"/>
+                    <a:bodyPr/>
                     <a:lstStyle/>
                     <a:p>
                       <a:pPr algn="l">
@@ -4745,7 +8104,7 @@
                 </a:tc>
                 <a:tc>
                   <a:txBody>
-                    <a:bodyPr anchor="ctr"/>
+                    <a:bodyPr/>
                     <a:lstStyle/>
                     <a:p>
                       <a:pPr algn="ctr">
@@ -4769,7 +8128,7 @@
                 </a:tc>
                 <a:tc>
                   <a:txBody>
-                    <a:bodyPr anchor="ctr"/>
+                    <a:bodyPr/>
                     <a:lstStyle/>
                     <a:p>
                       <a:pPr algn="ctr">
@@ -4793,7 +8152,7 @@
                 </a:tc>
                 <a:tc>
                   <a:txBody>
-                    <a:bodyPr anchor="ctr"/>
+                    <a:bodyPr/>
                     <a:lstStyle/>
                     <a:p>
                       <a:pPr algn="ctr">
@@ -4817,7 +8176,7 @@
                 </a:tc>
                 <a:tc>
                   <a:txBody>
-                    <a:bodyPr anchor="ctr"/>
+                    <a:bodyPr/>
                     <a:lstStyle/>
                     <a:p>
                       <a:pPr algn="ctr">
@@ -4839,11 +8198,16 @@
                     </a:solidFill>
                   </a:tcPr>
                 </a:tc>
+                <a:extLst>
+                  <a:ext uri="{0D108BD9-81ED-4DB2-BD59-A6C34878D82A}">
+                    <a16:rowId xmlns:a16="http://schemas.microsoft.com/office/drawing/2014/main" val="10003"/>
+                  </a:ext>
+                </a:extLst>
               </a:tr>
               <a:tr h="877824">
                 <a:tc>
                   <a:txBody>
-                    <a:bodyPr anchor="ctr"/>
+                    <a:bodyPr/>
                     <a:lstStyle/>
                     <a:p>
                       <a:pPr algn="l">
@@ -4867,7 +8231,7 @@
                 </a:tc>
                 <a:tc>
                   <a:txBody>
-                    <a:bodyPr anchor="ctr"/>
+                    <a:bodyPr/>
                     <a:lstStyle/>
                     <a:p>
                       <a:pPr algn="ctr">
@@ -4891,7 +8255,7 @@
                 </a:tc>
                 <a:tc>
                   <a:txBody>
-                    <a:bodyPr anchor="ctr"/>
+                    <a:bodyPr/>
                     <a:lstStyle/>
                     <a:p>
                       <a:pPr algn="ctr">
@@ -4915,7 +8279,7 @@
                 </a:tc>
                 <a:tc>
                   <a:txBody>
-                    <a:bodyPr anchor="ctr"/>
+                    <a:bodyPr/>
                     <a:lstStyle/>
                     <a:p>
                       <a:pPr algn="ctr">
@@ -4939,7 +8303,7 @@
                 </a:tc>
                 <a:tc>
                   <a:txBody>
-                    <a:bodyPr anchor="ctr"/>
+                    <a:bodyPr/>
                     <a:lstStyle/>
                     <a:p>
                       <a:pPr algn="ctr">
@@ -4961,6 +8325,11 @@
                     </a:solidFill>
                   </a:tcPr>
                 </a:tc>
+                <a:extLst>
+                  <a:ext uri="{0D108BD9-81ED-4DB2-BD59-A6C34878D82A}">
+                    <a16:rowId xmlns:a16="http://schemas.microsoft.com/office/drawing/2014/main" val="10004"/>
+                  </a:ext>
+                </a:extLst>
               </a:tr>
             </a:tbl>
           </a:graphicData>
@@ -4974,8 +8343,8 @@
         </p:nvSpPr>
         <p:spPr>
           <a:xfrm>
-            <a:off x="548640" y="5532120"/>
-            <a:ext cx="10972800" cy="548640"/>
+            <a:off x="548640" y="5632704"/>
+            <a:ext cx="10972800" cy="461665"/>
           </a:xfrm>
           <a:prstGeom prst="rect">
             <a:avLst/>
@@ -4988,14 +8357,14 @@
           </a:ln>
         </p:spPr>
         <p:txBody>
-          <a:bodyPr wrap="square" lIns="101600" rIns="101600" tIns="76200" bIns="76200">
+          <a:bodyPr wrap="square" lIns="101600" tIns="76200" rIns="101600" bIns="76200">
             <a:spAutoFit/>
           </a:bodyPr>
           <a:lstStyle/>
           <a:p>
             <a:pPr algn="l"/>
             <a:r>
-              <a:rPr sz="1300" b="0">
+              <a:rPr sz="2000" b="0" dirty="0">
                 <a:solidFill>
                   <a:srgbClr val="191919"/>
                 </a:solidFill>
@@ -5015,7 +8384,7 @@
 </file>
 
 <file path=ppt/slides/slide14.xml><?xml version="1.0" encoding="utf-8"?>
-<p:sld xmlns:a="http://schemas.openxmlformats.org/drawingml/2006/main" xmlns:p="http://schemas.openxmlformats.org/presentationml/2006/main" xmlns:r="http://schemas.openxmlformats.org/officeDocument/2006/relationships">
+<p:sld xmlns:a="http://schemas.openxmlformats.org/drawingml/2006/main" xmlns:r="http://schemas.openxmlformats.org/officeDocument/2006/relationships" xmlns:p="http://schemas.openxmlformats.org/presentationml/2006/main">
   <p:cSld>
     <p:spTree>
       <p:nvGrpSpPr>
@@ -5023,7 +8392,14 @@
         <p:cNvGrpSpPr/>
         <p:nvPr/>
       </p:nvGrpSpPr>
-      <p:grpSpPr/>
+      <p:grpSpPr>
+        <a:xfrm>
+          <a:off x="0" y="0"/>
+          <a:ext cx="0" cy="0"/>
+          <a:chOff x="0" y="0"/>
+          <a:chExt cx="0" cy="0"/>
+        </a:xfrm>
+      </p:grpSpPr>
       <p:sp>
         <p:nvSpPr>
           <p:cNvPr id="2" name="TextBox 1"/>
@@ -5067,7 +8443,7 @@
         <p:spPr>
           <a:xfrm>
             <a:off x="640080" y="1280160"/>
-            <a:ext cx="10789920" cy="4206240"/>
+            <a:ext cx="10789920" cy="4964244"/>
           </a:xfrm>
           <a:prstGeom prst="rect">
             <a:avLst/>
@@ -5075,7 +8451,7 @@
           <a:noFill/>
         </p:spPr>
         <p:txBody>
-          <a:bodyPr wrap="square" lIns="50800" rIns="50800" tIns="25400" bIns="25400">
+          <a:bodyPr wrap="square" lIns="50800" tIns="25400" rIns="50800" bIns="25400">
             <a:spAutoFit/>
           </a:bodyPr>
           <a:lstStyle/>
@@ -5092,8 +8468,13 @@
               </a:defRPr>
             </a:pPr>
             <a:r>
+              <a:rPr sz="2800" dirty="0"/>
               <a:t>• OLS coefficients, tree importance, SHAP, and ablation answer different questions.</a:t>
             </a:r>
+            <a:br>
+              <a:rPr lang="en-US" sz="2800" dirty="0"/>
+            </a:br>
+            <a:endParaRPr sz="2800" dirty="0"/>
           </a:p>
           <a:p>
             <a:pPr>
@@ -5108,7 +8489,15 @@
               </a:defRPr>
             </a:pPr>
             <a:r>
-              <a:t>• A feature can be predictive without being the right feature to rely on.</a:t>
+              <a:rPr sz="2800" dirty="0"/>
+              <a:t>• A feature can be predictive without being the right feature to rely on</a:t>
+            </a:r>
+            <a:br>
+              <a:rPr lang="en-US" sz="2800" dirty="0"/>
+            </a:br>
+            <a:r>
+              <a:rPr sz="2800" dirty="0"/>
+              <a:t>.</a:t>
             </a:r>
           </a:p>
           <a:p>
@@ -5124,8 +8513,13 @@
               </a:defRPr>
             </a:pPr>
             <a:r>
+              <a:rPr sz="2800" dirty="0"/>
               <a:t>• A model can look strong overall and still behave differently across groups.</a:t>
             </a:r>
+            <a:br>
+              <a:rPr lang="en-US" sz="2800" dirty="0"/>
+            </a:br>
+            <a:endParaRPr sz="2800" dirty="0"/>
           </a:p>
           <a:p>
             <a:pPr>
@@ -5140,6 +8534,7 @@
               </a:defRPr>
             </a:pPr>
             <a:r>
+              <a:rPr sz="2800" dirty="0"/>
               <a:t>• Feature importance and fairness are related, but they are not the same thing.</a:t>
             </a:r>
           </a:p>
@@ -5154,7 +8549,7 @@
 </file>
 
 <file path=ppt/slides/slide2.xml><?xml version="1.0" encoding="utf-8"?>
-<p:sld xmlns:a="http://schemas.openxmlformats.org/drawingml/2006/main" xmlns:p="http://schemas.openxmlformats.org/presentationml/2006/main" xmlns:r="http://schemas.openxmlformats.org/officeDocument/2006/relationships">
+<p:sld xmlns:a="http://schemas.openxmlformats.org/drawingml/2006/main" xmlns:r="http://schemas.openxmlformats.org/officeDocument/2006/relationships" xmlns:p="http://schemas.openxmlformats.org/presentationml/2006/main">
   <p:cSld>
     <p:spTree>
       <p:nvGrpSpPr>
@@ -5162,7 +8557,14 @@
         <p:cNvGrpSpPr/>
         <p:nvPr/>
       </p:nvGrpSpPr>
-      <p:grpSpPr/>
+      <p:grpSpPr>
+        <a:xfrm>
+          <a:off x="0" y="0"/>
+          <a:ext cx="0" cy="0"/>
+          <a:chOff x="0" y="0"/>
+          <a:chExt cx="0" cy="0"/>
+        </a:xfrm>
+      </p:grpSpPr>
       <p:sp>
         <p:nvSpPr>
           <p:cNvPr id="2" name="TextBox 1"/>
@@ -5206,7 +8608,7 @@
         <p:spPr>
           <a:xfrm>
             <a:off x="548640" y="1005840"/>
-            <a:ext cx="6035040" cy="4389120"/>
+            <a:ext cx="5266944" cy="3837654"/>
           </a:xfrm>
           <a:prstGeom prst="rect">
             <a:avLst/>
@@ -5214,7 +8616,7 @@
           <a:noFill/>
         </p:spPr>
         <p:txBody>
-          <a:bodyPr wrap="square" lIns="50800" rIns="50800" tIns="25400" bIns="25400">
+          <a:bodyPr wrap="square" lIns="50800" tIns="25400" rIns="50800" bIns="25400">
             <a:spAutoFit/>
           </a:bodyPr>
           <a:lstStyle/>
@@ -5231,8 +8633,25 @@
               </a:defRPr>
             </a:pPr>
             <a:r>
-              <a:t>• One 2017 Maryland arrest cohort</a:t>
-            </a:r>
+              <a:rPr sz="2400" dirty="0"/>
+              <a:t>•</a:t>
+            </a:r>
+            <a:r>
+              <a:rPr lang="en-US" sz="2400" dirty="0"/>
+              <a:t> Use Maryland data to predict </a:t>
+            </a:r>
+            <a:r>
+              <a:rPr sz="2400" dirty="0"/>
+              <a:t>violent rearrest within one year</a:t>
+            </a:r>
+            <a:r>
+              <a:rPr lang="en-US" sz="2400" dirty="0"/>
+              <a:t> for all cases in 2017</a:t>
+            </a:r>
+            <a:br>
+              <a:rPr lang="en-US" sz="2400" dirty="0"/>
+            </a:br>
+            <a:endParaRPr sz="2400" dirty="0"/>
           </a:p>
           <a:p>
             <a:pPr>
@@ -5247,8 +8666,13 @@
               </a:defRPr>
             </a:pPr>
             <a:r>
-              <a:t>• Outcome: violent rearrest within one year</a:t>
-            </a:r>
+              <a:rPr sz="2400" dirty="0"/>
+              <a:t>• Three feature groups: prior history, current charge, demographics</a:t>
+            </a:r>
+            <a:br>
+              <a:rPr lang="en-US" sz="2400" dirty="0"/>
+            </a:br>
+            <a:endParaRPr sz="2400" dirty="0"/>
           </a:p>
           <a:p>
             <a:pPr>
@@ -5263,22 +8687,7 @@
               </a:defRPr>
             </a:pPr>
             <a:r>
-              <a:t>• Three feature groups: prior history, current charge, demographics</a:t>
-            </a:r>
-          </a:p>
-          <a:p>
-            <a:pPr>
-              <a:lnSpc>
-                <a:spcPct val="115000"/>
-              </a:lnSpc>
-              <a:defRPr sz="2000">
-                <a:solidFill>
-                  <a:srgbClr val="191919"/>
-                </a:solidFill>
-                <a:latin typeface="Cambria"/>
-              </a:defRPr>
-            </a:pPr>
-            <a:r>
+              <a:rPr sz="2400" dirty="0"/>
               <a:t>• Black and White defendants only, so the comparison stays focused</a:t>
             </a:r>
           </a:p>
@@ -5303,13 +8712,25 @@
                 <a:tableStyleId>{5C22544A-7EE6-4342-B048-85BDC9FD1C3A}</a:tableStyleId>
               </a:tblPr>
               <a:tblGrid>
-                <a:gridCol w="2286000"/>
-                <a:gridCol w="2286000"/>
+                <a:gridCol w="2286000">
+                  <a:extLst>
+                    <a:ext uri="{9D8B030D-6E8A-4147-A177-3AD203B41FA5}">
+                      <a16:colId xmlns:a16="http://schemas.microsoft.com/office/drawing/2014/main" val="20000"/>
+                    </a:ext>
+                  </a:extLst>
+                </a:gridCol>
+                <a:gridCol w="2286000">
+                  <a:extLst>
+                    <a:ext uri="{9D8B030D-6E8A-4147-A177-3AD203B41FA5}">
+                      <a16:colId xmlns:a16="http://schemas.microsoft.com/office/drawing/2014/main" val="20001"/>
+                    </a:ext>
+                  </a:extLst>
+                </a:gridCol>
               </a:tblGrid>
               <a:tr h="487680">
                 <a:tc>
                   <a:txBody>
-                    <a:bodyPr anchor="ctr"/>
+                    <a:bodyPr/>
                     <a:lstStyle/>
                     <a:p>
                       <a:pPr algn="ctr">
@@ -5321,6 +8742,7 @@
                         </a:defRPr>
                       </a:pPr>
                       <a:r>
+                        <a:rPr dirty="0"/>
                         <a:t>Measure</a:t>
                       </a:r>
                     </a:p>
@@ -5333,7 +8755,7 @@
                 </a:tc>
                 <a:tc>
                   <a:txBody>
-                    <a:bodyPr anchor="ctr"/>
+                    <a:bodyPr/>
                     <a:lstStyle/>
                     <a:p>
                       <a:pPr algn="ctr">
@@ -5355,11 +8777,16 @@
                     </a:solidFill>
                   </a:tcPr>
                 </a:tc>
+                <a:extLst>
+                  <a:ext uri="{0D108BD9-81ED-4DB2-BD59-A6C34878D82A}">
+                    <a16:rowId xmlns:a16="http://schemas.microsoft.com/office/drawing/2014/main" val="10000"/>
+                  </a:ext>
+                </a:extLst>
               </a:tr>
               <a:tr h="487680">
                 <a:tc>
                   <a:txBody>
-                    <a:bodyPr anchor="ctr"/>
+                    <a:bodyPr/>
                     <a:lstStyle/>
                     <a:p>
                       <a:pPr algn="l">
@@ -5383,7 +8810,7 @@
                 </a:tc>
                 <a:tc>
                   <a:txBody>
-                    <a:bodyPr anchor="ctr"/>
+                    <a:bodyPr/>
                     <a:lstStyle/>
                     <a:p>
                       <a:pPr algn="ctr">
@@ -5405,11 +8832,16 @@
                     </a:solidFill>
                   </a:tcPr>
                 </a:tc>
+                <a:extLst>
+                  <a:ext uri="{0D108BD9-81ED-4DB2-BD59-A6C34878D82A}">
+                    <a16:rowId xmlns:a16="http://schemas.microsoft.com/office/drawing/2014/main" val="10001"/>
+                  </a:ext>
+                </a:extLst>
               </a:tr>
               <a:tr h="487680">
                 <a:tc>
                   <a:txBody>
-                    <a:bodyPr anchor="ctr"/>
+                    <a:bodyPr/>
                     <a:lstStyle/>
                     <a:p>
                       <a:pPr algn="l">
@@ -5433,7 +8865,7 @@
                 </a:tc>
                 <a:tc>
                   <a:txBody>
-                    <a:bodyPr anchor="ctr"/>
+                    <a:bodyPr/>
                     <a:lstStyle/>
                     <a:p>
                       <a:pPr algn="ctr">
@@ -5455,11 +8887,16 @@
                     </a:solidFill>
                   </a:tcPr>
                 </a:tc>
+                <a:extLst>
+                  <a:ext uri="{0D108BD9-81ED-4DB2-BD59-A6C34878D82A}">
+                    <a16:rowId xmlns:a16="http://schemas.microsoft.com/office/drawing/2014/main" val="10002"/>
+                  </a:ext>
+                </a:extLst>
               </a:tr>
               <a:tr h="487680">
                 <a:tc>
                   <a:txBody>
-                    <a:bodyPr anchor="ctr"/>
+                    <a:bodyPr/>
                     <a:lstStyle/>
                     <a:p>
                       <a:pPr algn="l">
@@ -5471,6 +8908,7 @@
                         </a:defRPr>
                       </a:pPr>
                       <a:r>
+                        <a:rPr dirty="0"/>
                         <a:t>One-year violent rearrest rate</a:t>
                       </a:r>
                     </a:p>
@@ -5483,7 +8921,7 @@
                 </a:tc>
                 <a:tc>
                   <a:txBody>
-                    <a:bodyPr anchor="ctr"/>
+                    <a:bodyPr/>
                     <a:lstStyle/>
                     <a:p>
                       <a:pPr algn="ctr">
@@ -5505,11 +8943,16 @@
                     </a:solidFill>
                   </a:tcPr>
                 </a:tc>
+                <a:extLst>
+                  <a:ext uri="{0D108BD9-81ED-4DB2-BD59-A6C34878D82A}">
+                    <a16:rowId xmlns:a16="http://schemas.microsoft.com/office/drawing/2014/main" val="10003"/>
+                  </a:ext>
+                </a:extLst>
               </a:tr>
               <a:tr h="487680">
                 <a:tc>
                   <a:txBody>
-                    <a:bodyPr anchor="ctr"/>
+                    <a:bodyPr/>
                     <a:lstStyle/>
                     <a:p>
                       <a:pPr algn="l">
@@ -5533,7 +8976,7 @@
                 </a:tc>
                 <a:tc>
                   <a:txBody>
-                    <a:bodyPr anchor="ctr"/>
+                    <a:bodyPr/>
                     <a:lstStyle/>
                     <a:p>
                       <a:pPr algn="ctr">
@@ -5555,11 +8998,16 @@
                     </a:solidFill>
                   </a:tcPr>
                 </a:tc>
+                <a:extLst>
+                  <a:ext uri="{0D108BD9-81ED-4DB2-BD59-A6C34878D82A}">
+                    <a16:rowId xmlns:a16="http://schemas.microsoft.com/office/drawing/2014/main" val="10004"/>
+                  </a:ext>
+                </a:extLst>
               </a:tr>
               <a:tr h="487680">
                 <a:tc>
                   <a:txBody>
-                    <a:bodyPr anchor="ctr"/>
+                    <a:bodyPr/>
                     <a:lstStyle/>
                     <a:p>
                       <a:pPr algn="l">
@@ -5583,7 +9031,7 @@
                 </a:tc>
                 <a:tc>
                   <a:txBody>
-                    <a:bodyPr anchor="ctr"/>
+                    <a:bodyPr/>
                     <a:lstStyle/>
                     <a:p>
                       <a:pPr algn="ctr">
@@ -5595,6 +9043,7 @@
                         </a:defRPr>
                       </a:pPr>
                       <a:r>
+                        <a:rPr dirty="0"/>
                         <a:t>10</a:t>
                       </a:r>
                     </a:p>
@@ -5605,6 +9054,11 @@
                     </a:solidFill>
                   </a:tcPr>
                 </a:tc>
+                <a:extLst>
+                  <a:ext uri="{0D108BD9-81ED-4DB2-BD59-A6C34878D82A}">
+                    <a16:rowId xmlns:a16="http://schemas.microsoft.com/office/drawing/2014/main" val="10005"/>
+                  </a:ext>
+                </a:extLst>
               </a:tr>
             </a:tbl>
           </a:graphicData>
@@ -5632,7 +9086,7 @@
           </a:ln>
         </p:spPr>
         <p:txBody>
-          <a:bodyPr wrap="square" lIns="101600" rIns="101600" tIns="76200" bIns="76200">
+          <a:bodyPr wrap="square" lIns="101600" tIns="76200" rIns="101600" bIns="76200">
             <a:spAutoFit/>
           </a:bodyPr>
           <a:lstStyle/>
@@ -5662,7 +9116,7 @@
 </file>
 
 <file path=ppt/slides/slide3.xml><?xml version="1.0" encoding="utf-8"?>
-<p:sld xmlns:a="http://schemas.openxmlformats.org/drawingml/2006/main" xmlns:p="http://schemas.openxmlformats.org/presentationml/2006/main" xmlns:r="http://schemas.openxmlformats.org/officeDocument/2006/relationships">
+<p:sld xmlns:a="http://schemas.openxmlformats.org/drawingml/2006/main" xmlns:r="http://schemas.openxmlformats.org/officeDocument/2006/relationships" xmlns:p="http://schemas.openxmlformats.org/presentationml/2006/main">
   <p:cSld>
     <p:spTree>
       <p:nvGrpSpPr>
@@ -5670,7 +9124,14 @@
         <p:cNvGrpSpPr/>
         <p:nvPr/>
       </p:nvGrpSpPr>
-      <p:grpSpPr/>
+      <p:grpSpPr>
+        <a:xfrm>
+          <a:off x="0" y="0"/>
+          <a:ext cx="0" cy="0"/>
+          <a:chOff x="0" y="0"/>
+          <a:chExt cx="0" cy="0"/>
+        </a:xfrm>
+      </p:grpSpPr>
       <p:sp>
         <p:nvSpPr>
           <p:cNvPr id="2" name="TextBox 1"/>
@@ -5705,77 +9166,379 @@
           </a:p>
         </p:txBody>
       </p:sp>
-      <p:sp>
-        <p:nvSpPr>
-          <p:cNvPr id="3" name="TextBox 2"/>
-          <p:cNvSpPr txBox="1"/>
-          <p:nvPr/>
-        </p:nvSpPr>
-        <p:spPr>
-          <a:xfrm>
-            <a:off x="548640" y="1005840"/>
-            <a:ext cx="6400800" cy="4389120"/>
-          </a:xfrm>
-          <a:prstGeom prst="rect">
-            <a:avLst/>
-          </a:prstGeom>
-          <a:noFill/>
-        </p:spPr>
-        <p:txBody>
-          <a:bodyPr wrap="square" lIns="50800" rIns="50800" tIns="25400" bIns="25400">
-            <a:spAutoFit/>
-          </a:bodyPr>
-          <a:lstStyle/>
-          <a:p>
-            <a:pPr>
-              <a:lnSpc>
-                <a:spcPct val="115000"/>
-              </a:lnSpc>
-              <a:defRPr sz="1800">
-                <a:solidFill>
-                  <a:srgbClr val="191919"/>
-                </a:solidFill>
-                <a:latin typeface="Cambria"/>
-              </a:defRPr>
-            </a:pPr>
-            <a:r>
-              <a:t>• In a linear model, each coefficient says how the prediction changes when one feature changes, holding the rest fixed.</a:t>
-            </a:r>
-          </a:p>
-          <a:p>
-            <a:pPr>
-              <a:lnSpc>
-                <a:spcPct val="115000"/>
-              </a:lnSpc>
-              <a:defRPr sz="1800">
-                <a:solidFill>
-                  <a:srgbClr val="191919"/>
-                </a:solidFill>
-                <a:latin typeface="Cambria"/>
-              </a:defRPr>
-            </a:pPr>
-            <a:r>
-              <a:t>• That makes OLS the easiest place to start.</a:t>
-            </a:r>
-          </a:p>
-          <a:p>
-            <a:pPr>
-              <a:lnSpc>
-                <a:spcPct val="115000"/>
-              </a:lnSpc>
-              <a:defRPr sz="1800">
-                <a:solidFill>
-                  <a:srgbClr val="191919"/>
-                </a:solidFill>
-                <a:latin typeface="Cambria"/>
-              </a:defRPr>
-            </a:pPr>
-            <a:r>
-              <a:t>• It is still conditional on the other variables, so scaling and correlation matter.</a:t>
-            </a:r>
-          </a:p>
-        </p:txBody>
-      </p:sp>
+      <mc:AlternateContent xmlns:mc="http://schemas.openxmlformats.org/markup-compatibility/2006">
+        <mc:Choice xmlns:a14="http://schemas.microsoft.com/office/drawing/2010/main" Requires="a14">
+          <p:sp>
+            <p:nvSpPr>
+              <p:cNvPr id="3" name="TextBox 2"/>
+              <p:cNvSpPr txBox="1"/>
+              <p:nvPr/>
+            </p:nvSpPr>
+            <p:spPr>
+              <a:xfrm>
+                <a:off x="548640" y="1005840"/>
+                <a:ext cx="6400800" cy="4687117"/>
+              </a:xfrm>
+              <a:prstGeom prst="rect">
+                <a:avLst/>
+              </a:prstGeom>
+              <a:noFill/>
+            </p:spPr>
+            <p:txBody>
+              <a:bodyPr wrap="square" lIns="50800" tIns="25400" rIns="50800" bIns="25400">
+                <a:spAutoFit/>
+              </a:bodyPr>
+              <a:lstStyle/>
+              <a:p>
+                <a:pPr>
+                  <a:lnSpc>
+                    <a:spcPct val="115000"/>
+                  </a:lnSpc>
+                  <a:defRPr sz="1800">
+                    <a:solidFill>
+                      <a:srgbClr val="191919"/>
+                    </a:solidFill>
+                    <a:latin typeface="Cambria"/>
+                  </a:defRPr>
+                </a:pPr>
+                <a:r>
+                  <a:rPr lang="en-US" sz="2400" dirty="0"/>
+                  <a:t>• In a linear model, each coefficient says how the prediction changes when one feature changes, holding the rest fixed.</a:t>
+                </a:r>
+              </a:p>
+              <a:p>
+                <a:pPr>
+                  <a:lnSpc>
+                    <a:spcPct val="115000"/>
+                  </a:lnSpc>
+                  <a:defRPr sz="1800">
+                    <a:solidFill>
+                      <a:srgbClr val="191919"/>
+                    </a:solidFill>
+                    <a:latin typeface="Cambria"/>
+                  </a:defRPr>
+                </a:pPr>
+                <a:endParaRPr lang="en-US" sz="2400" dirty="0"/>
+              </a:p>
+              <a:p>
+                <a:pPr>
+                  <a:lnSpc>
+                    <a:spcPct val="115000"/>
+                  </a:lnSpc>
+                  <a:defRPr sz="1800">
+                    <a:solidFill>
+                      <a:srgbClr val="191919"/>
+                    </a:solidFill>
+                    <a:latin typeface="Cambria"/>
+                  </a:defRPr>
+                </a:pPr>
+                <a14:m>
+                  <m:oMathPara xmlns:m="http://schemas.openxmlformats.org/officeDocument/2006/math">
+                    <m:oMathParaPr>
+                      <m:jc m:val="centerGroup"/>
+                    </m:oMathParaPr>
+                    <m:oMath xmlns:m="http://schemas.openxmlformats.org/officeDocument/2006/math">
+                      <m:r>
+                        <a:rPr lang="en-US" sz="2400" b="0" i="1" smtClean="0">
+                          <a:latin typeface="Cambria Math" panose="02040503050406030204" pitchFamily="18" charset="0"/>
+                        </a:rPr>
+                        <m:t>𝑣𝑖𝑜</m:t>
+                      </m:r>
+                      <m:r>
+                        <a:rPr lang="en-US" sz="2400" b="0" i="1" smtClean="0">
+                          <a:latin typeface="Cambria Math" panose="02040503050406030204" pitchFamily="18" charset="0"/>
+                        </a:rPr>
+                        <m:t>.</m:t>
+                      </m:r>
+                      <m:r>
+                        <a:rPr lang="en-US" sz="2400" b="0" i="1" smtClean="0">
+                          <a:latin typeface="Cambria Math" panose="02040503050406030204" pitchFamily="18" charset="0"/>
+                        </a:rPr>
+                        <m:t>𝑟𝑒𝑎𝑟𝑟𝑒𝑠𝑡</m:t>
+                      </m:r>
+                      <m:r>
+                        <a:rPr lang="en-US" sz="2400" b="0" i="1" smtClean="0">
+                          <a:latin typeface="Cambria Math" panose="02040503050406030204" pitchFamily="18" charset="0"/>
+                        </a:rPr>
+                        <m:t>=</m:t>
+                      </m:r>
+                      <m:sSub>
+                        <m:sSubPr>
+                          <m:ctrlPr>
+                            <a:rPr lang="en-US" sz="2400" b="0" i="1" smtClean="0">
+                              <a:latin typeface="Cambria Math" panose="02040503050406030204" pitchFamily="18" charset="0"/>
+                            </a:rPr>
+                          </m:ctrlPr>
+                        </m:sSubPr>
+                        <m:e>
+                          <m:r>
+                            <a:rPr lang="en-US" sz="2400" b="0" i="1" smtClean="0">
+                              <a:latin typeface="Cambria Math" panose="02040503050406030204" pitchFamily="18" charset="0"/>
+                            </a:rPr>
+                            <m:t>𝛽</m:t>
+                          </m:r>
+                        </m:e>
+                        <m:sub>
+                          <m:r>
+                            <a:rPr lang="en-US" sz="2400" b="0" i="1" smtClean="0">
+                              <a:latin typeface="Cambria Math" panose="02040503050406030204" pitchFamily="18" charset="0"/>
+                            </a:rPr>
+                            <m:t>0</m:t>
+                          </m:r>
+                        </m:sub>
+                      </m:sSub>
+                      <m:r>
+                        <a:rPr lang="en-US" sz="2400" b="0" i="1" smtClean="0">
+                          <a:latin typeface="Cambria Math" panose="02040503050406030204" pitchFamily="18" charset="0"/>
+                        </a:rPr>
+                        <m:t>+</m:t>
+                      </m:r>
+                      <m:sSub>
+                        <m:sSubPr>
+                          <m:ctrlPr>
+                            <a:rPr lang="en-US" sz="2400" b="0" i="1" smtClean="0">
+                              <a:latin typeface="Cambria Math" panose="02040503050406030204" pitchFamily="18" charset="0"/>
+                            </a:rPr>
+                          </m:ctrlPr>
+                        </m:sSubPr>
+                        <m:e>
+                          <m:r>
+                            <a:rPr lang="en-US" sz="2400" b="0" i="1" smtClean="0">
+                              <a:latin typeface="Cambria Math" panose="02040503050406030204" pitchFamily="18" charset="0"/>
+                            </a:rPr>
+                            <m:t>𝛽</m:t>
+                          </m:r>
+                        </m:e>
+                        <m:sub>
+                          <m:r>
+                            <a:rPr lang="en-US" sz="2400" b="0" i="1" smtClean="0">
+                              <a:latin typeface="Cambria Math" panose="02040503050406030204" pitchFamily="18" charset="0"/>
+                            </a:rPr>
+                            <m:t>1</m:t>
+                          </m:r>
+                        </m:sub>
+                      </m:sSub>
+                      <m:r>
+                        <a:rPr lang="en-US" sz="2400" b="0" i="1" smtClean="0">
+                          <a:latin typeface="Cambria Math" panose="02040503050406030204" pitchFamily="18" charset="0"/>
+                        </a:rPr>
+                        <m:t>𝑐𝑢𝑟</m:t>
+                      </m:r>
+                      <m:r>
+                        <a:rPr lang="en-US" sz="2400" b="0" i="1" smtClean="0">
+                          <a:latin typeface="Cambria Math" panose="02040503050406030204" pitchFamily="18" charset="0"/>
+                        </a:rPr>
+                        <m:t>.</m:t>
+                      </m:r>
+                      <m:r>
+                        <a:rPr lang="en-US" sz="2400" b="0" i="1" smtClean="0">
+                          <a:latin typeface="Cambria Math" panose="02040503050406030204" pitchFamily="18" charset="0"/>
+                        </a:rPr>
+                        <m:t>𝑐h𝑔</m:t>
+                      </m:r>
+                      <m:r>
+                        <a:rPr lang="en-US" sz="2400" b="0" i="1" smtClean="0">
+                          <a:latin typeface="Cambria Math" panose="02040503050406030204" pitchFamily="18" charset="0"/>
+                        </a:rPr>
+                        <m:t>.</m:t>
+                      </m:r>
+                      <m:r>
+                        <a:rPr lang="en-US" sz="2400" b="0" i="1" smtClean="0">
+                          <a:latin typeface="Cambria Math" panose="02040503050406030204" pitchFamily="18" charset="0"/>
+                        </a:rPr>
+                        <m:t>𝑣𝑖𝑜</m:t>
+                      </m:r>
+                      <m:r>
+                        <a:rPr lang="en-US" sz="2400" b="0" i="1" smtClean="0">
+                          <a:latin typeface="Cambria Math" panose="02040503050406030204" pitchFamily="18" charset="0"/>
+                        </a:rPr>
+                        <m:t>+</m:t>
+                      </m:r>
+                      <m:sSub>
+                        <m:sSubPr>
+                          <m:ctrlPr>
+                            <a:rPr lang="en-US" sz="2400" b="0" i="1" smtClean="0">
+                              <a:latin typeface="Cambria Math" panose="02040503050406030204" pitchFamily="18" charset="0"/>
+                            </a:rPr>
+                          </m:ctrlPr>
+                        </m:sSubPr>
+                        <m:e>
+                          <m:r>
+                            <a:rPr lang="en-US" sz="2400" b="0" i="1" smtClean="0">
+                              <a:latin typeface="Cambria Math" panose="02040503050406030204" pitchFamily="18" charset="0"/>
+                            </a:rPr>
+                            <m:t>𝛽</m:t>
+                          </m:r>
+                        </m:e>
+                        <m:sub>
+                          <m:r>
+                            <a:rPr lang="en-US" sz="2400" b="0" i="1" smtClean="0">
+                              <a:latin typeface="Cambria Math" panose="02040503050406030204" pitchFamily="18" charset="0"/>
+                            </a:rPr>
+                            <m:t>2</m:t>
+                          </m:r>
+                        </m:sub>
+                      </m:sSub>
+                      <m:r>
+                        <a:rPr lang="en-US" sz="2400" b="0" i="1" smtClean="0">
+                          <a:latin typeface="Cambria Math" panose="02040503050406030204" pitchFamily="18" charset="0"/>
+                        </a:rPr>
+                        <m:t>𝑎𝑔𝑒</m:t>
+                      </m:r>
+                    </m:oMath>
+                  </m:oMathPara>
+                </a14:m>
+                <a:br>
+                  <a:rPr lang="en-US" sz="2400" dirty="0"/>
+                </a:br>
+                <a:endParaRPr lang="en-US" sz="2400" dirty="0"/>
+              </a:p>
+              <a:p>
+                <a:pPr>
+                  <a:lnSpc>
+                    <a:spcPct val="115000"/>
+                  </a:lnSpc>
+                  <a:defRPr sz="1800">
+                    <a:solidFill>
+                      <a:srgbClr val="191919"/>
+                    </a:solidFill>
+                    <a:latin typeface="Cambria"/>
+                  </a:defRPr>
+                </a:pPr>
+                <a:r>
+                  <a:rPr lang="en-US" sz="2400" dirty="0"/>
+                  <a:t>• That makes OLS the easiest place to start.</a:t>
+                </a:r>
+              </a:p>
+              <a:p>
+                <a:pPr>
+                  <a:lnSpc>
+                    <a:spcPct val="115000"/>
+                  </a:lnSpc>
+                  <a:defRPr sz="1800">
+                    <a:solidFill>
+                      <a:srgbClr val="191919"/>
+                    </a:solidFill>
+                    <a:latin typeface="Cambria"/>
+                  </a:defRPr>
+                </a:pPr>
+                <a:endParaRPr lang="en-US" sz="2400" dirty="0"/>
+              </a:p>
+              <a:p>
+                <a:pPr>
+                  <a:lnSpc>
+                    <a:spcPct val="115000"/>
+                  </a:lnSpc>
+                  <a:defRPr sz="1800">
+                    <a:solidFill>
+                      <a:srgbClr val="191919"/>
+                    </a:solidFill>
+                    <a:latin typeface="Cambria"/>
+                  </a:defRPr>
+                </a:pPr>
+                <a:r>
+                  <a:rPr lang="en-US" sz="2400" dirty="0"/>
+                  <a:t>• </a:t>
+                </a:r>
+                <a14:m>
+                  <m:oMath xmlns:m="http://schemas.openxmlformats.org/officeDocument/2006/math">
+                    <m:sSub>
+                      <m:sSubPr>
+                        <m:ctrlPr>
+                          <a:rPr lang="en-US" sz="2400" b="0" i="1" smtClean="0">
+                            <a:latin typeface="Cambria Math" panose="02040503050406030204" pitchFamily="18" charset="0"/>
+                          </a:rPr>
+                        </m:ctrlPr>
+                      </m:sSubPr>
+                      <m:e>
+                        <m:r>
+                          <a:rPr lang="en-US" sz="2400" b="0" i="1" smtClean="0">
+                            <a:latin typeface="Cambria Math" panose="02040503050406030204" pitchFamily="18" charset="0"/>
+                          </a:rPr>
+                          <m:t>𝛽</m:t>
+                        </m:r>
+                      </m:e>
+                      <m:sub>
+                        <m:r>
+                          <a:rPr lang="en-US" sz="2400" b="0" i="1" smtClean="0">
+                            <a:latin typeface="Cambria Math" panose="02040503050406030204" pitchFamily="18" charset="0"/>
+                          </a:rPr>
+                          <m:t>1</m:t>
+                        </m:r>
+                      </m:sub>
+                    </m:sSub>
+                    <m:r>
+                      <a:rPr lang="en-US" sz="2400" b="0" i="1" smtClean="0">
+                        <a:latin typeface="Cambria Math" panose="02040503050406030204" pitchFamily="18" charset="0"/>
+                      </a:rPr>
+                      <m:t> </m:t>
+                    </m:r>
+                  </m:oMath>
+                </a14:m>
+                <a:r>
+                  <a:rPr lang="en-US" sz="2400" dirty="0"/>
+                  <a:t>is how much the prediction changes when a case has a violent charge. </a:t>
+                </a:r>
+              </a:p>
+              <a:p>
+                <a:pPr>
+                  <a:lnSpc>
+                    <a:spcPct val="115000"/>
+                  </a:lnSpc>
+                  <a:defRPr sz="1800">
+                    <a:solidFill>
+                      <a:srgbClr val="191919"/>
+                    </a:solidFill>
+                    <a:latin typeface="Cambria"/>
+                  </a:defRPr>
+                </a:pPr>
+                <a:br>
+                  <a:rPr lang="en-US" sz="2400" dirty="0"/>
+                </a:br>
+                <a:endParaRPr sz="2400" dirty="0"/>
+              </a:p>
+            </p:txBody>
+          </p:sp>
+        </mc:Choice>
+        <mc:Fallback>
+          <p:sp>
+            <p:nvSpPr>
+              <p:cNvPr id="3" name="TextBox 2"/>
+              <p:cNvSpPr txBox="1">
+                <a:spLocks noRot="1" noChangeAspect="1" noMove="1" noResize="1" noEditPoints="1" noAdjustHandles="1" noChangeArrowheads="1" noChangeShapeType="1" noTextEdit="1"/>
+              </p:cNvSpPr>
+              <p:nvPr/>
+            </p:nvSpPr>
+            <p:spPr>
+              <a:xfrm>
+                <a:off x="548640" y="1005840"/>
+                <a:ext cx="6400800" cy="4687117"/>
+              </a:xfrm>
+              <a:prstGeom prst="rect">
+                <a:avLst/>
+              </a:prstGeom>
+              <a:blipFill>
+                <a:blip r:embed="rId2"/>
+                <a:stretch>
+                  <a:fillRect l="-2095" t="-1040" r="-3048"/>
+                </a:stretch>
+              </a:blipFill>
+            </p:spPr>
+            <p:txBody>
+              <a:bodyPr/>
+              <a:lstStyle/>
+              <a:p>
+                <a:r>
+                  <a:rPr lang="en-US">
+                    <a:noFill/>
+                  </a:rPr>
+                  <a:t> </a:t>
+                </a:r>
+              </a:p>
+            </p:txBody>
+          </p:sp>
+        </mc:Fallback>
+      </mc:AlternateContent>
       <p:sp>
         <p:nvSpPr>
           <p:cNvPr id="4" name="TextBox 3"/>
@@ -5785,7 +9548,7 @@
         <p:spPr>
           <a:xfrm>
             <a:off x="7315200" y="1463040"/>
-            <a:ext cx="4114800" cy="1828800"/>
+            <a:ext cx="4114800" cy="1723549"/>
           </a:xfrm>
           <a:prstGeom prst="rect">
             <a:avLst/>
@@ -5798,22 +9561,40 @@
           </a:ln>
         </p:spPr>
         <p:txBody>
-          <a:bodyPr wrap="square" lIns="101600" rIns="101600" tIns="76200" bIns="76200">
+          <a:bodyPr wrap="square" lIns="101600" tIns="76200" rIns="101600" bIns="76200">
             <a:spAutoFit/>
           </a:bodyPr>
           <a:lstStyle/>
           <a:p>
             <a:pPr algn="l"/>
             <a:r>
-              <a:rPr sz="1700" b="0">
+              <a:rPr sz="1700" b="0" dirty="0">
                 <a:solidFill>
                   <a:srgbClr val="191919"/>
                 </a:solidFill>
                 <a:latin typeface="Cambria"/>
               </a:rPr>
               <a:t>• Coefficient = conditional change in predicted probability.
-• It is a useful benchmark, but not the only notion of importance.</a:t>
-            </a:r>
+</a:t>
+            </a:r>
+            <a:r>
+              <a:rPr lang="en-US" sz="1700" b="0" dirty="0">
+                <a:solidFill>
+                  <a:srgbClr val="191919"/>
+                </a:solidFill>
+                <a:latin typeface="Cambria"/>
+              </a:rPr>
+              <a:t>• It is still conditional on the other variables, so scaling and correlation matter.</a:t>
+            </a:r>
+          </a:p>
+          <a:p>
+            <a:pPr algn="l"/>
+            <a:endParaRPr lang="en-US" sz="1700" b="0" dirty="0">
+              <a:solidFill>
+                <a:srgbClr val="191919"/>
+              </a:solidFill>
+              <a:latin typeface="Cambria"/>
+            </a:endParaRPr>
           </a:p>
         </p:txBody>
       </p:sp>
@@ -5826,7 +9607,7 @@
 </file>
 
 <file path=ppt/slides/slide4.xml><?xml version="1.0" encoding="utf-8"?>
-<p:sld xmlns:a="http://schemas.openxmlformats.org/drawingml/2006/main" xmlns:p="http://schemas.openxmlformats.org/presentationml/2006/main" xmlns:r="http://schemas.openxmlformats.org/officeDocument/2006/relationships">
+<p:sld xmlns:a="http://schemas.openxmlformats.org/drawingml/2006/main" xmlns:r="http://schemas.openxmlformats.org/officeDocument/2006/relationships" xmlns:p="http://schemas.openxmlformats.org/presentationml/2006/main">
   <p:cSld>
     <p:spTree>
       <p:nvGrpSpPr>
@@ -5834,7 +9615,14 @@
         <p:cNvGrpSpPr/>
         <p:nvPr/>
       </p:nvGrpSpPr>
-      <p:grpSpPr/>
+      <p:grpSpPr>
+        <a:xfrm>
+          <a:off x="0" y="0"/>
+          <a:ext cx="0" cy="0"/>
+          <a:chOff x="0" y="0"/>
+          <a:chExt cx="0" cy="0"/>
+        </a:xfrm>
+      </p:grpSpPr>
       <p:sp>
         <p:nvSpPr>
           <p:cNvPr id="2" name="TextBox 1"/>
@@ -5912,13 +9700,25 @@
                 <a:tableStyleId>{5C22544A-7EE6-4342-B048-85BDC9FD1C3A}</a:tableStyleId>
               </a:tblPr>
               <a:tblGrid>
-                <a:gridCol w="1828800"/>
-                <a:gridCol w="1828800"/>
+                <a:gridCol w="1828800">
+                  <a:extLst>
+                    <a:ext uri="{9D8B030D-6E8A-4147-A177-3AD203B41FA5}">
+                      <a16:colId xmlns:a16="http://schemas.microsoft.com/office/drawing/2014/main" val="20000"/>
+                    </a:ext>
+                  </a:extLst>
+                </a:gridCol>
+                <a:gridCol w="1828800">
+                  <a:extLst>
+                    <a:ext uri="{9D8B030D-6E8A-4147-A177-3AD203B41FA5}">
+                      <a16:colId xmlns:a16="http://schemas.microsoft.com/office/drawing/2014/main" val="20001"/>
+                    </a:ext>
+                  </a:extLst>
+                </a:gridCol>
               </a:tblGrid>
               <a:tr h="396240">
                 <a:tc>
                   <a:txBody>
-                    <a:bodyPr anchor="ctr"/>
+                    <a:bodyPr/>
                     <a:lstStyle/>
                     <a:p>
                       <a:pPr algn="ctr">
@@ -5942,7 +9742,7 @@
                 </a:tc>
                 <a:tc>
                   <a:txBody>
-                    <a:bodyPr anchor="ctr"/>
+                    <a:bodyPr/>
                     <a:lstStyle/>
                     <a:p>
                       <a:pPr algn="ctr">
@@ -5964,11 +9764,16 @@
                     </a:solidFill>
                   </a:tcPr>
                 </a:tc>
+                <a:extLst>
+                  <a:ext uri="{0D108BD9-81ED-4DB2-BD59-A6C34878D82A}">
+                    <a16:rowId xmlns:a16="http://schemas.microsoft.com/office/drawing/2014/main" val="10000"/>
+                  </a:ext>
+                </a:extLst>
               </a:tr>
               <a:tr h="396240">
                 <a:tc>
                   <a:txBody>
-                    <a:bodyPr anchor="ctr"/>
+                    <a:bodyPr/>
                     <a:lstStyle/>
                     <a:p>
                       <a:pPr algn="l">
@@ -5992,7 +9797,7 @@
                 </a:tc>
                 <a:tc>
                   <a:txBody>
-                    <a:bodyPr anchor="ctr"/>
+                    <a:bodyPr/>
                     <a:lstStyle/>
                     <a:p>
                       <a:pPr algn="ctr">
@@ -6014,11 +9819,16 @@
                     </a:solidFill>
                   </a:tcPr>
                 </a:tc>
+                <a:extLst>
+                  <a:ext uri="{0D108BD9-81ED-4DB2-BD59-A6C34878D82A}">
+                    <a16:rowId xmlns:a16="http://schemas.microsoft.com/office/drawing/2014/main" val="10001"/>
+                  </a:ext>
+                </a:extLst>
               </a:tr>
               <a:tr h="396240">
                 <a:tc>
                   <a:txBody>
-                    <a:bodyPr anchor="ctr"/>
+                    <a:bodyPr/>
                     <a:lstStyle/>
                     <a:p>
                       <a:pPr algn="l">
@@ -6042,7 +9852,7 @@
                 </a:tc>
                 <a:tc>
                   <a:txBody>
-                    <a:bodyPr anchor="ctr"/>
+                    <a:bodyPr/>
                     <a:lstStyle/>
                     <a:p>
                       <a:pPr algn="ctr">
@@ -6064,11 +9874,16 @@
                     </a:solidFill>
                   </a:tcPr>
                 </a:tc>
+                <a:extLst>
+                  <a:ext uri="{0D108BD9-81ED-4DB2-BD59-A6C34878D82A}">
+                    <a16:rowId xmlns:a16="http://schemas.microsoft.com/office/drawing/2014/main" val="10002"/>
+                  </a:ext>
+                </a:extLst>
               </a:tr>
               <a:tr h="396240">
                 <a:tc>
                   <a:txBody>
-                    <a:bodyPr anchor="ctr"/>
+                    <a:bodyPr/>
                     <a:lstStyle/>
                     <a:p>
                       <a:pPr algn="l">
@@ -6092,7 +9907,7 @@
                 </a:tc>
                 <a:tc>
                   <a:txBody>
-                    <a:bodyPr anchor="ctr"/>
+                    <a:bodyPr/>
                     <a:lstStyle/>
                     <a:p>
                       <a:pPr algn="ctr">
@@ -6114,11 +9929,16 @@
                     </a:solidFill>
                   </a:tcPr>
                 </a:tc>
+                <a:extLst>
+                  <a:ext uri="{0D108BD9-81ED-4DB2-BD59-A6C34878D82A}">
+                    <a16:rowId xmlns:a16="http://schemas.microsoft.com/office/drawing/2014/main" val="10003"/>
+                  </a:ext>
+                </a:extLst>
               </a:tr>
               <a:tr h="396240">
                 <a:tc>
                   <a:txBody>
-                    <a:bodyPr anchor="ctr"/>
+                    <a:bodyPr/>
                     <a:lstStyle/>
                     <a:p>
                       <a:pPr algn="l">
@@ -6142,7 +9962,7 @@
                 </a:tc>
                 <a:tc>
                   <a:txBody>
-                    <a:bodyPr anchor="ctr"/>
+                    <a:bodyPr/>
                     <a:lstStyle/>
                     <a:p>
                       <a:pPr algn="ctr">
@@ -6164,11 +9984,16 @@
                     </a:solidFill>
                   </a:tcPr>
                 </a:tc>
+                <a:extLst>
+                  <a:ext uri="{0D108BD9-81ED-4DB2-BD59-A6C34878D82A}">
+                    <a16:rowId xmlns:a16="http://schemas.microsoft.com/office/drawing/2014/main" val="10004"/>
+                  </a:ext>
+                </a:extLst>
               </a:tr>
               <a:tr h="396240">
                 <a:tc>
                   <a:txBody>
-                    <a:bodyPr anchor="ctr"/>
+                    <a:bodyPr/>
                     <a:lstStyle/>
                     <a:p>
                       <a:pPr algn="l">
@@ -6192,7 +10017,7 @@
                 </a:tc>
                 <a:tc>
                   <a:txBody>
-                    <a:bodyPr anchor="ctr"/>
+                    <a:bodyPr/>
                     <a:lstStyle/>
                     <a:p>
                       <a:pPr algn="ctr">
@@ -6214,6 +10039,11 @@
                     </a:solidFill>
                   </a:tcPr>
                 </a:tc>
+                <a:extLst>
+                  <a:ext uri="{0D108BD9-81ED-4DB2-BD59-A6C34878D82A}">
+                    <a16:rowId xmlns:a16="http://schemas.microsoft.com/office/drawing/2014/main" val="10005"/>
+                  </a:ext>
+                </a:extLst>
               </a:tr>
             </a:tbl>
           </a:graphicData>
@@ -6241,7 +10071,7 @@
           </a:ln>
         </p:spPr>
         <p:txBody>
-          <a:bodyPr wrap="square" lIns="101600" rIns="101600" tIns="76200" bIns="76200">
+          <a:bodyPr wrap="square" lIns="101600" tIns="76200" rIns="101600" bIns="76200">
             <a:spAutoFit/>
           </a:bodyPr>
           <a:lstStyle/>
@@ -6268,7 +10098,7 @@
 </file>
 
 <file path=ppt/slides/slide5.xml><?xml version="1.0" encoding="utf-8"?>
-<p:sld xmlns:a="http://schemas.openxmlformats.org/drawingml/2006/main" xmlns:p="http://schemas.openxmlformats.org/presentationml/2006/main" xmlns:r="http://schemas.openxmlformats.org/officeDocument/2006/relationships">
+<p:sld xmlns:a="http://schemas.openxmlformats.org/drawingml/2006/main" xmlns:r="http://schemas.openxmlformats.org/officeDocument/2006/relationships" xmlns:p="http://schemas.openxmlformats.org/presentationml/2006/main">
   <p:cSld>
     <p:spTree>
       <p:nvGrpSpPr>
@@ -6276,7 +10106,14 @@
         <p:cNvGrpSpPr/>
         <p:nvPr/>
       </p:nvGrpSpPr>
-      <p:grpSpPr/>
+      <p:grpSpPr>
+        <a:xfrm>
+          <a:off x="0" y="0"/>
+          <a:ext cx="0" cy="0"/>
+          <a:chOff x="0" y="0"/>
+          <a:chExt cx="0" cy="0"/>
+        </a:xfrm>
+      </p:grpSpPr>
       <p:sp>
         <p:nvSpPr>
           <p:cNvPr id="2" name="TextBox 1"/>
@@ -6320,7 +10157,7 @@
         <p:spPr>
           <a:xfrm>
             <a:off x="548640" y="1005840"/>
-            <a:ext cx="6583680" cy="4480560"/>
+            <a:ext cx="6583680" cy="5111849"/>
           </a:xfrm>
           <a:prstGeom prst="rect">
             <a:avLst/>
@@ -6328,7 +10165,7 @@
           <a:noFill/>
         </p:spPr>
         <p:txBody>
-          <a:bodyPr wrap="square" lIns="50800" rIns="50800" tIns="25400" bIns="25400">
+          <a:bodyPr wrap="square" lIns="50800" tIns="25400" rIns="50800" bIns="25400">
             <a:spAutoFit/>
           </a:bodyPr>
           <a:lstStyle/>
@@ -6345,8 +10182,13 @@
               </a:defRPr>
             </a:pPr>
             <a:r>
+              <a:rPr sz="2400" dirty="0"/>
               <a:t>• Trees do not have coefficients.</a:t>
             </a:r>
+            <a:br>
+              <a:rPr lang="en-US" sz="2400" dirty="0"/>
+            </a:br>
+            <a:endParaRPr sz="2400" dirty="0"/>
           </a:p>
           <a:p>
             <a:pPr>
@@ -6361,8 +10203,21 @@
               </a:defRPr>
             </a:pPr>
             <a:r>
-              <a:t>• Instead, importance comes from how much each feature helps split the data.</a:t>
-            </a:r>
+              <a:rPr sz="2400" dirty="0"/>
+              <a:t>•</a:t>
+            </a:r>
+            <a:r>
+              <a:rPr lang="en-US" sz="2400" dirty="0"/>
+              <a:t> </a:t>
+            </a:r>
+            <a:r>
+              <a:rPr sz="2400" dirty="0"/>
+              <a:t>Instead, importance comes from how much each feature helps split the data.</a:t>
+            </a:r>
+            <a:br>
+              <a:rPr lang="en-US" sz="2400" dirty="0"/>
+            </a:br>
+            <a:endParaRPr sz="2400" dirty="0"/>
           </a:p>
           <a:p>
             <a:pPr>
@@ -6377,7 +10232,22 @@
               </a:defRPr>
             </a:pPr>
             <a:r>
-              <a:t>• This gives a global view of how the tree used the features, not a person-by-person explanation.</a:t>
+              <a:rPr sz="2400" dirty="0"/>
+              <a:t>•</a:t>
+            </a:r>
+            <a:r>
+              <a:rPr lang="en-US" sz="2400" dirty="0"/>
+              <a:t> Intuitive notion: How often is a feature used to make a split</a:t>
+            </a:r>
+            <a:br>
+              <a:rPr lang="en-US" sz="2400" dirty="0"/>
+            </a:br>
+            <a:br>
+              <a:rPr lang="en-US" sz="2400" dirty="0"/>
+            </a:br>
+            <a:r>
+              <a:rPr lang="en-US" sz="2400" dirty="0"/>
+              <a:t>• Impurity-based: In the binary case, how much does a feature reduce impurity across all of the times it was used for a split.</a:t>
             </a:r>
           </a:p>
           <a:p>
@@ -6392,9 +10262,7 @@
                 <a:latin typeface="Cambria"/>
               </a:defRPr>
             </a:pPr>
-            <a:r>
-              <a:t>• It is also model-specific: change the tree model, and the ranking can change.</a:t>
-            </a:r>
+            <a:endParaRPr sz="2400" dirty="0"/>
           </a:p>
         </p:txBody>
       </p:sp>
@@ -6407,7 +10275,7 @@
         <p:spPr>
           <a:xfrm>
             <a:off x="7406640" y="1463040"/>
-            <a:ext cx="4023360" cy="1737360"/>
+            <a:ext cx="4023360" cy="1200329"/>
           </a:xfrm>
           <a:prstGeom prst="rect">
             <a:avLst/>
@@ -6420,22 +10288,37 @@
           </a:ln>
         </p:spPr>
         <p:txBody>
-          <a:bodyPr wrap="square" lIns="101600" rIns="101600" tIns="76200" bIns="76200">
+          <a:bodyPr wrap="square" lIns="101600" tIns="76200" rIns="101600" bIns="76200">
             <a:spAutoFit/>
           </a:bodyPr>
           <a:lstStyle/>
           <a:p>
             <a:pPr algn="l"/>
             <a:r>
-              <a:rPr sz="1700" b="0">
+              <a:rPr sz="1700" b="0" dirty="0">
                 <a:solidFill>
                   <a:srgbClr val="191919"/>
                 </a:solidFill>
                 <a:latin typeface="Cambria"/>
               </a:rPr>
               <a:t>• Tree importance is about how much a feature helps the forest split the data.
-• It is not the same thing as a causal effect.</a:t>
-            </a:r>
+• </a:t>
+            </a:r>
+            <a:r>
+              <a:rPr lang="en-US" sz="1700" b="0" dirty="0">
+                <a:solidFill>
+                  <a:srgbClr val="191919"/>
+                </a:solidFill>
+                <a:latin typeface="Cambria"/>
+              </a:rPr>
+              <a:t>Caveat: Two highly correlated features share splits in messy ways </a:t>
+            </a:r>
+            <a:endParaRPr sz="1700" b="0" dirty="0">
+              <a:solidFill>
+                <a:srgbClr val="191919"/>
+              </a:solidFill>
+              <a:latin typeface="Cambria"/>
+            </a:endParaRPr>
           </a:p>
         </p:txBody>
       </p:sp>
@@ -6448,7 +10331,7 @@
 </file>
 
 <file path=ppt/slides/slide6.xml><?xml version="1.0" encoding="utf-8"?>
-<p:sld xmlns:a="http://schemas.openxmlformats.org/drawingml/2006/main" xmlns:p="http://schemas.openxmlformats.org/presentationml/2006/main" xmlns:r="http://schemas.openxmlformats.org/officeDocument/2006/relationships">
+<p:sld xmlns:a="http://schemas.openxmlformats.org/drawingml/2006/main" xmlns:r="http://schemas.openxmlformats.org/officeDocument/2006/relationships" xmlns:p="http://schemas.openxmlformats.org/presentationml/2006/main">
   <p:cSld>
     <p:spTree>
       <p:nvGrpSpPr>
@@ -6456,7 +10339,14 @@
         <p:cNvGrpSpPr/>
         <p:nvPr/>
       </p:nvGrpSpPr>
-      <p:grpSpPr/>
+      <p:grpSpPr>
+        <a:xfrm>
+          <a:off x="0" y="0"/>
+          <a:ext cx="0" cy="0"/>
+          <a:chOff x="0" y="0"/>
+          <a:chExt cx="0" cy="0"/>
+        </a:xfrm>
+      </p:grpSpPr>
       <p:sp>
         <p:nvSpPr>
           <p:cNvPr id="2" name="TextBox 1"/>
@@ -6534,13 +10424,25 @@
                 <a:tableStyleId>{5C22544A-7EE6-4342-B048-85BDC9FD1C3A}</a:tableStyleId>
               </a:tblPr>
               <a:tblGrid>
-                <a:gridCol w="1828800"/>
-                <a:gridCol w="1828800"/>
+                <a:gridCol w="1828800">
+                  <a:extLst>
+                    <a:ext uri="{9D8B030D-6E8A-4147-A177-3AD203B41FA5}">
+                      <a16:colId xmlns:a16="http://schemas.microsoft.com/office/drawing/2014/main" val="20000"/>
+                    </a:ext>
+                  </a:extLst>
+                </a:gridCol>
+                <a:gridCol w="1828800">
+                  <a:extLst>
+                    <a:ext uri="{9D8B030D-6E8A-4147-A177-3AD203B41FA5}">
+                      <a16:colId xmlns:a16="http://schemas.microsoft.com/office/drawing/2014/main" val="20001"/>
+                    </a:ext>
+                  </a:extLst>
+                </a:gridCol>
               </a:tblGrid>
               <a:tr h="396240">
                 <a:tc>
                   <a:txBody>
-                    <a:bodyPr anchor="ctr"/>
+                    <a:bodyPr/>
                     <a:lstStyle/>
                     <a:p>
                       <a:pPr algn="ctr">
@@ -6564,7 +10466,7 @@
                 </a:tc>
                 <a:tc>
                   <a:txBody>
-                    <a:bodyPr anchor="ctr"/>
+                    <a:bodyPr/>
                     <a:lstStyle/>
                     <a:p>
                       <a:pPr algn="ctr">
@@ -6586,11 +10488,16 @@
                     </a:solidFill>
                   </a:tcPr>
                 </a:tc>
+                <a:extLst>
+                  <a:ext uri="{0D108BD9-81ED-4DB2-BD59-A6C34878D82A}">
+                    <a16:rowId xmlns:a16="http://schemas.microsoft.com/office/drawing/2014/main" val="10000"/>
+                  </a:ext>
+                </a:extLst>
               </a:tr>
               <a:tr h="396240">
                 <a:tc>
                   <a:txBody>
-                    <a:bodyPr anchor="ctr"/>
+                    <a:bodyPr/>
                     <a:lstStyle/>
                     <a:p>
                       <a:pPr algn="l">
@@ -6614,7 +10521,7 @@
                 </a:tc>
                 <a:tc>
                   <a:txBody>
-                    <a:bodyPr anchor="ctr"/>
+                    <a:bodyPr/>
                     <a:lstStyle/>
                     <a:p>
                       <a:pPr algn="ctr">
@@ -6636,11 +10543,16 @@
                     </a:solidFill>
                   </a:tcPr>
                 </a:tc>
+                <a:extLst>
+                  <a:ext uri="{0D108BD9-81ED-4DB2-BD59-A6C34878D82A}">
+                    <a16:rowId xmlns:a16="http://schemas.microsoft.com/office/drawing/2014/main" val="10001"/>
+                  </a:ext>
+                </a:extLst>
               </a:tr>
               <a:tr h="396240">
                 <a:tc>
                   <a:txBody>
-                    <a:bodyPr anchor="ctr"/>
+                    <a:bodyPr/>
                     <a:lstStyle/>
                     <a:p>
                       <a:pPr algn="l">
@@ -6664,7 +10576,7 @@
                 </a:tc>
                 <a:tc>
                   <a:txBody>
-                    <a:bodyPr anchor="ctr"/>
+                    <a:bodyPr/>
                     <a:lstStyle/>
                     <a:p>
                       <a:pPr algn="ctr">
@@ -6686,11 +10598,16 @@
                     </a:solidFill>
                   </a:tcPr>
                 </a:tc>
+                <a:extLst>
+                  <a:ext uri="{0D108BD9-81ED-4DB2-BD59-A6C34878D82A}">
+                    <a16:rowId xmlns:a16="http://schemas.microsoft.com/office/drawing/2014/main" val="10002"/>
+                  </a:ext>
+                </a:extLst>
               </a:tr>
               <a:tr h="396240">
                 <a:tc>
                   <a:txBody>
-                    <a:bodyPr anchor="ctr"/>
+                    <a:bodyPr/>
                     <a:lstStyle/>
                     <a:p>
                       <a:pPr algn="l">
@@ -6714,7 +10631,7 @@
                 </a:tc>
                 <a:tc>
                   <a:txBody>
-                    <a:bodyPr anchor="ctr"/>
+                    <a:bodyPr/>
                     <a:lstStyle/>
                     <a:p>
                       <a:pPr algn="ctr">
@@ -6736,11 +10653,16 @@
                     </a:solidFill>
                   </a:tcPr>
                 </a:tc>
+                <a:extLst>
+                  <a:ext uri="{0D108BD9-81ED-4DB2-BD59-A6C34878D82A}">
+                    <a16:rowId xmlns:a16="http://schemas.microsoft.com/office/drawing/2014/main" val="10003"/>
+                  </a:ext>
+                </a:extLst>
               </a:tr>
               <a:tr h="396240">
                 <a:tc>
                   <a:txBody>
-                    <a:bodyPr anchor="ctr"/>
+                    <a:bodyPr/>
                     <a:lstStyle/>
                     <a:p>
                       <a:pPr algn="l">
@@ -6764,7 +10686,7 @@
                 </a:tc>
                 <a:tc>
                   <a:txBody>
-                    <a:bodyPr anchor="ctr"/>
+                    <a:bodyPr/>
                     <a:lstStyle/>
                     <a:p>
                       <a:pPr algn="ctr">
@@ -6786,11 +10708,16 @@
                     </a:solidFill>
                   </a:tcPr>
                 </a:tc>
+                <a:extLst>
+                  <a:ext uri="{0D108BD9-81ED-4DB2-BD59-A6C34878D82A}">
+                    <a16:rowId xmlns:a16="http://schemas.microsoft.com/office/drawing/2014/main" val="10004"/>
+                  </a:ext>
+                </a:extLst>
               </a:tr>
               <a:tr h="396240">
                 <a:tc>
                   <a:txBody>
-                    <a:bodyPr anchor="ctr"/>
+                    <a:bodyPr/>
                     <a:lstStyle/>
                     <a:p>
                       <a:pPr algn="l">
@@ -6814,7 +10741,7 @@
                 </a:tc>
                 <a:tc>
                   <a:txBody>
-                    <a:bodyPr anchor="ctr"/>
+                    <a:bodyPr/>
                     <a:lstStyle/>
                     <a:p>
                       <a:pPr algn="ctr">
@@ -6836,6 +10763,11 @@
                     </a:solidFill>
                   </a:tcPr>
                 </a:tc>
+                <a:extLst>
+                  <a:ext uri="{0D108BD9-81ED-4DB2-BD59-A6C34878D82A}">
+                    <a16:rowId xmlns:a16="http://schemas.microsoft.com/office/drawing/2014/main" val="10005"/>
+                  </a:ext>
+                </a:extLst>
               </a:tr>
             </a:tbl>
           </a:graphicData>
@@ -6863,7 +10795,7 @@
           </a:ln>
         </p:spPr>
         <p:txBody>
-          <a:bodyPr wrap="square" lIns="101600" rIns="101600" tIns="76200" bIns="76200">
+          <a:bodyPr wrap="square" lIns="101600" tIns="76200" rIns="101600" bIns="76200">
             <a:spAutoFit/>
           </a:bodyPr>
           <a:lstStyle/>
@@ -6890,7 +10822,7 @@
 </file>
 
 <file path=ppt/slides/slide7.xml><?xml version="1.0" encoding="utf-8"?>
-<p:sld xmlns:a="http://schemas.openxmlformats.org/drawingml/2006/main" xmlns:p="http://schemas.openxmlformats.org/presentationml/2006/main" xmlns:r="http://schemas.openxmlformats.org/officeDocument/2006/relationships">
+<p:sld xmlns:a="http://schemas.openxmlformats.org/drawingml/2006/main" xmlns:r="http://schemas.openxmlformats.org/officeDocument/2006/relationships" xmlns:p="http://schemas.openxmlformats.org/presentationml/2006/main">
   <p:cSld>
     <p:spTree>
       <p:nvGrpSpPr>
@@ -6898,7 +10830,14 @@
         <p:cNvGrpSpPr/>
         <p:nvPr/>
       </p:nvGrpSpPr>
-      <p:grpSpPr/>
+      <p:grpSpPr>
+        <a:xfrm>
+          <a:off x="0" y="0"/>
+          <a:ext cx="0" cy="0"/>
+          <a:chOff x="0" y="0"/>
+          <a:chExt cx="0" cy="0"/>
+        </a:xfrm>
+      </p:grpSpPr>
       <p:sp>
         <p:nvSpPr>
           <p:cNvPr id="2" name="TextBox 1"/>
@@ -6942,7 +10881,7 @@
         <p:spPr>
           <a:xfrm>
             <a:off x="548640" y="1005840"/>
-            <a:ext cx="6583680" cy="4389120"/>
+            <a:ext cx="6583680" cy="4262385"/>
           </a:xfrm>
           <a:prstGeom prst="rect">
             <a:avLst/>
@@ -6950,7 +10889,7 @@
           <a:noFill/>
         </p:spPr>
         <p:txBody>
-          <a:bodyPr wrap="square" lIns="50800" rIns="50800" tIns="25400" bIns="25400">
+          <a:bodyPr wrap="square" lIns="50800" tIns="25400" rIns="50800" bIns="25400">
             <a:spAutoFit/>
           </a:bodyPr>
           <a:lstStyle/>
@@ -6967,8 +10906,13 @@
               </a:defRPr>
             </a:pPr>
             <a:r>
+              <a:rPr sz="2400" dirty="0"/>
               <a:t>• SHAP explains one prediction at a time.</a:t>
             </a:r>
+            <a:br>
+              <a:rPr lang="en-US" sz="2400" dirty="0"/>
+            </a:br>
+            <a:endParaRPr sz="2400" dirty="0"/>
           </a:p>
           <a:p>
             <a:pPr>
@@ -6983,8 +10927,13 @@
               </a:defRPr>
             </a:pPr>
             <a:r>
+              <a:rPr sz="2400" dirty="0"/>
               <a:t>• Start with a baseline prediction, then add feature contributions.</a:t>
             </a:r>
+            <a:br>
+              <a:rPr lang="en-US" sz="2400" dirty="0"/>
+            </a:br>
+            <a:endParaRPr sz="2400" dirty="0"/>
           </a:p>
           <a:p>
             <a:pPr>
@@ -6999,8 +10948,13 @@
               </a:defRPr>
             </a:pPr>
             <a:r>
+              <a:rPr sz="2400" dirty="0"/>
               <a:t>• That helps you ask why one person got a particular score.</a:t>
             </a:r>
+            <a:br>
+              <a:rPr lang="en-US" sz="2400" dirty="0"/>
+            </a:br>
+            <a:endParaRPr sz="2400" dirty="0"/>
           </a:p>
           <a:p>
             <a:pPr>
@@ -7015,6 +10969,7 @@
               </a:defRPr>
             </a:pPr>
             <a:r>
+              <a:rPr sz="2400" dirty="0"/>
               <a:t>• Averaging SHAP values gives a global picture, too.</a:t>
             </a:r>
           </a:p>
@@ -7042,7 +10997,7 @@
           </a:ln>
         </p:spPr>
         <p:txBody>
-          <a:bodyPr wrap="square" lIns="101600" rIns="101600" tIns="76200" bIns="76200">
+          <a:bodyPr wrap="square" lIns="101600" tIns="76200" rIns="101600" bIns="76200">
             <a:spAutoFit/>
           </a:bodyPr>
           <a:lstStyle/>
@@ -7070,7 +11025,7 @@
 </file>
 
 <file path=ppt/slides/slide8.xml><?xml version="1.0" encoding="utf-8"?>
-<p:sld xmlns:a="http://schemas.openxmlformats.org/drawingml/2006/main" xmlns:p="http://schemas.openxmlformats.org/presentationml/2006/main" xmlns:r="http://schemas.openxmlformats.org/officeDocument/2006/relationships">
+<p:sld xmlns:a="http://schemas.openxmlformats.org/drawingml/2006/main" xmlns:r="http://schemas.openxmlformats.org/officeDocument/2006/relationships" xmlns:p="http://schemas.openxmlformats.org/presentationml/2006/main">
   <p:cSld>
     <p:spTree>
       <p:nvGrpSpPr>
@@ -7078,7 +11033,14 @@
         <p:cNvGrpSpPr/>
         <p:nvPr/>
       </p:nvGrpSpPr>
-      <p:grpSpPr/>
+      <p:grpSpPr>
+        <a:xfrm>
+          <a:off x="0" y="0"/>
+          <a:ext cx="0" cy="0"/>
+          <a:chOff x="0" y="0"/>
+          <a:chExt cx="0" cy="0"/>
+        </a:xfrm>
+      </p:grpSpPr>
       <p:sp>
         <p:nvSpPr>
           <p:cNvPr id="2" name="TextBox 1"/>
@@ -7156,13 +11118,25 @@
                 <a:tableStyleId>{5C22544A-7EE6-4342-B048-85BDC9FD1C3A}</a:tableStyleId>
               </a:tblPr>
               <a:tblGrid>
-                <a:gridCol w="1828800"/>
-                <a:gridCol w="1828800"/>
+                <a:gridCol w="1828800">
+                  <a:extLst>
+                    <a:ext uri="{9D8B030D-6E8A-4147-A177-3AD203B41FA5}">
+                      <a16:colId xmlns:a16="http://schemas.microsoft.com/office/drawing/2014/main" val="20000"/>
+                    </a:ext>
+                  </a:extLst>
+                </a:gridCol>
+                <a:gridCol w="1828800">
+                  <a:extLst>
+                    <a:ext uri="{9D8B030D-6E8A-4147-A177-3AD203B41FA5}">
+                      <a16:colId xmlns:a16="http://schemas.microsoft.com/office/drawing/2014/main" val="20001"/>
+                    </a:ext>
+                  </a:extLst>
+                </a:gridCol>
               </a:tblGrid>
               <a:tr h="396240">
                 <a:tc>
                   <a:txBody>
-                    <a:bodyPr anchor="ctr"/>
+                    <a:bodyPr/>
                     <a:lstStyle/>
                     <a:p>
                       <a:pPr algn="ctr">
@@ -7186,7 +11160,7 @@
                 </a:tc>
                 <a:tc>
                   <a:txBody>
-                    <a:bodyPr anchor="ctr"/>
+                    <a:bodyPr/>
                     <a:lstStyle/>
                     <a:p>
                       <a:pPr algn="ctr">
@@ -7208,11 +11182,16 @@
                     </a:solidFill>
                   </a:tcPr>
                 </a:tc>
+                <a:extLst>
+                  <a:ext uri="{0D108BD9-81ED-4DB2-BD59-A6C34878D82A}">
+                    <a16:rowId xmlns:a16="http://schemas.microsoft.com/office/drawing/2014/main" val="10000"/>
+                  </a:ext>
+                </a:extLst>
               </a:tr>
               <a:tr h="396240">
                 <a:tc>
                   <a:txBody>
-                    <a:bodyPr anchor="ctr"/>
+                    <a:bodyPr/>
                     <a:lstStyle/>
                     <a:p>
                       <a:pPr algn="l">
@@ -7236,7 +11215,7 @@
                 </a:tc>
                 <a:tc>
                   <a:txBody>
-                    <a:bodyPr anchor="ctr"/>
+                    <a:bodyPr/>
                     <a:lstStyle/>
                     <a:p>
                       <a:pPr algn="ctr">
@@ -7258,11 +11237,16 @@
                     </a:solidFill>
                   </a:tcPr>
                 </a:tc>
+                <a:extLst>
+                  <a:ext uri="{0D108BD9-81ED-4DB2-BD59-A6C34878D82A}">
+                    <a16:rowId xmlns:a16="http://schemas.microsoft.com/office/drawing/2014/main" val="10001"/>
+                  </a:ext>
+                </a:extLst>
               </a:tr>
               <a:tr h="396240">
                 <a:tc>
                   <a:txBody>
-                    <a:bodyPr anchor="ctr"/>
+                    <a:bodyPr/>
                     <a:lstStyle/>
                     <a:p>
                       <a:pPr algn="l">
@@ -7286,7 +11270,7 @@
                 </a:tc>
                 <a:tc>
                   <a:txBody>
-                    <a:bodyPr anchor="ctr"/>
+                    <a:bodyPr/>
                     <a:lstStyle/>
                     <a:p>
                       <a:pPr algn="ctr">
@@ -7308,11 +11292,16 @@
                     </a:solidFill>
                   </a:tcPr>
                 </a:tc>
+                <a:extLst>
+                  <a:ext uri="{0D108BD9-81ED-4DB2-BD59-A6C34878D82A}">
+                    <a16:rowId xmlns:a16="http://schemas.microsoft.com/office/drawing/2014/main" val="10002"/>
+                  </a:ext>
+                </a:extLst>
               </a:tr>
               <a:tr h="396240">
                 <a:tc>
                   <a:txBody>
-                    <a:bodyPr anchor="ctr"/>
+                    <a:bodyPr/>
                     <a:lstStyle/>
                     <a:p>
                       <a:pPr algn="l">
@@ -7336,7 +11325,7 @@
                 </a:tc>
                 <a:tc>
                   <a:txBody>
-                    <a:bodyPr anchor="ctr"/>
+                    <a:bodyPr/>
                     <a:lstStyle/>
                     <a:p>
                       <a:pPr algn="ctr">
@@ -7358,11 +11347,16 @@
                     </a:solidFill>
                   </a:tcPr>
                 </a:tc>
+                <a:extLst>
+                  <a:ext uri="{0D108BD9-81ED-4DB2-BD59-A6C34878D82A}">
+                    <a16:rowId xmlns:a16="http://schemas.microsoft.com/office/drawing/2014/main" val="10003"/>
+                  </a:ext>
+                </a:extLst>
               </a:tr>
               <a:tr h="396240">
                 <a:tc>
                   <a:txBody>
-                    <a:bodyPr anchor="ctr"/>
+                    <a:bodyPr/>
                     <a:lstStyle/>
                     <a:p>
                       <a:pPr algn="l">
@@ -7386,7 +11380,7 @@
                 </a:tc>
                 <a:tc>
                   <a:txBody>
-                    <a:bodyPr anchor="ctr"/>
+                    <a:bodyPr/>
                     <a:lstStyle/>
                     <a:p>
                       <a:pPr algn="ctr">
@@ -7408,11 +11402,16 @@
                     </a:solidFill>
                   </a:tcPr>
                 </a:tc>
+                <a:extLst>
+                  <a:ext uri="{0D108BD9-81ED-4DB2-BD59-A6C34878D82A}">
+                    <a16:rowId xmlns:a16="http://schemas.microsoft.com/office/drawing/2014/main" val="10004"/>
+                  </a:ext>
+                </a:extLst>
               </a:tr>
               <a:tr h="396240">
                 <a:tc>
                   <a:txBody>
-                    <a:bodyPr anchor="ctr"/>
+                    <a:bodyPr/>
                     <a:lstStyle/>
                     <a:p>
                       <a:pPr algn="l">
@@ -7436,7 +11435,7 @@
                 </a:tc>
                 <a:tc>
                   <a:txBody>
-                    <a:bodyPr anchor="ctr"/>
+                    <a:bodyPr/>
                     <a:lstStyle/>
                     <a:p>
                       <a:pPr algn="ctr">
@@ -7458,6 +11457,11 @@
                     </a:solidFill>
                   </a:tcPr>
                 </a:tc>
+                <a:extLst>
+                  <a:ext uri="{0D108BD9-81ED-4DB2-BD59-A6C34878D82A}">
+                    <a16:rowId xmlns:a16="http://schemas.microsoft.com/office/drawing/2014/main" val="10005"/>
+                  </a:ext>
+                </a:extLst>
               </a:tr>
             </a:tbl>
           </a:graphicData>
@@ -7485,7 +11489,7 @@
           </a:ln>
         </p:spPr>
         <p:txBody>
-          <a:bodyPr wrap="square" lIns="101600" rIns="101600" tIns="76200" bIns="76200">
+          <a:bodyPr wrap="square" lIns="101600" tIns="76200" rIns="101600" bIns="76200">
             <a:spAutoFit/>
           </a:bodyPr>
           <a:lstStyle/>
@@ -7512,7 +11516,7 @@
 </file>
 
 <file path=ppt/slides/slide9.xml><?xml version="1.0" encoding="utf-8"?>
-<p:sld xmlns:a="http://schemas.openxmlformats.org/drawingml/2006/main" xmlns:p="http://schemas.openxmlformats.org/presentationml/2006/main" xmlns:r="http://schemas.openxmlformats.org/officeDocument/2006/relationships">
+<p:sld xmlns:a="http://schemas.openxmlformats.org/drawingml/2006/main" xmlns:r="http://schemas.openxmlformats.org/officeDocument/2006/relationships" xmlns:p="http://schemas.openxmlformats.org/presentationml/2006/main">
   <p:cSld>
     <p:spTree>
       <p:nvGrpSpPr>
@@ -7520,7 +11524,14 @@
         <p:cNvGrpSpPr/>
         <p:nvPr/>
       </p:nvGrpSpPr>
-      <p:grpSpPr/>
+      <p:grpSpPr>
+        <a:xfrm>
+          <a:off x="0" y="0"/>
+          <a:ext cx="0" cy="0"/>
+          <a:chOff x="0" y="0"/>
+          <a:chExt cx="0" cy="0"/>
+        </a:xfrm>
+      </p:grpSpPr>
       <p:sp>
         <p:nvSpPr>
           <p:cNvPr id="2" name="TextBox 1"/>
@@ -7601,7 +11612,7 @@
           </a:ln>
         </p:spPr>
         <p:txBody>
-          <a:bodyPr wrap="square" lIns="101600" rIns="101600" tIns="76200" bIns="76200">
+          <a:bodyPr wrap="square" lIns="101600" tIns="76200" rIns="101600" bIns="76200">
             <a:spAutoFit/>
           </a:bodyPr>
           <a:lstStyle/>
@@ -7945,4 +11956,299 @@
   </a:objectDefaults>
   <a:extraClrSchemeLst/>
 </a:theme>
+</file>
+
+<file path=ppt/theme/theme2.xml><?xml version="1.0" encoding="utf-8"?>
+<a:theme xmlns:a="http://schemas.openxmlformats.org/drawingml/2006/main" name="1_Office Theme">
+  <a:themeElements>
+    <a:clrScheme name="Office">
+      <a:dk1>
+        <a:sysClr val="windowText" lastClr="000000"/>
+      </a:dk1>
+      <a:lt1>
+        <a:sysClr val="window" lastClr="FFFFFF"/>
+      </a:lt1>
+      <a:dk2>
+        <a:srgbClr val="44546A"/>
+      </a:dk2>
+      <a:lt2>
+        <a:srgbClr val="E7E6E6"/>
+      </a:lt2>
+      <a:accent1>
+        <a:srgbClr val="4472C4"/>
+      </a:accent1>
+      <a:accent2>
+        <a:srgbClr val="ED7D31"/>
+      </a:accent2>
+      <a:accent3>
+        <a:srgbClr val="A5A5A5"/>
+      </a:accent3>
+      <a:accent4>
+        <a:srgbClr val="FFC000"/>
+      </a:accent4>
+      <a:accent5>
+        <a:srgbClr val="5B9BD5"/>
+      </a:accent5>
+      <a:accent6>
+        <a:srgbClr val="70AD47"/>
+      </a:accent6>
+      <a:hlink>
+        <a:srgbClr val="0563C1"/>
+      </a:hlink>
+      <a:folHlink>
+        <a:srgbClr val="954F72"/>
+      </a:folHlink>
+    </a:clrScheme>
+    <a:fontScheme name="Office">
+      <a:majorFont>
+        <a:latin typeface="Calibri Light" panose="020F0302020204030204"/>
+        <a:ea typeface=""/>
+        <a:cs typeface=""/>
+        <a:font script="Jpan" typeface="游ゴシック Light"/>
+        <a:font script="Hang" typeface="맑은 고딕"/>
+        <a:font script="Hans" typeface="等线 Light"/>
+        <a:font script="Hant" typeface="新細明體"/>
+        <a:font script="Arab" typeface="Times New Roman"/>
+        <a:font script="Hebr" typeface="Times New Roman"/>
+        <a:font script="Thai" typeface="Angsana New"/>
+        <a:font script="Ethi" typeface="Nyala"/>
+        <a:font script="Beng" typeface="Vrinda"/>
+        <a:font script="Gujr" typeface="Shruti"/>
+        <a:font script="Khmr" typeface="MoolBoran"/>
+        <a:font script="Knda" typeface="Tunga"/>
+        <a:font script="Guru" typeface="Raavi"/>
+        <a:font script="Cans" typeface="Euphemia"/>
+        <a:font script="Cher" typeface="Plantagenet Cherokee"/>
+        <a:font script="Yiii" typeface="Microsoft Yi Baiti"/>
+        <a:font script="Tibt" typeface="Microsoft Himalaya"/>
+        <a:font script="Thaa" typeface="MV Boli"/>
+        <a:font script="Deva" typeface="Mangal"/>
+        <a:font script="Telu" typeface="Gautami"/>
+        <a:font script="Taml" typeface="Latha"/>
+        <a:font script="Syrc" typeface="Estrangelo Edessa"/>
+        <a:font script="Orya" typeface="Kalinga"/>
+        <a:font script="Mlym" typeface="Kartika"/>
+        <a:font script="Laoo" typeface="DokChampa"/>
+        <a:font script="Sinh" typeface="Iskoola Pota"/>
+        <a:font script="Mong" typeface="Mongolian Baiti"/>
+        <a:font script="Viet" typeface="Times New Roman"/>
+        <a:font script="Uigh" typeface="Microsoft Uighur"/>
+        <a:font script="Geor" typeface="Sylfaen"/>
+        <a:font script="Armn" typeface="Arial"/>
+        <a:font script="Bugi" typeface="Leelawadee UI"/>
+        <a:font script="Bopo" typeface="Microsoft JhengHei"/>
+        <a:font script="Java" typeface="Javanese Text"/>
+        <a:font script="Lisu" typeface="Segoe UI"/>
+        <a:font script="Mymr" typeface="Myanmar Text"/>
+        <a:font script="Nkoo" typeface="Ebrima"/>
+        <a:font script="Olck" typeface="Nirmala UI"/>
+        <a:font script="Osma" typeface="Ebrima"/>
+        <a:font script="Phag" typeface="Phagspa"/>
+        <a:font script="Syrn" typeface="Estrangelo Edessa"/>
+        <a:font script="Syrj" typeface="Estrangelo Edessa"/>
+        <a:font script="Syre" typeface="Estrangelo Edessa"/>
+        <a:font script="Sora" typeface="Nirmala UI"/>
+        <a:font script="Tale" typeface="Microsoft Tai Le"/>
+        <a:font script="Talu" typeface="Microsoft New Tai Lue"/>
+        <a:font script="Tfng" typeface="Ebrima"/>
+      </a:majorFont>
+      <a:minorFont>
+        <a:latin typeface="Calibri" panose="020F0502020204030204"/>
+        <a:ea typeface=""/>
+        <a:cs typeface=""/>
+        <a:font script="Jpan" typeface="游ゴシック"/>
+        <a:font script="Hang" typeface="맑은 고딕"/>
+        <a:font script="Hans" typeface="等线"/>
+        <a:font script="Hant" typeface="新細明體"/>
+        <a:font script="Arab" typeface="Arial"/>
+        <a:font script="Hebr" typeface="Arial"/>
+        <a:font script="Thai" typeface="Cordia New"/>
+        <a:font script="Ethi" typeface="Nyala"/>
+        <a:font script="Beng" typeface="Vrinda"/>
+        <a:font script="Gujr" typeface="Shruti"/>
+        <a:font script="Khmr" typeface="DaunPenh"/>
+        <a:font script="Knda" typeface="Tunga"/>
+        <a:font script="Guru" typeface="Raavi"/>
+        <a:font script="Cans" typeface="Euphemia"/>
+        <a:font script="Cher" typeface="Plantagenet Cherokee"/>
+        <a:font script="Yiii" typeface="Microsoft Yi Baiti"/>
+        <a:font script="Tibt" typeface="Microsoft Himalaya"/>
+        <a:font script="Thaa" typeface="MV Boli"/>
+        <a:font script="Deva" typeface="Mangal"/>
+        <a:font script="Telu" typeface="Gautami"/>
+        <a:font script="Taml" typeface="Latha"/>
+        <a:font script="Syrc" typeface="Estrangelo Edessa"/>
+        <a:font script="Orya" typeface="Kalinga"/>
+        <a:font script="Mlym" typeface="Kartika"/>
+        <a:font script="Laoo" typeface="DokChampa"/>
+        <a:font script="Sinh" typeface="Iskoola Pota"/>
+        <a:font script="Mong" typeface="Mongolian Baiti"/>
+        <a:font script="Viet" typeface="Arial"/>
+        <a:font script="Uigh" typeface="Microsoft Uighur"/>
+        <a:font script="Geor" typeface="Sylfaen"/>
+        <a:font script="Armn" typeface="Arial"/>
+        <a:font script="Bugi" typeface="Leelawadee UI"/>
+        <a:font script="Bopo" typeface="Microsoft JhengHei"/>
+        <a:font script="Java" typeface="Javanese Text"/>
+        <a:font script="Lisu" typeface="Segoe UI"/>
+        <a:font script="Mymr" typeface="Myanmar Text"/>
+        <a:font script="Nkoo" typeface="Ebrima"/>
+        <a:font script="Olck" typeface="Nirmala UI"/>
+        <a:font script="Osma" typeface="Ebrima"/>
+        <a:font script="Phag" typeface="Phagspa"/>
+        <a:font script="Syrn" typeface="Estrangelo Edessa"/>
+        <a:font script="Syrj" typeface="Estrangelo Edessa"/>
+        <a:font script="Syre" typeface="Estrangelo Edessa"/>
+        <a:font script="Sora" typeface="Nirmala UI"/>
+        <a:font script="Tale" typeface="Microsoft Tai Le"/>
+        <a:font script="Talu" typeface="Microsoft New Tai Lue"/>
+        <a:font script="Tfng" typeface="Ebrima"/>
+      </a:minorFont>
+    </a:fontScheme>
+    <a:fmtScheme name="Office">
+      <a:fillStyleLst>
+        <a:solidFill>
+          <a:schemeClr val="phClr"/>
+        </a:solidFill>
+        <a:gradFill rotWithShape="1">
+          <a:gsLst>
+            <a:gs pos="0">
+              <a:schemeClr val="phClr">
+                <a:lumMod val="110000"/>
+                <a:satMod val="105000"/>
+                <a:tint val="67000"/>
+              </a:schemeClr>
+            </a:gs>
+            <a:gs pos="50000">
+              <a:schemeClr val="phClr">
+                <a:lumMod val="105000"/>
+                <a:satMod val="103000"/>
+                <a:tint val="73000"/>
+              </a:schemeClr>
+            </a:gs>
+            <a:gs pos="100000">
+              <a:schemeClr val="phClr">
+                <a:lumMod val="105000"/>
+                <a:satMod val="109000"/>
+                <a:tint val="81000"/>
+              </a:schemeClr>
+            </a:gs>
+          </a:gsLst>
+          <a:lin ang="5400000" scaled="0"/>
+        </a:gradFill>
+        <a:gradFill rotWithShape="1">
+          <a:gsLst>
+            <a:gs pos="0">
+              <a:schemeClr val="phClr">
+                <a:satMod val="103000"/>
+                <a:lumMod val="102000"/>
+                <a:tint val="94000"/>
+              </a:schemeClr>
+            </a:gs>
+            <a:gs pos="50000">
+              <a:schemeClr val="phClr">
+                <a:satMod val="110000"/>
+                <a:lumMod val="100000"/>
+                <a:shade val="100000"/>
+              </a:schemeClr>
+            </a:gs>
+            <a:gs pos="100000">
+              <a:schemeClr val="phClr">
+                <a:lumMod val="99000"/>
+                <a:satMod val="120000"/>
+                <a:shade val="78000"/>
+              </a:schemeClr>
+            </a:gs>
+          </a:gsLst>
+          <a:lin ang="5400000" scaled="0"/>
+        </a:gradFill>
+      </a:fillStyleLst>
+      <a:lnStyleLst>
+        <a:ln w="6350" cap="flat" cmpd="sng" algn="ctr">
+          <a:solidFill>
+            <a:schemeClr val="phClr"/>
+          </a:solidFill>
+          <a:prstDash val="solid"/>
+          <a:miter lim="800000"/>
+        </a:ln>
+        <a:ln w="12700" cap="flat" cmpd="sng" algn="ctr">
+          <a:solidFill>
+            <a:schemeClr val="phClr"/>
+          </a:solidFill>
+          <a:prstDash val="solid"/>
+          <a:miter lim="800000"/>
+        </a:ln>
+        <a:ln w="19050" cap="flat" cmpd="sng" algn="ctr">
+          <a:solidFill>
+            <a:schemeClr val="phClr"/>
+          </a:solidFill>
+          <a:prstDash val="solid"/>
+          <a:miter lim="800000"/>
+        </a:ln>
+      </a:lnStyleLst>
+      <a:effectStyleLst>
+        <a:effectStyle>
+          <a:effectLst/>
+        </a:effectStyle>
+        <a:effectStyle>
+          <a:effectLst/>
+        </a:effectStyle>
+        <a:effectStyle>
+          <a:effectLst>
+            <a:outerShdw blurRad="57150" dist="19050" dir="5400000" algn="ctr" rotWithShape="0">
+              <a:srgbClr val="000000">
+                <a:alpha val="63000"/>
+              </a:srgbClr>
+            </a:outerShdw>
+          </a:effectLst>
+        </a:effectStyle>
+      </a:effectStyleLst>
+      <a:bgFillStyleLst>
+        <a:solidFill>
+          <a:schemeClr val="phClr"/>
+        </a:solidFill>
+        <a:solidFill>
+          <a:schemeClr val="phClr">
+            <a:tint val="95000"/>
+            <a:satMod val="170000"/>
+          </a:schemeClr>
+        </a:solidFill>
+        <a:gradFill rotWithShape="1">
+          <a:gsLst>
+            <a:gs pos="0">
+              <a:schemeClr val="phClr">
+                <a:tint val="93000"/>
+                <a:satMod val="150000"/>
+                <a:shade val="98000"/>
+                <a:lumMod val="102000"/>
+              </a:schemeClr>
+            </a:gs>
+            <a:gs pos="50000">
+              <a:schemeClr val="phClr">
+                <a:tint val="98000"/>
+                <a:satMod val="130000"/>
+                <a:shade val="90000"/>
+                <a:lumMod val="103000"/>
+              </a:schemeClr>
+            </a:gs>
+            <a:gs pos="100000">
+              <a:schemeClr val="phClr">
+                <a:shade val="63000"/>
+                <a:satMod val="120000"/>
+              </a:schemeClr>
+            </a:gs>
+          </a:gsLst>
+          <a:lin ang="5400000" scaled="0"/>
+        </a:gradFill>
+      </a:bgFillStyleLst>
+    </a:fmtScheme>
+  </a:themeElements>
+  <a:objectDefaults/>
+  <a:extraClrSchemeLst/>
+  <a:extLst>
+    <a:ext uri="{05A4C25C-085E-4340-85A3-A5531E510DB2}">
+      <thm15:themeFamily xmlns:thm15="http://schemas.microsoft.com/office/thememl/2012/main" name="Office Theme" id="{62F939B6-93AF-4DB8-9C6B-D6C7DFDC589F}" vid="{4A3C46E8-61CC-4603-A589-7422A47A8E4A}"/>
+    </a:ext>
+  </a:extLst>
+</a:theme>
 </file>